--- a/preview_v7/cn/l-cn-bs-u2-8.pptx
+++ b/preview_v7/cn/l-cn-bs-u2-8.pptx
@@ -3140,47 +3140,31 @@
           </a:p>
         </p:txBody>
       </p:sp>
-      <p:sp>
-        <p:nvSpPr>
-          <p:cNvPr id="3" name="TextBox 2"/>
-          <p:cNvSpPr txBox="1"/>
-          <p:nvPr/>
-        </p:nvSpPr>
-        <p:spPr>
-          <a:xfrm>
-            <a:off x="640080" y="640080"/>
-            <a:ext cx="10911535" cy="502920"/>
-          </a:xfrm>
-          <a:prstGeom prst="rect">
-            <a:avLst/>
-          </a:prstGeom>
-          <a:noFill/>
-        </p:spPr>
-        <p:txBody>
-          <a:bodyPr wrap="square" anchor="t" lIns="0" rIns="0" tIns="0" bIns="0">
-            <a:spAutoFit/>
-          </a:bodyPr>
-          <a:lstStyle/>
-          <a:p>
-            <a:pPr algn="l">
-              <a:spcAft>
-                <a:spcPts val="0"/>
-              </a:spcAft>
-            </a:pPr>
-            <a:r>
-              <a:rPr sz="1200" b="1">
-                <a:solidFill>
-                  <a:srgbClr val="B23A2A"/>
-                </a:solidFill>
-                <a:latin typeface="微软雅黑"/>
-                <a:ea typeface="微软雅黑"/>
-                <a:cs typeface="微软雅黑"/>
-              </a:rPr>
-              <a:t>语文 · 必修上册 · 第2单元 劳动光荣</a:t>
-            </a:r>
-          </a:p>
-        </p:txBody>
-      </p:sp>
+      <p:pic>
+        <p:nvPicPr>
+          <p:cNvPr id="3" name="Picture 2" descr="harvest.jpg"/>
+          <p:cNvPicPr>
+            <a:picLocks noChangeAspect="1"/>
+          </p:cNvPicPr>
+          <p:nvPr/>
+        </p:nvPicPr>
+        <p:blipFill>
+          <a:blip r:embed="rId2"/>
+          <a:srcRect t="12499" b="12499"/>
+          <a:stretch>
+            <a:fillRect/>
+          </a:stretch>
+        </p:blipFill>
+        <p:spPr>
+          <a:xfrm>
+            <a:off x="0" y="0"/>
+            <a:ext cx="12191695" cy="6858000"/>
+          </a:xfrm>
+          <a:prstGeom prst="rect">
+            <a:avLst/>
+          </a:prstGeom>
+        </p:spPr>
+      </p:pic>
       <p:sp>
         <p:nvSpPr>
           <p:cNvPr id="4" name="Rectangle 3"/>
@@ -3189,14 +3173,16 @@
         </p:nvSpPr>
         <p:spPr>
           <a:xfrm>
-            <a:off x="640080" y="1207008"/>
-            <a:ext cx="822960" cy="30480"/>
+            <a:off x="0" y="0"/>
+            <a:ext cx="12191695" cy="6858000"/>
           </a:xfrm>
           <a:prstGeom prst="rect">
             <a:avLst/>
           </a:prstGeom>
           <a:solidFill>
-            <a:srgbClr val="B23A2A"/>
+            <a:srgbClr val="1C2A33">
+              <a:alpha val="55000"/>
+            </a:srgbClr>
           </a:solidFill>
           <a:ln>
             <a:noFill/>
@@ -3227,92 +3213,14 @@
       </p:sp>
       <p:sp>
         <p:nvSpPr>
-          <p:cNvPr id="5" name="TextBox 4"/>
-          <p:cNvSpPr txBox="1"/>
-          <p:nvPr/>
-        </p:nvSpPr>
-        <p:spPr>
-          <a:xfrm>
-            <a:off x="640080" y="1737360"/>
-            <a:ext cx="10911535" cy="2011680"/>
-          </a:xfrm>
-          <a:prstGeom prst="rect">
-            <a:avLst/>
-          </a:prstGeom>
-          <a:noFill/>
-        </p:spPr>
-        <p:txBody>
-          <a:bodyPr wrap="square" anchor="t" lIns="0" rIns="0" tIns="0" bIns="0">
-            <a:spAutoFit/>
-          </a:bodyPr>
-          <a:lstStyle/>
-          <a:p>
-            <a:pPr algn="l">
-              <a:lnSpc>
-                <a:spcPct val="115000"/>
-              </a:lnSpc>
-            </a:pPr>
-            <a:r>
-              <a:rPr sz="4000" b="1">
-                <a:solidFill>
-                  <a:srgbClr val="1C2A33"/>
-                </a:solidFill>
-                <a:latin typeface="楷体"/>
-                <a:ea typeface="楷体"/>
-                <a:cs typeface="楷体"/>
-              </a:rPr>
-              <a:t>单元活动——"我身边的劳动者"分享会与单元总结</a:t>
-            </a:r>
-          </a:p>
-        </p:txBody>
-      </p:sp>
-      <p:sp>
-        <p:nvSpPr>
-          <p:cNvPr id="6" name="TextBox 5"/>
-          <p:cNvSpPr txBox="1"/>
-          <p:nvPr/>
-        </p:nvSpPr>
-        <p:spPr>
-          <a:xfrm>
-            <a:off x="640080" y="3840480"/>
-            <a:ext cx="10911535" cy="457200"/>
-          </a:xfrm>
-          <a:prstGeom prst="rect">
-            <a:avLst/>
-          </a:prstGeom>
-          <a:noFill/>
-        </p:spPr>
-        <p:txBody>
-          <a:bodyPr wrap="square" anchor="t" lIns="0" rIns="0" tIns="0" bIns="0">
-            <a:spAutoFit/>
-          </a:bodyPr>
-          <a:lstStyle/>
-          <a:p>
-            <a:pPr algn="l"/>
-            <a:r>
-              <a:rPr sz="1700" b="1">
-                <a:solidFill>
-                  <a:srgbClr val="B23A2A"/>
-                </a:solidFill>
-                <a:latin typeface="微软雅黑"/>
-                <a:ea typeface="微软雅黑"/>
-                <a:cs typeface="微软雅黑"/>
-              </a:rPr>
-              <a:t>单元活动  ·  第8课时  ·  45分钟</a:t>
-            </a:r>
-          </a:p>
-        </p:txBody>
-      </p:sp>
-      <p:sp>
-        <p:nvSpPr>
-          <p:cNvPr id="7" name="Rectangle 6"/>
+          <p:cNvPr id="5" name="Rectangle 4"/>
           <p:cNvSpPr/>
           <p:nvPr/>
         </p:nvSpPr>
         <p:spPr>
           <a:xfrm>
-            <a:off x="640080" y="5394960"/>
-            <a:ext cx="2011680" cy="33020"/>
+            <a:off x="640080" y="1005840"/>
+            <a:ext cx="822960" cy="38100"/>
           </a:xfrm>
           <a:prstGeom prst="rect">
             <a:avLst/>
@@ -3349,14 +3257,14 @@
       </p:sp>
       <p:sp>
         <p:nvSpPr>
-          <p:cNvPr id="8" name="TextBox 7"/>
+          <p:cNvPr id="6" name="TextBox 5"/>
           <p:cNvSpPr txBox="1"/>
           <p:nvPr/>
         </p:nvSpPr>
         <p:spPr>
           <a:xfrm>
-            <a:off x="640080" y="5623560"/>
-            <a:ext cx="10911535" cy="548640"/>
+            <a:off x="640080" y="1188720"/>
+            <a:ext cx="10058400" cy="457200"/>
           </a:xfrm>
           <a:prstGeom prst="rect">
             <a:avLst/>
@@ -3371,15 +3279,89 @@
           <a:p>
             <a:pPr algn="l"/>
             <a:r>
-              <a:rPr sz="1400" b="0">
-                <a:solidFill>
-                  <a:srgbClr val="6B6258"/>
+              <a:rPr sz="1500" b="1">
+                <a:solidFill>
+                  <a:srgbClr val="C8A86B"/>
                 </a:solidFill>
                 <a:latin typeface="微软雅黑"/>
                 <a:ea typeface="微软雅黑"/>
                 <a:cs typeface="微软雅黑"/>
               </a:rPr>
-              <a:t>学习任务群：实用性阅读与交流    |    年级：高一</a:t>
+              <a:t>必修上 第二单元 · 劳动光荣 · 第八课时</a:t>
+            </a:r>
+          </a:p>
+        </p:txBody>
+      </p:sp>
+      <p:sp>
+        <p:nvSpPr>
+          <p:cNvPr id="7" name="TextBox 6"/>
+          <p:cNvSpPr txBox="1"/>
+          <p:nvPr/>
+        </p:nvSpPr>
+        <p:spPr>
+          <a:xfrm>
+            <a:off x="640080" y="1828800"/>
+            <a:ext cx="11247120" cy="1463040"/>
+          </a:xfrm>
+          <a:prstGeom prst="rect">
+            <a:avLst/>
+          </a:prstGeom>
+          <a:noFill/>
+        </p:spPr>
+        <p:txBody>
+          <a:bodyPr wrap="square" anchor="t" lIns="0" rIns="0" tIns="0" bIns="0">
+            <a:spAutoFit/>
+          </a:bodyPr>
+          <a:lstStyle/>
+          <a:p>
+            <a:pPr algn="l"/>
+            <a:r>
+              <a:rPr sz="5200" b="1">
+                <a:solidFill>
+                  <a:srgbClr val="FFFFFF"/>
+                </a:solidFill>
+                <a:latin typeface="楷体"/>
+                <a:ea typeface="楷体"/>
+                <a:cs typeface="楷体"/>
+              </a:rPr>
+              <a:t>单元活动</a:t>
+            </a:r>
+          </a:p>
+        </p:txBody>
+      </p:sp>
+      <p:sp>
+        <p:nvSpPr>
+          <p:cNvPr id="8" name="TextBox 7"/>
+          <p:cNvSpPr txBox="1"/>
+          <p:nvPr/>
+        </p:nvSpPr>
+        <p:spPr>
+          <a:xfrm>
+            <a:off x="640080" y="2788920"/>
+            <a:ext cx="11247120" cy="1097280"/>
+          </a:xfrm>
+          <a:prstGeom prst="rect">
+            <a:avLst/>
+          </a:prstGeom>
+          <a:noFill/>
+        </p:spPr>
+        <p:txBody>
+          <a:bodyPr wrap="square" anchor="t" lIns="0" rIns="0" tIns="0" bIns="0">
+            <a:spAutoFit/>
+          </a:bodyPr>
+          <a:lstStyle/>
+          <a:p>
+            <a:pPr algn="l"/>
+            <a:r>
+              <a:rPr sz="3000" b="1">
+                <a:solidFill>
+                  <a:srgbClr val="C8A86B"/>
+                </a:solidFill>
+                <a:latin typeface="楷体"/>
+                <a:ea typeface="楷体"/>
+                <a:cs typeface="楷体"/>
+              </a:rPr>
+              <a:t>"我身边的劳动者"分享会与单元总结</a:t>
             </a:r>
           </a:p>
         </p:txBody>
@@ -3387,6 +3369,88 @@
       <p:sp>
         <p:nvSpPr>
           <p:cNvPr id="9" name="TextBox 8"/>
+          <p:cNvSpPr txBox="1"/>
+          <p:nvPr/>
+        </p:nvSpPr>
+        <p:spPr>
+          <a:xfrm>
+            <a:off x="640080" y="4160520"/>
+            <a:ext cx="10972800" cy="1005840"/>
+          </a:xfrm>
+          <a:prstGeom prst="rect">
+            <a:avLst/>
+          </a:prstGeom>
+          <a:noFill/>
+        </p:spPr>
+        <p:txBody>
+          <a:bodyPr wrap="square" anchor="t" lIns="0" rIns="0" tIns="0" bIns="0">
+            <a:spAutoFit/>
+          </a:bodyPr>
+          <a:lstStyle/>
+          <a:p>
+            <a:pPr algn="l">
+              <a:lnSpc>
+                <a:spcPct val="140000"/>
+              </a:lnSpc>
+            </a:pPr>
+            <a:r>
+              <a:rPr sz="1700" b="0">
+                <a:solidFill>
+                  <a:srgbClr val="E7DFD2"/>
+                </a:solidFill>
+                <a:latin typeface="楷体"/>
+                <a:ea typeface="楷体"/>
+                <a:cs typeface="楷体"/>
+              </a:rPr>
+              <a:t>把读到的、写到的、说到的，汇成一句话。</a:t>
+            </a:r>
+          </a:p>
+        </p:txBody>
+      </p:sp>
+      <p:sp>
+        <p:nvSpPr>
+          <p:cNvPr id="10" name="TextBox 9"/>
+          <p:cNvSpPr txBox="1"/>
+          <p:nvPr/>
+        </p:nvSpPr>
+        <p:spPr>
+          <a:xfrm>
+            <a:off x="640080" y="4892040"/>
+            <a:ext cx="10972800" cy="914400"/>
+          </a:xfrm>
+          <a:prstGeom prst="rect">
+            <a:avLst/>
+          </a:prstGeom>
+          <a:noFill/>
+        </p:spPr>
+        <p:txBody>
+          <a:bodyPr wrap="square" anchor="t" lIns="0" rIns="0" tIns="0" bIns="0">
+            <a:spAutoFit/>
+          </a:bodyPr>
+          <a:lstStyle/>
+          <a:p>
+            <a:pPr algn="l">
+              <a:lnSpc>
+                <a:spcPct val="140000"/>
+              </a:lnSpc>
+            </a:pPr>
+            <a:r>
+              <a:rPr sz="1600" b="0">
+                <a:solidFill>
+                  <a:srgbClr val="FFFFFF"/>
+                </a:solidFill>
+                <a:latin typeface="楷体"/>
+                <a:ea typeface="楷体"/>
+                <a:cs typeface="楷体"/>
+              </a:rPr>
+              <a:t>一条能力线：读通讯 → 说访谈 → 写通讯 → 改通讯 → 用。</a:t>
+            </a:r>
+          </a:p>
+        </p:txBody>
+      </p:sp>
+      <p:sp>
+        <p:nvSpPr>
+          <p:cNvPr id="11" name="TextBox 10"/>
           <p:cNvSpPr txBox="1"/>
           <p:nvPr/>
         </p:nvSpPr>
@@ -3519,7 +3583,7 @@
                 <a:ea typeface="微软雅黑"/>
                 <a:cs typeface="微软雅黑"/>
               </a:rPr>
-              <a:t>学习目标</a:t>
+              <a:t>本课目标</a:t>
             </a:r>
           </a:p>
         </p:txBody>
@@ -3570,14 +3634,51 @@
       </p:sp>
       <p:sp>
         <p:nvSpPr>
-          <p:cNvPr id="5" name="Rounded Rectangle 4"/>
+          <p:cNvPr id="5" name="TextBox 4"/>
+          <p:cNvSpPr txBox="1"/>
+          <p:nvPr/>
+        </p:nvSpPr>
+        <p:spPr>
+          <a:xfrm>
+            <a:off x="640080" y="1325880"/>
+            <a:ext cx="10058400" cy="640080"/>
+          </a:xfrm>
+          <a:prstGeom prst="rect">
+            <a:avLst/>
+          </a:prstGeom>
+          <a:noFill/>
+        </p:spPr>
+        <p:txBody>
+          <a:bodyPr wrap="square" anchor="t" lIns="0" rIns="0" tIns="0" bIns="0">
+            <a:spAutoFit/>
+          </a:bodyPr>
+          <a:lstStyle/>
+          <a:p>
+            <a:pPr algn="l"/>
+            <a:r>
+              <a:rPr sz="3200" b="1">
+                <a:solidFill>
+                  <a:srgbClr val="1C2A33"/>
+                </a:solidFill>
+                <a:latin typeface="楷体"/>
+                <a:ea typeface="楷体"/>
+                <a:cs typeface="楷体"/>
+              </a:rPr>
+              <a:t>四向学习目标</a:t>
+            </a:r>
+          </a:p>
+        </p:txBody>
+      </p:sp>
+      <p:sp>
+        <p:nvSpPr>
+          <p:cNvPr id="6" name="Rounded Rectangle 5"/>
           <p:cNvSpPr/>
           <p:nvPr/>
         </p:nvSpPr>
         <p:spPr>
           <a:xfrm>
-            <a:off x="640080" y="1417320"/>
-            <a:ext cx="5349240" cy="2057400"/>
+            <a:off x="640080" y="2377440"/>
+            <a:ext cx="2453563" cy="3291840"/>
           </a:xfrm>
           <a:prstGeom prst="roundRect">
             <a:avLst/>
@@ -3585,7 +3686,7 @@
           <a:solidFill>
             <a:srgbClr val="FFFFFF"/>
           </a:solidFill>
-          <a:ln w="22860">
+          <a:ln w="20320">
             <a:solidFill>
               <a:srgbClr val="B23A2A"/>
             </a:solidFill>
@@ -3616,14 +3717,14 @@
       </p:sp>
       <p:sp>
         <p:nvSpPr>
-          <p:cNvPr id="6" name="Oval 5"/>
+          <p:cNvPr id="7" name="Oval 6"/>
           <p:cNvSpPr/>
           <p:nvPr/>
         </p:nvSpPr>
         <p:spPr>
           <a:xfrm>
-            <a:off x="804672" y="1581912"/>
-            <a:ext cx="457200" cy="457200"/>
+            <a:off x="1455381" y="2697480"/>
+            <a:ext cx="822960" cy="822960"/>
           </a:xfrm>
           <a:prstGeom prst="ellipse">
             <a:avLst/>
@@ -3660,14 +3761,14 @@
       </p:sp>
       <p:sp>
         <p:nvSpPr>
-          <p:cNvPr id="7" name="TextBox 6"/>
+          <p:cNvPr id="8" name="TextBox 7"/>
           <p:cNvSpPr txBox="1"/>
           <p:nvPr/>
         </p:nvSpPr>
         <p:spPr>
           <a:xfrm>
-            <a:off x="804672" y="1636776"/>
-            <a:ext cx="457200" cy="384048"/>
+            <a:off x="1455381" y="2880360"/>
+            <a:ext cx="822960" cy="457200"/>
           </a:xfrm>
           <a:prstGeom prst="rect">
             <a:avLst/>
@@ -3682,29 +3783,66 @@
           <a:p>
             <a:pPr algn="ctr"/>
             <a:r>
-              <a:rPr sz="1600" b="1">
+              <a:rPr sz="2400" b="1">
                 <a:solidFill>
                   <a:srgbClr val="FFFFFF"/>
+                </a:solidFill>
+                <a:latin typeface="楷体"/>
+                <a:ea typeface="楷体"/>
+                <a:cs typeface="楷体"/>
+              </a:rPr>
+              <a:t>1</a:t>
+            </a:r>
+          </a:p>
+        </p:txBody>
+      </p:sp>
+      <p:sp>
+        <p:nvSpPr>
+          <p:cNvPr id="9" name="TextBox 8"/>
+          <p:cNvSpPr txBox="1"/>
+          <p:nvPr/>
+        </p:nvSpPr>
+        <p:spPr>
+          <a:xfrm>
+            <a:off x="822960" y="3749040"/>
+            <a:ext cx="2087803" cy="548640"/>
+          </a:xfrm>
+          <a:prstGeom prst="rect">
+            <a:avLst/>
+          </a:prstGeom>
+          <a:noFill/>
+        </p:spPr>
+        <p:txBody>
+          <a:bodyPr wrap="square" anchor="t" lIns="0" rIns="0" tIns="0" bIns="0">
+            <a:spAutoFit/>
+          </a:bodyPr>
+          <a:lstStyle/>
+          <a:p>
+            <a:pPr algn="ctr"/>
+            <a:r>
+              <a:rPr sz="1800" b="1">
+                <a:solidFill>
+                  <a:srgbClr val="B23A2A"/>
                 </a:solidFill>
                 <a:latin typeface="微软雅黑"/>
                 <a:ea typeface="微软雅黑"/>
                 <a:cs typeface="微软雅黑"/>
               </a:rPr>
-              <a:t>1</a:t>
-            </a:r>
-          </a:p>
-        </p:txBody>
-      </p:sp>
-      <p:sp>
-        <p:nvSpPr>
-          <p:cNvPr id="8" name="TextBox 7"/>
+              <a:t>语言能力</a:t>
+            </a:r>
+          </a:p>
+        </p:txBody>
+      </p:sp>
+      <p:sp>
+        <p:nvSpPr>
+          <p:cNvPr id="10" name="TextBox 9"/>
           <p:cNvSpPr txBox="1"/>
           <p:nvPr/>
         </p:nvSpPr>
         <p:spPr>
           <a:xfrm>
-            <a:off x="1371600" y="1527048"/>
-            <a:ext cx="4434840" cy="457200"/>
+            <a:off x="841248" y="4343400"/>
+            <a:ext cx="2051227" cy="1188720"/>
           </a:xfrm>
           <a:prstGeom prst="rect">
             <a:avLst/>
@@ -3717,54 +3855,13 @@
           </a:bodyPr>
           <a:lstStyle/>
           <a:p>
-            <a:pPr algn="l">
+            <a:pPr algn="ctr">
               <a:lnSpc>
-                <a:spcPct val="110000"/>
+                <a:spcPct val="145000"/>
               </a:lnSpc>
             </a:pPr>
             <a:r>
-              <a:rPr sz="1600" b="1">
-                <a:solidFill>
-                  <a:srgbClr val="1C2A33"/>
-                </a:solidFill>
-                <a:latin typeface="微软雅黑"/>
-                <a:ea typeface="微软雅黑"/>
-                <a:cs typeface="微软雅黑"/>
-              </a:rPr>
-              <a:t>目标</a:t>
-            </a:r>
-          </a:p>
-        </p:txBody>
-      </p:sp>
-      <p:sp>
-        <p:nvSpPr>
-          <p:cNvPr id="9" name="TextBox 8"/>
-          <p:cNvSpPr txBox="1"/>
-          <p:nvPr/>
-        </p:nvSpPr>
-        <p:spPr>
-          <a:xfrm>
-            <a:off x="1371600" y="1965960"/>
-            <a:ext cx="4434840" cy="1417320"/>
-          </a:xfrm>
-          <a:prstGeom prst="rect">
-            <a:avLst/>
-          </a:prstGeom>
-          <a:noFill/>
-        </p:spPr>
-        <p:txBody>
-          <a:bodyPr wrap="square" anchor="t" lIns="0" rIns="0" tIns="0" bIns="0">
-            <a:spAutoFit/>
-          </a:bodyPr>
-          <a:lstStyle/>
-          <a:p>
-            <a:pPr algn="l">
-              <a:lnSpc>
-                <a:spcPct val="128000"/>
-              </a:lnSpc>
-            </a:pPr>
-            <a:r>
-              <a:rPr sz="1200" b="0">
+              <a:rPr sz="1300" b="0">
                 <a:solidFill>
                   <a:srgbClr val="1C2A33"/>
                 </a:solidFill>
@@ -3772,21 +3869,21 @@
                 <a:ea typeface="楷体"/>
                 <a:cs typeface="楷体"/>
               </a:rPr>
-              <a:t>语言能力：能用口语讲述一个身边劳动者的故事（2分钟），做到有细节、有精神、不念稿。</a:t>
-            </a:r>
-          </a:p>
-        </p:txBody>
-      </p:sp>
-      <p:sp>
-        <p:nvSpPr>
-          <p:cNvPr id="10" name="Rounded Rectangle 9"/>
+              <a:t>用口语讲述一个身边劳动者的故事（2分钟），做到有细节、有精神、不念稿。</a:t>
+            </a:r>
+          </a:p>
+        </p:txBody>
+      </p:sp>
+      <p:sp>
+        <p:nvSpPr>
+          <p:cNvPr id="11" name="Rounded Rectangle 10"/>
           <p:cNvSpPr/>
           <p:nvPr/>
         </p:nvSpPr>
         <p:spPr>
           <a:xfrm>
-            <a:off x="6263640" y="1417320"/>
-            <a:ext cx="5349240" cy="2057400"/>
+            <a:off x="3459403" y="2377440"/>
+            <a:ext cx="2453563" cy="3291840"/>
           </a:xfrm>
           <a:prstGeom prst="roundRect">
             <a:avLst/>
@@ -3794,9 +3891,9 @@
           <a:solidFill>
             <a:srgbClr val="FFFFFF"/>
           </a:solidFill>
-          <a:ln w="22860">
+          <a:ln w="20320">
             <a:solidFill>
-              <a:srgbClr val="B23A2A"/>
+              <a:srgbClr val="2E7D6B"/>
             </a:solidFill>
           </a:ln>
           <a:effectLst/>
@@ -3825,20 +3922,20 @@
       </p:sp>
       <p:sp>
         <p:nvSpPr>
-          <p:cNvPr id="11" name="Oval 10"/>
+          <p:cNvPr id="12" name="Oval 11"/>
           <p:cNvSpPr/>
           <p:nvPr/>
         </p:nvSpPr>
         <p:spPr>
           <a:xfrm>
-            <a:off x="6428232" y="1581912"/>
-            <a:ext cx="457200" cy="457200"/>
+            <a:off x="4274705" y="2697480"/>
+            <a:ext cx="822960" cy="822960"/>
           </a:xfrm>
           <a:prstGeom prst="ellipse">
             <a:avLst/>
           </a:prstGeom>
           <a:solidFill>
-            <a:srgbClr val="B23A2A"/>
+            <a:srgbClr val="2E7D6B"/>
           </a:solidFill>
           <a:ln>
             <a:noFill/>
@@ -3869,14 +3966,14 @@
       </p:sp>
       <p:sp>
         <p:nvSpPr>
-          <p:cNvPr id="12" name="TextBox 11"/>
+          <p:cNvPr id="13" name="TextBox 12"/>
           <p:cNvSpPr txBox="1"/>
           <p:nvPr/>
         </p:nvSpPr>
         <p:spPr>
           <a:xfrm>
-            <a:off x="6428232" y="1636776"/>
-            <a:ext cx="457200" cy="384048"/>
+            <a:off x="4274705" y="2880360"/>
+            <a:ext cx="822960" cy="457200"/>
           </a:xfrm>
           <a:prstGeom prst="rect">
             <a:avLst/>
@@ -3891,29 +3988,66 @@
           <a:p>
             <a:pPr algn="ctr"/>
             <a:r>
-              <a:rPr sz="1600" b="1">
+              <a:rPr sz="2400" b="1">
                 <a:solidFill>
                   <a:srgbClr val="FFFFFF"/>
+                </a:solidFill>
+                <a:latin typeface="楷体"/>
+                <a:ea typeface="楷体"/>
+                <a:cs typeface="楷体"/>
+              </a:rPr>
+              <a:t>2</a:t>
+            </a:r>
+          </a:p>
+        </p:txBody>
+      </p:sp>
+      <p:sp>
+        <p:nvSpPr>
+          <p:cNvPr id="14" name="TextBox 13"/>
+          <p:cNvSpPr txBox="1"/>
+          <p:nvPr/>
+        </p:nvSpPr>
+        <p:spPr>
+          <a:xfrm>
+            <a:off x="3642283" y="3749040"/>
+            <a:ext cx="2087803" cy="548640"/>
+          </a:xfrm>
+          <a:prstGeom prst="rect">
+            <a:avLst/>
+          </a:prstGeom>
+          <a:noFill/>
+        </p:spPr>
+        <p:txBody>
+          <a:bodyPr wrap="square" anchor="t" lIns="0" rIns="0" tIns="0" bIns="0">
+            <a:spAutoFit/>
+          </a:bodyPr>
+          <a:lstStyle/>
+          <a:p>
+            <a:pPr algn="ctr"/>
+            <a:r>
+              <a:rPr sz="1800" b="1">
+                <a:solidFill>
+                  <a:srgbClr val="2E7D6B"/>
                 </a:solidFill>
                 <a:latin typeface="微软雅黑"/>
                 <a:ea typeface="微软雅黑"/>
                 <a:cs typeface="微软雅黑"/>
               </a:rPr>
-              <a:t>2</a:t>
-            </a:r>
-          </a:p>
-        </p:txBody>
-      </p:sp>
-      <p:sp>
-        <p:nvSpPr>
-          <p:cNvPr id="13" name="TextBox 12"/>
+              <a:t>文化意识</a:t>
+            </a:r>
+          </a:p>
+        </p:txBody>
+      </p:sp>
+      <p:sp>
+        <p:nvSpPr>
+          <p:cNvPr id="15" name="TextBox 14"/>
           <p:cNvSpPr txBox="1"/>
           <p:nvPr/>
         </p:nvSpPr>
         <p:spPr>
           <a:xfrm>
-            <a:off x="6995160" y="1527048"/>
-            <a:ext cx="4434840" cy="457200"/>
+            <a:off x="3660571" y="4343400"/>
+            <a:ext cx="2051227" cy="1188720"/>
           </a:xfrm>
           <a:prstGeom prst="rect">
             <a:avLst/>
@@ -3926,54 +4060,13 @@
           </a:bodyPr>
           <a:lstStyle/>
           <a:p>
-            <a:pPr algn="l">
+            <a:pPr algn="ctr">
               <a:lnSpc>
-                <a:spcPct val="110000"/>
+                <a:spcPct val="145000"/>
               </a:lnSpc>
             </a:pPr>
             <a:r>
-              <a:rPr sz="1600" b="1">
-                <a:solidFill>
-                  <a:srgbClr val="1C2A33"/>
-                </a:solidFill>
-                <a:latin typeface="微软雅黑"/>
-                <a:ea typeface="微软雅黑"/>
-                <a:cs typeface="微软雅黑"/>
-              </a:rPr>
-              <a:t>目标</a:t>
-            </a:r>
-          </a:p>
-        </p:txBody>
-      </p:sp>
-      <p:sp>
-        <p:nvSpPr>
-          <p:cNvPr id="14" name="TextBox 13"/>
-          <p:cNvSpPr txBox="1"/>
-          <p:nvPr/>
-        </p:nvSpPr>
-        <p:spPr>
-          <a:xfrm>
-            <a:off x="6995160" y="1965960"/>
-            <a:ext cx="4434840" cy="1417320"/>
-          </a:xfrm>
-          <a:prstGeom prst="rect">
-            <a:avLst/>
-          </a:prstGeom>
-          <a:noFill/>
-        </p:spPr>
-        <p:txBody>
-          <a:bodyPr wrap="square" anchor="t" lIns="0" rIns="0" tIns="0" bIns="0">
-            <a:spAutoFit/>
-          </a:bodyPr>
-          <a:lstStyle/>
-          <a:p>
-            <a:pPr algn="l">
-              <a:lnSpc>
-                <a:spcPct val="128000"/>
-              </a:lnSpc>
-            </a:pPr>
-            <a:r>
-              <a:rPr sz="1400" b="0">
+              <a:rPr sz="1300" b="0">
                 <a:solidFill>
                   <a:srgbClr val="1C2A33"/>
                 </a:solidFill>
@@ -3981,21 +4074,21 @@
                 <a:ea typeface="楷体"/>
                 <a:cs typeface="楷体"/>
               </a:rPr>
-              <a:t>文化意识：在分享与倾听中深化对「劳动光荣」的体认，从概念认知走向情感认同。</a:t>
-            </a:r>
-          </a:p>
-        </p:txBody>
-      </p:sp>
-      <p:sp>
-        <p:nvSpPr>
-          <p:cNvPr id="15" name="Rounded Rectangle 14"/>
+              <a:t>在分享与倾听中深化对"劳动光荣"的体认，从概念走向情感认同。</a:t>
+            </a:r>
+          </a:p>
+        </p:txBody>
+      </p:sp>
+      <p:sp>
+        <p:nvSpPr>
+          <p:cNvPr id="16" name="Rounded Rectangle 15"/>
           <p:cNvSpPr/>
           <p:nvPr/>
         </p:nvSpPr>
         <p:spPr>
           <a:xfrm>
-            <a:off x="640080" y="3703320"/>
-            <a:ext cx="5349240" cy="2057400"/>
+            <a:off x="6278727" y="2377440"/>
+            <a:ext cx="2453563" cy="3291840"/>
           </a:xfrm>
           <a:prstGeom prst="roundRect">
             <a:avLst/>
@@ -4003,9 +4096,9 @@
           <a:solidFill>
             <a:srgbClr val="FFFFFF"/>
           </a:solidFill>
-          <a:ln w="22860">
+          <a:ln w="20320">
             <a:solidFill>
-              <a:srgbClr val="B23A2A"/>
+              <a:srgbClr val="C8A86B"/>
             </a:solidFill>
           </a:ln>
           <a:effectLst/>
@@ -4034,20 +4127,20 @@
       </p:sp>
       <p:sp>
         <p:nvSpPr>
-          <p:cNvPr id="16" name="Oval 15"/>
+          <p:cNvPr id="17" name="Oval 16"/>
           <p:cNvSpPr/>
           <p:nvPr/>
         </p:nvSpPr>
         <p:spPr>
           <a:xfrm>
-            <a:off x="804672" y="3867912"/>
-            <a:ext cx="457200" cy="457200"/>
+            <a:off x="7094029" y="2697480"/>
+            <a:ext cx="822960" cy="822960"/>
           </a:xfrm>
           <a:prstGeom prst="ellipse">
             <a:avLst/>
           </a:prstGeom>
           <a:solidFill>
-            <a:srgbClr val="B23A2A"/>
+            <a:srgbClr val="C8A86B"/>
           </a:solidFill>
           <a:ln>
             <a:noFill/>
@@ -4078,14 +4171,14 @@
       </p:sp>
       <p:sp>
         <p:nvSpPr>
-          <p:cNvPr id="17" name="TextBox 16"/>
+          <p:cNvPr id="18" name="TextBox 17"/>
           <p:cNvSpPr txBox="1"/>
           <p:nvPr/>
         </p:nvSpPr>
         <p:spPr>
           <a:xfrm>
-            <a:off x="804672" y="3922776"/>
-            <a:ext cx="457200" cy="384048"/>
+            <a:off x="7094029" y="2880360"/>
+            <a:ext cx="822960" cy="457200"/>
           </a:xfrm>
           <a:prstGeom prst="rect">
             <a:avLst/>
@@ -4100,29 +4193,66 @@
           <a:p>
             <a:pPr algn="ctr"/>
             <a:r>
-              <a:rPr sz="1600" b="1">
+              <a:rPr sz="2400" b="1">
                 <a:solidFill>
                   <a:srgbClr val="FFFFFF"/>
+                </a:solidFill>
+                <a:latin typeface="楷体"/>
+                <a:ea typeface="楷体"/>
+                <a:cs typeface="楷体"/>
+              </a:rPr>
+              <a:t>3</a:t>
+            </a:r>
+          </a:p>
+        </p:txBody>
+      </p:sp>
+      <p:sp>
+        <p:nvSpPr>
+          <p:cNvPr id="19" name="TextBox 18"/>
+          <p:cNvSpPr txBox="1"/>
+          <p:nvPr/>
+        </p:nvSpPr>
+        <p:spPr>
+          <a:xfrm>
+            <a:off x="6461607" y="3749040"/>
+            <a:ext cx="2087803" cy="548640"/>
+          </a:xfrm>
+          <a:prstGeom prst="rect">
+            <a:avLst/>
+          </a:prstGeom>
+          <a:noFill/>
+        </p:spPr>
+        <p:txBody>
+          <a:bodyPr wrap="square" anchor="t" lIns="0" rIns="0" tIns="0" bIns="0">
+            <a:spAutoFit/>
+          </a:bodyPr>
+          <a:lstStyle/>
+          <a:p>
+            <a:pPr algn="ctr"/>
+            <a:r>
+              <a:rPr sz="1800" b="1">
+                <a:solidFill>
+                  <a:srgbClr val="C8A86B"/>
                 </a:solidFill>
                 <a:latin typeface="微软雅黑"/>
                 <a:ea typeface="微软雅黑"/>
                 <a:cs typeface="微软雅黑"/>
               </a:rPr>
-              <a:t>3</a:t>
-            </a:r>
-          </a:p>
-        </p:txBody>
-      </p:sp>
-      <p:sp>
-        <p:nvSpPr>
-          <p:cNvPr id="18" name="TextBox 17"/>
+              <a:t>思维品质</a:t>
+            </a:r>
+          </a:p>
+        </p:txBody>
+      </p:sp>
+      <p:sp>
+        <p:nvSpPr>
+          <p:cNvPr id="20" name="TextBox 19"/>
           <p:cNvSpPr txBox="1"/>
           <p:nvPr/>
         </p:nvSpPr>
         <p:spPr>
           <a:xfrm>
-            <a:off x="1371600" y="3813048"/>
-            <a:ext cx="4434840" cy="457200"/>
+            <a:off x="6479895" y="4343400"/>
+            <a:ext cx="2051227" cy="1188720"/>
           </a:xfrm>
           <a:prstGeom prst="rect">
             <a:avLst/>
@@ -4135,54 +4265,13 @@
           </a:bodyPr>
           <a:lstStyle/>
           <a:p>
-            <a:pPr algn="l">
+            <a:pPr algn="ctr">
               <a:lnSpc>
-                <a:spcPct val="110000"/>
+                <a:spcPct val="145000"/>
               </a:lnSpc>
             </a:pPr>
             <a:r>
-              <a:rPr sz="1600" b="1">
-                <a:solidFill>
-                  <a:srgbClr val="1C2A33"/>
-                </a:solidFill>
-                <a:latin typeface="微软雅黑"/>
-                <a:ea typeface="微软雅黑"/>
-                <a:cs typeface="微软雅黑"/>
-              </a:rPr>
-              <a:t>目标</a:t>
-            </a:r>
-          </a:p>
-        </p:txBody>
-      </p:sp>
-      <p:sp>
-        <p:nvSpPr>
-          <p:cNvPr id="19" name="TextBox 18"/>
-          <p:cNvSpPr txBox="1"/>
-          <p:nvPr/>
-        </p:nvSpPr>
-        <p:spPr>
-          <a:xfrm>
-            <a:off x="1371600" y="4251960"/>
-            <a:ext cx="4434840" cy="1417320"/>
-          </a:xfrm>
-          <a:prstGeom prst="rect">
-            <a:avLst/>
-          </a:prstGeom>
-          <a:noFill/>
-        </p:spPr>
-        <p:txBody>
-          <a:bodyPr wrap="square" anchor="t" lIns="0" rIns="0" tIns="0" bIns="0">
-            <a:spAutoFit/>
-          </a:bodyPr>
-          <a:lstStyle/>
-          <a:p>
-            <a:pPr algn="l">
-              <a:lnSpc>
-                <a:spcPct val="128000"/>
-              </a:lnSpc>
-            </a:pPr>
-            <a:r>
-              <a:rPr sz="1400" b="0">
+              <a:rPr sz="1300" b="0">
                 <a:solidFill>
                   <a:srgbClr val="1C2A33"/>
                 </a:solidFill>
@@ -4190,21 +4279,21 @@
                 <a:ea typeface="楷体"/>
                 <a:cs typeface="楷体"/>
               </a:rPr>
-              <a:t>思维品质：通过填写单元学习反思单，梳理8课时学习路径，培养元认知与自我评价能力。</a:t>
-            </a:r>
-          </a:p>
-        </p:txBody>
-      </p:sp>
-      <p:sp>
-        <p:nvSpPr>
-          <p:cNvPr id="20" name="Rounded Rectangle 19"/>
+              <a:t>填写单元学习反思单，梳理8课时路径，培养自我评价与元认知能力。</a:t>
+            </a:r>
+          </a:p>
+        </p:txBody>
+      </p:sp>
+      <p:sp>
+        <p:nvSpPr>
+          <p:cNvPr id="21" name="Rounded Rectangle 20"/>
           <p:cNvSpPr/>
           <p:nvPr/>
         </p:nvSpPr>
         <p:spPr>
           <a:xfrm>
-            <a:off x="6263640" y="3703320"/>
-            <a:ext cx="5349240" cy="2057400"/>
+            <a:off x="9098051" y="2377440"/>
+            <a:ext cx="2453563" cy="3291840"/>
           </a:xfrm>
           <a:prstGeom prst="roundRect">
             <a:avLst/>
@@ -4212,9 +4301,9 @@
           <a:solidFill>
             <a:srgbClr val="FFFFFF"/>
           </a:solidFill>
-          <a:ln w="22860">
+          <a:ln w="20320">
             <a:solidFill>
-              <a:srgbClr val="B23A2A"/>
+              <a:srgbClr val="6B6258"/>
             </a:solidFill>
           </a:ln>
           <a:effectLst/>
@@ -4243,20 +4332,20 @@
       </p:sp>
       <p:sp>
         <p:nvSpPr>
-          <p:cNvPr id="21" name="Oval 20"/>
+          <p:cNvPr id="22" name="Oval 21"/>
           <p:cNvSpPr/>
           <p:nvPr/>
         </p:nvSpPr>
         <p:spPr>
           <a:xfrm>
-            <a:off x="6428232" y="3867912"/>
-            <a:ext cx="457200" cy="457200"/>
+            <a:off x="9913353" y="2697480"/>
+            <a:ext cx="822960" cy="822960"/>
           </a:xfrm>
           <a:prstGeom prst="ellipse">
             <a:avLst/>
           </a:prstGeom>
           <a:solidFill>
-            <a:srgbClr val="B23A2A"/>
+            <a:srgbClr val="6B6258"/>
           </a:solidFill>
           <a:ln>
             <a:noFill/>
@@ -4287,14 +4376,14 @@
       </p:sp>
       <p:sp>
         <p:nvSpPr>
-          <p:cNvPr id="22" name="TextBox 21"/>
+          <p:cNvPr id="23" name="TextBox 22"/>
           <p:cNvSpPr txBox="1"/>
           <p:nvPr/>
         </p:nvSpPr>
         <p:spPr>
           <a:xfrm>
-            <a:off x="6428232" y="3922776"/>
-            <a:ext cx="457200" cy="384048"/>
+            <a:off x="9913353" y="2880360"/>
+            <a:ext cx="822960" cy="457200"/>
           </a:xfrm>
           <a:prstGeom prst="rect">
             <a:avLst/>
@@ -4309,29 +4398,66 @@
           <a:p>
             <a:pPr algn="ctr"/>
             <a:r>
-              <a:rPr sz="1600" b="1">
+              <a:rPr sz="2400" b="1">
                 <a:solidFill>
                   <a:srgbClr val="FFFFFF"/>
+                </a:solidFill>
+                <a:latin typeface="楷体"/>
+                <a:ea typeface="楷体"/>
+                <a:cs typeface="楷体"/>
+              </a:rPr>
+              <a:t>4</a:t>
+            </a:r>
+          </a:p>
+        </p:txBody>
+      </p:sp>
+      <p:sp>
+        <p:nvSpPr>
+          <p:cNvPr id="24" name="TextBox 23"/>
+          <p:cNvSpPr txBox="1"/>
+          <p:nvPr/>
+        </p:nvSpPr>
+        <p:spPr>
+          <a:xfrm>
+            <a:off x="9280931" y="3749040"/>
+            <a:ext cx="2087803" cy="548640"/>
+          </a:xfrm>
+          <a:prstGeom prst="rect">
+            <a:avLst/>
+          </a:prstGeom>
+          <a:noFill/>
+        </p:spPr>
+        <p:txBody>
+          <a:bodyPr wrap="square" anchor="t" lIns="0" rIns="0" tIns="0" bIns="0">
+            <a:spAutoFit/>
+          </a:bodyPr>
+          <a:lstStyle/>
+          <a:p>
+            <a:pPr algn="ctr"/>
+            <a:r>
+              <a:rPr sz="1800" b="1">
+                <a:solidFill>
+                  <a:srgbClr val="6B6258"/>
                 </a:solidFill>
                 <a:latin typeface="微软雅黑"/>
                 <a:ea typeface="微软雅黑"/>
                 <a:cs typeface="微软雅黑"/>
               </a:rPr>
-              <a:t>4</a:t>
-            </a:r>
-          </a:p>
-        </p:txBody>
-      </p:sp>
-      <p:sp>
-        <p:nvSpPr>
-          <p:cNvPr id="23" name="TextBox 22"/>
+              <a:t>学习能力</a:t>
+            </a:r>
+          </a:p>
+        </p:txBody>
+      </p:sp>
+      <p:sp>
+        <p:nvSpPr>
+          <p:cNvPr id="25" name="TextBox 24"/>
           <p:cNvSpPr txBox="1"/>
           <p:nvPr/>
         </p:nvSpPr>
         <p:spPr>
           <a:xfrm>
-            <a:off x="6995160" y="3813048"/>
-            <a:ext cx="4434840" cy="457200"/>
+            <a:off x="9299219" y="4343400"/>
+            <a:ext cx="2051227" cy="1188720"/>
           </a:xfrm>
           <a:prstGeom prst="rect">
             <a:avLst/>
@@ -4344,54 +4470,13 @@
           </a:bodyPr>
           <a:lstStyle/>
           <a:p>
-            <a:pPr algn="l">
+            <a:pPr algn="ctr">
               <a:lnSpc>
-                <a:spcPct val="110000"/>
+                <a:spcPct val="145000"/>
               </a:lnSpc>
             </a:pPr>
             <a:r>
-              <a:rPr sz="1600" b="1">
-                <a:solidFill>
-                  <a:srgbClr val="1C2A33"/>
-                </a:solidFill>
-                <a:latin typeface="微软雅黑"/>
-                <a:ea typeface="微软雅黑"/>
-                <a:cs typeface="微软雅黑"/>
-              </a:rPr>
-              <a:t>目标</a:t>
-            </a:r>
-          </a:p>
-        </p:txBody>
-      </p:sp>
-      <p:sp>
-        <p:nvSpPr>
-          <p:cNvPr id="24" name="TextBox 23"/>
-          <p:cNvSpPr txBox="1"/>
-          <p:nvPr/>
-        </p:nvSpPr>
-        <p:spPr>
-          <a:xfrm>
-            <a:off x="6995160" y="4251960"/>
-            <a:ext cx="4434840" cy="1417320"/>
-          </a:xfrm>
-          <a:prstGeom prst="rect">
-            <a:avLst/>
-          </a:prstGeom>
-          <a:noFill/>
-        </p:spPr>
-        <p:txBody>
-          <a:bodyPr wrap="square" anchor="t" lIns="0" rIns="0" tIns="0" bIns="0">
-            <a:spAutoFit/>
-          </a:bodyPr>
-          <a:lstStyle/>
-          <a:p>
-            <a:pPr algn="l">
-              <a:lnSpc>
-                <a:spcPct val="128000"/>
-              </a:lnSpc>
-            </a:pPr>
-            <a:r>
-              <a:rPr sz="1200" b="0">
+              <a:rPr sz="1300" b="0">
                 <a:solidFill>
                   <a:srgbClr val="1C2A33"/>
                 </a:solidFill>
@@ -4399,14 +4484,14 @@
                 <a:ea typeface="楷体"/>
                 <a:cs typeface="楷体"/>
               </a:rPr>
-              <a:t>学习能力：能将阅读所得（通讯品析）、口语所得（访谈技巧）、写作所得（通讯写作）整合为单元学习成果。</a:t>
-            </a:r>
-          </a:p>
-        </p:txBody>
-      </p:sp>
-      <p:sp>
-        <p:nvSpPr>
-          <p:cNvPr id="25" name="TextBox 24"/>
+              <a:t>把阅读所得、口语所得、写作所得整合为一份单元学习成果。</a:t>
+            </a:r>
+          </a:p>
+        </p:txBody>
+      </p:sp>
+      <p:sp>
+        <p:nvSpPr>
+          <p:cNvPr id="26" name="TextBox 25"/>
           <p:cNvSpPr txBox="1"/>
           <p:nvPr/>
         </p:nvSpPr>
@@ -4533,13 +4618,13 @@
             <a:r>
               <a:rPr sz="1300" b="1">
                 <a:solidFill>
-                  <a:srgbClr val="2E7D6B"/>
+                  <a:srgbClr val="B23A2A"/>
                 </a:solidFill>
                 <a:latin typeface="微软雅黑"/>
                 <a:ea typeface="微软雅黑"/>
                 <a:cs typeface="微软雅黑"/>
               </a:rPr>
-              <a:t>课文背景</a:t>
+              <a:t>承前启后 · 单元收官</a:t>
             </a:r>
           </a:p>
         </p:txBody>
@@ -4559,7 +4644,7 @@
             <a:avLst/>
           </a:prstGeom>
           <a:solidFill>
-            <a:srgbClr val="2E7D6B"/>
+            <a:srgbClr val="B23A2A"/>
           </a:solidFill>
           <a:ln>
             <a:noFill/>
@@ -4596,8 +4681,49 @@
         </p:nvSpPr>
         <p:spPr>
           <a:xfrm>
-            <a:off x="640080" y="1508760"/>
-            <a:ext cx="6766560" cy="4572000"/>
+            <a:off x="640080" y="1783080"/>
+            <a:ext cx="5227167" cy="548640"/>
+          </a:xfrm>
+          <a:prstGeom prst="rect">
+            <a:avLst/>
+          </a:prstGeom>
+          <a:noFill/>
+        </p:spPr>
+        <p:txBody>
+          <a:bodyPr wrap="square" anchor="t" lIns="0" rIns="0" tIns="0" bIns="0">
+            <a:spAutoFit/>
+          </a:bodyPr>
+          <a:lstStyle/>
+          <a:p>
+            <a:pPr algn="l">
+              <a:spcAft>
+                <a:spcPts val="600"/>
+              </a:spcAft>
+            </a:pPr>
+            <a:r>
+              <a:rPr sz="2000" b="1">
+                <a:solidFill>
+                  <a:srgbClr val="B23A2A"/>
+                </a:solidFill>
+                <a:latin typeface="楷体"/>
+                <a:ea typeface="楷体"/>
+                <a:cs typeface="楷体"/>
+              </a:rPr>
+              <a:t>从读到说，今天收口</a:t>
+            </a:r>
+          </a:p>
+        </p:txBody>
+      </p:sp>
+      <p:sp>
+        <p:nvSpPr>
+          <p:cNvPr id="6" name="TextBox 5"/>
+          <p:cNvSpPr txBox="1"/>
+          <p:nvPr/>
+        </p:nvSpPr>
+        <p:spPr>
+          <a:xfrm>
+            <a:off x="640080" y="2423160"/>
+            <a:ext cx="5227167" cy="4206240"/>
           </a:xfrm>
           <a:prstGeom prst="rect">
             <a:avLst/>
@@ -4615,11 +4741,11 @@
                 <a:spcPct val="150000"/>
               </a:lnSpc>
               <a:spcAft>
-                <a:spcPts val="600"/>
+                <a:spcPts val="800"/>
               </a:spcAft>
             </a:pPr>
             <a:r>
-              <a:rPr sz="1600" b="0">
+              <a:rPr sz="1450" b="0">
                 <a:solidFill>
                   <a:srgbClr val="1C2A33"/>
                 </a:solidFill>
@@ -4627,14 +4753,95 @@
                 <a:ea typeface="楷体"/>
                 <a:cs typeface="楷体"/>
               </a:rPr>
-              <a:t>本课为第二单元收官课时，执行教材「单元学习任务」要求：以「我身边的劳动者」分享会为载体，整合本单元阅读（4课）、口语（1课）、写作（2课）成果。活动包含三个环节：①劳动者故事分享会（口头讲述自己通讯中的人物）；②劳动精神关键词展（用一个关键词概括单元学习感悟）；③单元学习总结（填写学习反思单）。本课不是知识新，而是综合展示与元认知反思课，串联通讯阅读、口语访谈、通讯写作三大能力。</a:t>
+              <a:t>这个单元走了8节课：读通讯、说访谈、写通讯、改通讯——</a:t>
+            </a:r>
+          </a:p>
+          <a:p>
+            <a:pPr algn="l">
+              <a:lnSpc>
+                <a:spcPct val="150000"/>
+              </a:lnSpc>
+              <a:spcAft>
+                <a:spcPts val="800"/>
+              </a:spcAft>
+            </a:pPr>
+            <a:r>
+              <a:rPr sz="1500" b="1">
+                <a:solidFill>
+                  <a:srgbClr val="B23A2A"/>
+                </a:solidFill>
+                <a:latin typeface="楷体"/>
+                <a:ea typeface="楷体"/>
+                <a:cs typeface="楷体"/>
+              </a:rPr>
+              <a:t>今天把它们汇成一场分享与一份总结。</a:t>
+            </a:r>
+          </a:p>
+          <a:p>
+            <a:pPr algn="l">
+              <a:lnSpc>
+                <a:spcPct val="150000"/>
+              </a:lnSpc>
+              <a:spcAft>
+                <a:spcPts val="800"/>
+              </a:spcAft>
+            </a:pPr>
+            <a:r>
+              <a:rPr sz="1300" b="0">
+                <a:solidFill>
+                  <a:srgbClr val="6B6258"/>
+                </a:solidFill>
+                <a:latin typeface="楷体"/>
+                <a:ea typeface="楷体"/>
+                <a:cs typeface="楷体"/>
+              </a:rPr>
+              <a:t>统编版必修上第二单元属"实用性阅读与交流"任务群，人文主题"劳动光荣"（陈玉《大单元教学设计》）。</a:t>
+            </a:r>
+          </a:p>
+          <a:p>
+            <a:pPr algn="l">
+              <a:lnSpc>
+                <a:spcPct val="150000"/>
+              </a:lnSpc>
+              <a:spcAft>
+                <a:spcPts val="800"/>
+              </a:spcAft>
+            </a:pPr>
+            <a:r>
+              <a:rPr sz="1300" b="0">
+                <a:solidFill>
+                  <a:srgbClr val="6B6258"/>
+                </a:solidFill>
+                <a:latin typeface="楷体"/>
+                <a:ea typeface="楷体"/>
+                <a:cs typeface="楷体"/>
+              </a:rPr>
+              <a:t>单元的八课，本身就是一次完整的综合实践 / 研究性学习课题——从生活里发现问题，在探究中获得真实经验（劳动教育与语文融合研究）。</a:t>
+            </a:r>
+          </a:p>
+          <a:p>
+            <a:pPr algn="l">
+              <a:lnSpc>
+                <a:spcPct val="140000"/>
+              </a:lnSpc>
+            </a:pPr>
+            <a:r>
+              <a:rPr sz="1400" b="0">
+                <a:solidFill>
+                  <a:srgbClr val="1C2A33"/>
+                </a:solidFill>
+                <a:latin typeface="楷体"/>
+                <a:ea typeface="楷体"/>
+                <a:cs typeface="楷体"/>
+              </a:rPr>
+              <a:t>语文里的劳动教育，靠叙事之美与形象之感打动人，远胜空洞说教。</a:t>
             </a:r>
           </a:p>
         </p:txBody>
       </p:sp>
       <p:pic>
         <p:nvPicPr>
-          <p:cNvPr id="6" name="Picture 5" descr="typewriter.jpg"/>
+          <p:cNvPr id="7" name="Picture 6" descr="ricefield.jpg"/>
           <p:cNvPicPr>
             <a:picLocks noChangeAspect="1"/>
           </p:cNvPicPr>
@@ -4642,15 +4849,15 @@
         </p:nvPicPr>
         <p:blipFill>
           <a:blip r:embed="rId2"/>
-          <a:srcRect l="5860" r="5860"/>
+          <a:srcRect l="3414" r="3414"/>
           <a:stretch>
             <a:fillRect/>
           </a:stretch>
         </p:blipFill>
         <p:spPr>
           <a:xfrm>
-            <a:off x="8046720" y="1508760"/>
-            <a:ext cx="4114800" cy="3108960"/>
+            <a:off x="6324447" y="1783080"/>
+            <a:ext cx="5227167" cy="2286000"/>
           </a:xfrm>
           <a:prstGeom prst="rect">
             <a:avLst/>
@@ -4659,14 +4866,14 @@
       </p:pic>
       <p:sp>
         <p:nvSpPr>
-          <p:cNvPr id="7" name="TextBox 6"/>
+          <p:cNvPr id="8" name="TextBox 7"/>
           <p:cNvSpPr txBox="1"/>
           <p:nvPr/>
         </p:nvSpPr>
         <p:spPr>
           <a:xfrm>
-            <a:off x="8046720" y="4663440"/>
-            <a:ext cx="4114800" cy="365760"/>
+            <a:off x="6324447" y="4160520"/>
+            <a:ext cx="5227167" cy="365760"/>
           </a:xfrm>
           <a:prstGeom prst="rect">
             <a:avLst/>
@@ -4689,14 +4896,175 @@
                 <a:ea typeface="微软雅黑"/>
                 <a:cs typeface="微软雅黑"/>
               </a:rPr>
-              <a:t>资料图（自由授权，复用 typewriter.jpg）</a:t>
-            </a:r>
-          </a:p>
-        </p:txBody>
-      </p:sp>
-      <p:sp>
-        <p:nvSpPr>
-          <p:cNvPr id="8" name="TextBox 7"/>
+              <a:t>中国稻田（CC BY-SA 4.0）· "劳动创造价值"的具象</a:t>
+            </a:r>
+          </a:p>
+        </p:txBody>
+      </p:sp>
+      <p:sp>
+        <p:nvSpPr>
+          <p:cNvPr id="9" name="Rounded Rectangle 8"/>
+          <p:cNvSpPr/>
+          <p:nvPr/>
+        </p:nvSpPr>
+        <p:spPr>
+          <a:xfrm>
+            <a:off x="6324447" y="4572000"/>
+            <a:ext cx="5227167" cy="2011680"/>
+          </a:xfrm>
+          <a:prstGeom prst="roundRect">
+            <a:avLst/>
+          </a:prstGeom>
+          <a:solidFill>
+            <a:srgbClr val="1C2A33"/>
+          </a:solidFill>
+          <a:effectLst/>
+        </p:spPr>
+        <p:style>
+          <a:lnRef idx="1">
+            <a:schemeClr val="accent1"/>
+          </a:lnRef>
+          <a:fillRef idx="3">
+            <a:schemeClr val="accent1"/>
+          </a:fillRef>
+          <a:effectRef idx="2">
+            <a:schemeClr val="accent1"/>
+          </a:effectRef>
+          <a:fontRef idx="minor">
+            <a:schemeClr val="lt1"/>
+          </a:fontRef>
+        </p:style>
+        <p:txBody>
+          <a:bodyPr rtlCol="0" anchor="ctr"/>
+          <a:lstStyle/>
+          <a:p>
+            <a:pPr algn="ctr"/>
+          </a:p>
+        </p:txBody>
+      </p:sp>
+      <p:sp>
+        <p:nvSpPr>
+          <p:cNvPr id="10" name="TextBox 9"/>
+          <p:cNvSpPr txBox="1"/>
+          <p:nvPr/>
+        </p:nvSpPr>
+        <p:spPr>
+          <a:xfrm>
+            <a:off x="6598767" y="4709160"/>
+            <a:ext cx="4678527" cy="457200"/>
+          </a:xfrm>
+          <a:prstGeom prst="rect">
+            <a:avLst/>
+          </a:prstGeom>
+          <a:noFill/>
+        </p:spPr>
+        <p:txBody>
+          <a:bodyPr wrap="square" anchor="t" lIns="0" rIns="0" tIns="0" bIns="0">
+            <a:spAutoFit/>
+          </a:bodyPr>
+          <a:lstStyle/>
+          <a:p>
+            <a:pPr algn="l"/>
+            <a:r>
+              <a:rPr sz="1600" b="1">
+                <a:solidFill>
+                  <a:srgbClr val="C8A86B"/>
+                </a:solidFill>
+                <a:latin typeface="楷体"/>
+                <a:ea typeface="楷体"/>
+                <a:cs typeface="楷体"/>
+              </a:rPr>
+              <a:t>一条能力线</a:t>
+            </a:r>
+          </a:p>
+        </p:txBody>
+      </p:sp>
+      <p:sp>
+        <p:nvSpPr>
+          <p:cNvPr id="11" name="TextBox 10"/>
+          <p:cNvSpPr txBox="1"/>
+          <p:nvPr/>
+        </p:nvSpPr>
+        <p:spPr>
+          <a:xfrm>
+            <a:off x="6598767" y="5212080"/>
+            <a:ext cx="4678527" cy="1280160"/>
+          </a:xfrm>
+          <a:prstGeom prst="rect">
+            <a:avLst/>
+          </a:prstGeom>
+          <a:noFill/>
+        </p:spPr>
+        <p:txBody>
+          <a:bodyPr wrap="square" anchor="t" lIns="0" rIns="0" tIns="0" bIns="0">
+            <a:spAutoFit/>
+          </a:bodyPr>
+          <a:lstStyle/>
+          <a:p>
+            <a:pPr algn="l">
+              <a:lnSpc>
+                <a:spcPct val="145000"/>
+              </a:lnSpc>
+              <a:spcAft>
+                <a:spcPts val="300"/>
+              </a:spcAft>
+            </a:pPr>
+            <a:r>
+              <a:rPr sz="1350" b="0">
+                <a:solidFill>
+                  <a:srgbClr val="FFFFFF"/>
+                </a:solidFill>
+                <a:latin typeface="楷体"/>
+                <a:ea typeface="楷体"/>
+                <a:cs typeface="楷体"/>
+              </a:rPr>
+              <a:t>· 读通讯：抓典型事件与细节</a:t>
+            </a:r>
+          </a:p>
+          <a:p>
+            <a:pPr algn="l">
+              <a:lnSpc>
+                <a:spcPct val="145000"/>
+              </a:lnSpc>
+              <a:spcAft>
+                <a:spcPts val="300"/>
+              </a:spcAft>
+            </a:pPr>
+            <a:r>
+              <a:rPr sz="1350" b="0">
+                <a:solidFill>
+                  <a:srgbClr val="FFFFFF"/>
+                </a:solidFill>
+                <a:latin typeface="楷体"/>
+                <a:ea typeface="楷体"/>
+                <a:cs typeface="楷体"/>
+              </a:rPr>
+              <a:t>· 说访谈：用口语讲，不念稿</a:t>
+            </a:r>
+          </a:p>
+          <a:p>
+            <a:pPr algn="l">
+              <a:lnSpc>
+                <a:spcPct val="145000"/>
+              </a:lnSpc>
+            </a:pPr>
+            <a:r>
+              <a:rPr sz="1350" b="0">
+                <a:solidFill>
+                  <a:srgbClr val="FFFFFF"/>
+                </a:solidFill>
+                <a:latin typeface="楷体"/>
+                <a:ea typeface="楷体"/>
+                <a:cs typeface="楷体"/>
+              </a:rPr>
+              <a:t>· 写通讯：以事写人，不说"好"</a:t>
+            </a:r>
+          </a:p>
+        </p:txBody>
+      </p:sp>
+      <p:sp>
+        <p:nvSpPr>
+          <p:cNvPr id="12" name="TextBox 11"/>
           <p:cNvSpPr txBox="1"/>
           <p:nvPr/>
         </p:nvSpPr>
@@ -4829,7 +5197,7 @@
                 <a:ea typeface="微软雅黑"/>
                 <a:cs typeface="微软雅黑"/>
               </a:rPr>
-              <a:t>学习重点</a:t>
+              <a:t>重点 · 三个环节</a:t>
             </a:r>
           </a:p>
         </p:txBody>
@@ -4880,14 +5248,51 @@
       </p:sp>
       <p:sp>
         <p:nvSpPr>
-          <p:cNvPr id="5" name="Rounded Rectangle 4"/>
+          <p:cNvPr id="5" name="TextBox 4"/>
+          <p:cNvSpPr txBox="1"/>
+          <p:nvPr/>
+        </p:nvSpPr>
+        <p:spPr>
+          <a:xfrm>
+            <a:off x="640080" y="1325880"/>
+            <a:ext cx="10515600" cy="548640"/>
+          </a:xfrm>
+          <a:prstGeom prst="rect">
+            <a:avLst/>
+          </a:prstGeom>
+          <a:noFill/>
+        </p:spPr>
+        <p:txBody>
+          <a:bodyPr wrap="square" anchor="t" lIns="0" rIns="0" tIns="0" bIns="0">
+            <a:spAutoFit/>
+          </a:bodyPr>
+          <a:lstStyle/>
+          <a:p>
+            <a:pPr algn="l"/>
+            <a:r>
+              <a:rPr sz="2400" b="1">
+                <a:solidFill>
+                  <a:srgbClr val="1C2A33"/>
+                </a:solidFill>
+                <a:latin typeface="楷体"/>
+                <a:ea typeface="楷体"/>
+                <a:cs typeface="楷体"/>
+              </a:rPr>
+              <a:t>分享会 · 关键词展 · 反思单</a:t>
+            </a:r>
+          </a:p>
+        </p:txBody>
+      </p:sp>
+      <p:sp>
+        <p:nvSpPr>
+          <p:cNvPr id="6" name="Rounded Rectangle 5"/>
           <p:cNvSpPr/>
           <p:nvPr/>
         </p:nvSpPr>
         <p:spPr>
           <a:xfrm>
-            <a:off x="640080" y="1371600"/>
-            <a:ext cx="10911535" cy="1597152"/>
+            <a:off x="640080" y="2194560"/>
+            <a:ext cx="3393338" cy="3840480"/>
           </a:xfrm>
           <a:prstGeom prst="roundRect">
             <a:avLst/>
@@ -4895,7 +5300,425 @@
           <a:solidFill>
             <a:srgbClr val="FFFFFF"/>
           </a:solidFill>
-          <a:ln w="22860">
+          <a:ln w="20320">
+            <a:solidFill>
+              <a:srgbClr val="B23A2A"/>
+            </a:solidFill>
+          </a:ln>
+          <a:effectLst/>
+        </p:spPr>
+        <p:style>
+          <a:lnRef idx="1">
+            <a:schemeClr val="accent1"/>
+          </a:lnRef>
+          <a:fillRef idx="3">
+            <a:schemeClr val="accent1"/>
+          </a:fillRef>
+          <a:effectRef idx="2">
+            <a:schemeClr val="accent1"/>
+          </a:effectRef>
+          <a:fontRef idx="minor">
+            <a:schemeClr val="lt1"/>
+          </a:fontRef>
+        </p:style>
+        <p:txBody>
+          <a:bodyPr rtlCol="0" anchor="ctr"/>
+          <a:lstStyle/>
+          <a:p>
+            <a:pPr algn="ctr"/>
+          </a:p>
+        </p:txBody>
+      </p:sp>
+      <p:sp>
+        <p:nvSpPr>
+          <p:cNvPr id="7" name="Rectangle 6"/>
+          <p:cNvSpPr/>
+          <p:nvPr/>
+        </p:nvSpPr>
+        <p:spPr>
+          <a:xfrm>
+            <a:off x="640080" y="2194560"/>
+            <a:ext cx="3393338" cy="548640"/>
+          </a:xfrm>
+          <a:prstGeom prst="rect">
+            <a:avLst/>
+          </a:prstGeom>
+          <a:solidFill>
+            <a:srgbClr val="B23A2A"/>
+          </a:solidFill>
+          <a:ln>
+            <a:noFill/>
+          </a:ln>
+          <a:effectLst/>
+        </p:spPr>
+        <p:style>
+          <a:lnRef idx="1">
+            <a:schemeClr val="accent1"/>
+          </a:lnRef>
+          <a:fillRef idx="3">
+            <a:schemeClr val="accent1"/>
+          </a:fillRef>
+          <a:effectRef idx="2">
+            <a:schemeClr val="accent1"/>
+          </a:effectRef>
+          <a:fontRef idx="minor">
+            <a:schemeClr val="lt1"/>
+          </a:fontRef>
+        </p:style>
+        <p:txBody>
+          <a:bodyPr rtlCol="0" anchor="ctr"/>
+          <a:lstStyle/>
+          <a:p>
+            <a:pPr algn="ctr"/>
+          </a:p>
+        </p:txBody>
+      </p:sp>
+      <p:sp>
+        <p:nvSpPr>
+          <p:cNvPr id="8" name="TextBox 7"/>
+          <p:cNvSpPr txBox="1"/>
+          <p:nvPr/>
+        </p:nvSpPr>
+        <p:spPr>
+          <a:xfrm>
+            <a:off x="640080" y="2304288"/>
+            <a:ext cx="3393338" cy="365760"/>
+          </a:xfrm>
+          <a:prstGeom prst="rect">
+            <a:avLst/>
+          </a:prstGeom>
+          <a:noFill/>
+        </p:spPr>
+        <p:txBody>
+          <a:bodyPr wrap="square" anchor="t" lIns="0" rIns="0" tIns="0" bIns="0">
+            <a:spAutoFit/>
+          </a:bodyPr>
+          <a:lstStyle/>
+          <a:p>
+            <a:pPr algn="ctr"/>
+            <a:r>
+              <a:rPr sz="1500" b="1">
+                <a:solidFill>
+                  <a:srgbClr val="FFFFFF"/>
+                </a:solidFill>
+                <a:latin typeface="微软雅黑"/>
+                <a:ea typeface="微软雅黑"/>
+                <a:cs typeface="微软雅黑"/>
+              </a:rPr>
+              <a:t>① 劳动者故事分享会</a:t>
+            </a:r>
+          </a:p>
+        </p:txBody>
+      </p:sp>
+      <p:sp>
+        <p:nvSpPr>
+          <p:cNvPr id="9" name="TextBox 8"/>
+          <p:cNvSpPr txBox="1"/>
+          <p:nvPr/>
+        </p:nvSpPr>
+        <p:spPr>
+          <a:xfrm>
+            <a:off x="914400" y="2971800"/>
+            <a:ext cx="2844698" cy="2103120"/>
+          </a:xfrm>
+          <a:prstGeom prst="rect">
+            <a:avLst/>
+          </a:prstGeom>
+          <a:noFill/>
+        </p:spPr>
+        <p:txBody>
+          <a:bodyPr wrap="square" anchor="t" lIns="0" rIns="0" tIns="0" bIns="0">
+            <a:spAutoFit/>
+          </a:bodyPr>
+          <a:lstStyle/>
+          <a:p>
+            <a:pPr algn="l">
+              <a:lnSpc>
+                <a:spcPct val="155000"/>
+              </a:lnSpc>
+            </a:pPr>
+            <a:r>
+              <a:rPr sz="1350" b="0">
+                <a:solidFill>
+                  <a:srgbClr val="1C2A33"/>
+                </a:solidFill>
+                <a:latin typeface="楷体"/>
+                <a:ea typeface="楷体"/>
+                <a:cs typeface="楷体"/>
+              </a:rPr>
+              <a:t>每人上台讲述通讯中的人物，限时2分钟——讲细节、讲精神，不念稿。</a:t>
+            </a:r>
+          </a:p>
+        </p:txBody>
+      </p:sp>
+      <p:sp>
+        <p:nvSpPr>
+          <p:cNvPr id="10" name="TextBox 9"/>
+          <p:cNvSpPr txBox="1"/>
+          <p:nvPr/>
+        </p:nvSpPr>
+        <p:spPr>
+          <a:xfrm>
+            <a:off x="914400" y="5120640"/>
+            <a:ext cx="2844698" cy="822960"/>
+          </a:xfrm>
+          <a:prstGeom prst="rect">
+            <a:avLst/>
+          </a:prstGeom>
+          <a:noFill/>
+        </p:spPr>
+        <p:txBody>
+          <a:bodyPr wrap="square" anchor="t" lIns="0" rIns="0" tIns="0" bIns="0">
+            <a:spAutoFit/>
+          </a:bodyPr>
+          <a:lstStyle/>
+          <a:p>
+            <a:pPr algn="l">
+              <a:lnSpc>
+                <a:spcPct val="145000"/>
+              </a:lnSpc>
+            </a:pPr>
+            <a:r>
+              <a:rPr sz="1250" b="1">
+                <a:solidFill>
+                  <a:srgbClr val="B23A2A"/>
+                </a:solidFill>
+                <a:latin typeface="楷体"/>
+                <a:ea typeface="楷体"/>
+                <a:cs typeface="楷体"/>
+              </a:rPr>
+              <a:t> B班可小组讲述降低压力；A班单独讲述、自选配图。</a:t>
+            </a:r>
+          </a:p>
+        </p:txBody>
+      </p:sp>
+      <p:sp>
+        <p:nvSpPr>
+          <p:cNvPr id="11" name="Rounded Rectangle 10"/>
+          <p:cNvSpPr/>
+          <p:nvPr/>
+        </p:nvSpPr>
+        <p:spPr>
+          <a:xfrm>
+            <a:off x="4399178" y="2194560"/>
+            <a:ext cx="3393338" cy="3840480"/>
+          </a:xfrm>
+          <a:prstGeom prst="roundRect">
+            <a:avLst/>
+          </a:prstGeom>
+          <a:solidFill>
+            <a:srgbClr val="FFFFFF"/>
+          </a:solidFill>
+          <a:ln w="20320">
+            <a:solidFill>
+              <a:srgbClr val="2E7D6B"/>
+            </a:solidFill>
+          </a:ln>
+          <a:effectLst/>
+        </p:spPr>
+        <p:style>
+          <a:lnRef idx="1">
+            <a:schemeClr val="accent1"/>
+          </a:lnRef>
+          <a:fillRef idx="3">
+            <a:schemeClr val="accent1"/>
+          </a:fillRef>
+          <a:effectRef idx="2">
+            <a:schemeClr val="accent1"/>
+          </a:effectRef>
+          <a:fontRef idx="minor">
+            <a:schemeClr val="lt1"/>
+          </a:fontRef>
+        </p:style>
+        <p:txBody>
+          <a:bodyPr rtlCol="0" anchor="ctr"/>
+          <a:lstStyle/>
+          <a:p>
+            <a:pPr algn="ctr"/>
+          </a:p>
+        </p:txBody>
+      </p:sp>
+      <p:sp>
+        <p:nvSpPr>
+          <p:cNvPr id="12" name="Rectangle 11"/>
+          <p:cNvSpPr/>
+          <p:nvPr/>
+        </p:nvSpPr>
+        <p:spPr>
+          <a:xfrm>
+            <a:off x="4399178" y="2194560"/>
+            <a:ext cx="3393338" cy="548640"/>
+          </a:xfrm>
+          <a:prstGeom prst="rect">
+            <a:avLst/>
+          </a:prstGeom>
+          <a:solidFill>
+            <a:srgbClr val="2E7D6B"/>
+          </a:solidFill>
+          <a:ln>
+            <a:noFill/>
+          </a:ln>
+          <a:effectLst/>
+        </p:spPr>
+        <p:style>
+          <a:lnRef idx="1">
+            <a:schemeClr val="accent1"/>
+          </a:lnRef>
+          <a:fillRef idx="3">
+            <a:schemeClr val="accent1"/>
+          </a:fillRef>
+          <a:effectRef idx="2">
+            <a:schemeClr val="accent1"/>
+          </a:effectRef>
+          <a:fontRef idx="minor">
+            <a:schemeClr val="lt1"/>
+          </a:fontRef>
+        </p:style>
+        <p:txBody>
+          <a:bodyPr rtlCol="0" anchor="ctr"/>
+          <a:lstStyle/>
+          <a:p>
+            <a:pPr algn="ctr"/>
+          </a:p>
+        </p:txBody>
+      </p:sp>
+      <p:sp>
+        <p:nvSpPr>
+          <p:cNvPr id="13" name="TextBox 12"/>
+          <p:cNvSpPr txBox="1"/>
+          <p:nvPr/>
+        </p:nvSpPr>
+        <p:spPr>
+          <a:xfrm>
+            <a:off x="4399178" y="2304288"/>
+            <a:ext cx="3393338" cy="365760"/>
+          </a:xfrm>
+          <a:prstGeom prst="rect">
+            <a:avLst/>
+          </a:prstGeom>
+          <a:noFill/>
+        </p:spPr>
+        <p:txBody>
+          <a:bodyPr wrap="square" anchor="t" lIns="0" rIns="0" tIns="0" bIns="0">
+            <a:spAutoFit/>
+          </a:bodyPr>
+          <a:lstStyle/>
+          <a:p>
+            <a:pPr algn="ctr"/>
+            <a:r>
+              <a:rPr sz="1500" b="1">
+                <a:solidFill>
+                  <a:srgbClr val="FFFFFF"/>
+                </a:solidFill>
+                <a:latin typeface="微软雅黑"/>
+                <a:ea typeface="微软雅黑"/>
+                <a:cs typeface="微软雅黑"/>
+              </a:rPr>
+              <a:t>② 劳动精神关键词展</a:t>
+            </a:r>
+          </a:p>
+        </p:txBody>
+      </p:sp>
+      <p:sp>
+        <p:nvSpPr>
+          <p:cNvPr id="14" name="TextBox 13"/>
+          <p:cNvSpPr txBox="1"/>
+          <p:nvPr/>
+        </p:nvSpPr>
+        <p:spPr>
+          <a:xfrm>
+            <a:off x="4673498" y="2971800"/>
+            <a:ext cx="2844698" cy="2103120"/>
+          </a:xfrm>
+          <a:prstGeom prst="rect">
+            <a:avLst/>
+          </a:prstGeom>
+          <a:noFill/>
+        </p:spPr>
+        <p:txBody>
+          <a:bodyPr wrap="square" anchor="t" lIns="0" rIns="0" tIns="0" bIns="0">
+            <a:spAutoFit/>
+          </a:bodyPr>
+          <a:lstStyle/>
+          <a:p>
+            <a:pPr algn="l">
+              <a:lnSpc>
+                <a:spcPct val="155000"/>
+              </a:lnSpc>
+            </a:pPr>
+            <a:r>
+              <a:rPr sz="1350" b="0">
+                <a:solidFill>
+                  <a:srgbClr val="1C2A33"/>
+                </a:solidFill>
+                <a:latin typeface="楷体"/>
+                <a:ea typeface="楷体"/>
+                <a:cs typeface="楷体"/>
+              </a:rPr>
+              <a:t>在便签上写一个关键词 + 一句话，概括本单元最大感悟，贴成"劳动精神墙"。</a:t>
+            </a:r>
+          </a:p>
+        </p:txBody>
+      </p:sp>
+      <p:sp>
+        <p:nvSpPr>
+          <p:cNvPr id="15" name="TextBox 14"/>
+          <p:cNvSpPr txBox="1"/>
+          <p:nvPr/>
+        </p:nvSpPr>
+        <p:spPr>
+          <a:xfrm>
+            <a:off x="4673498" y="5120640"/>
+            <a:ext cx="2844698" cy="822960"/>
+          </a:xfrm>
+          <a:prstGeom prst="rect">
+            <a:avLst/>
+          </a:prstGeom>
+          <a:noFill/>
+        </p:spPr>
+        <p:txBody>
+          <a:bodyPr wrap="square" anchor="t" lIns="0" rIns="0" tIns="0" bIns="0">
+            <a:spAutoFit/>
+          </a:bodyPr>
+          <a:lstStyle/>
+          <a:p>
+            <a:pPr algn="l">
+              <a:lnSpc>
+                <a:spcPct val="145000"/>
+              </a:lnSpc>
+            </a:pPr>
+            <a:r>
+              <a:rPr sz="1250" b="1">
+                <a:solidFill>
+                  <a:srgbClr val="2E7D6B"/>
+                </a:solidFill>
+                <a:latin typeface="楷体"/>
+                <a:ea typeface="楷体"/>
+                <a:cs typeface="楷体"/>
+              </a:rPr>
+              <a:t>关键词尽量不重复：坚守 / 细节 / 14万株 都算好词。</a:t>
+            </a:r>
+          </a:p>
+        </p:txBody>
+      </p:sp>
+      <p:sp>
+        <p:nvSpPr>
+          <p:cNvPr id="16" name="Rounded Rectangle 15"/>
+          <p:cNvSpPr/>
+          <p:nvPr/>
+        </p:nvSpPr>
+        <p:spPr>
+          <a:xfrm>
+            <a:off x="8158276" y="2194560"/>
+            <a:ext cx="3393338" cy="3840480"/>
+          </a:xfrm>
+          <a:prstGeom prst="roundRect">
+            <a:avLst/>
+          </a:prstGeom>
+          <a:solidFill>
+            <a:srgbClr val="FFFFFF"/>
+          </a:solidFill>
+          <a:ln w="20320">
             <a:solidFill>
               <a:srgbClr val="C8A86B"/>
             </a:solidFill>
@@ -4926,107 +5749,23 @@
       </p:sp>
       <p:sp>
         <p:nvSpPr>
-          <p:cNvPr id="6" name="TextBox 5"/>
-          <p:cNvSpPr txBox="1"/>
-          <p:nvPr/>
-        </p:nvSpPr>
-        <p:spPr>
-          <a:xfrm>
-            <a:off x="1371600" y="1481328"/>
-            <a:ext cx="9997135" cy="457200"/>
-          </a:xfrm>
-          <a:prstGeom prst="rect">
-            <a:avLst/>
-          </a:prstGeom>
-          <a:noFill/>
-        </p:spPr>
-        <p:txBody>
-          <a:bodyPr wrap="square" anchor="t" lIns="0" rIns="0" tIns="0" bIns="0">
-            <a:spAutoFit/>
-          </a:bodyPr>
-          <a:lstStyle/>
-          <a:p>
-            <a:pPr algn="l">
-              <a:lnSpc>
-                <a:spcPct val="110000"/>
-              </a:lnSpc>
-            </a:pPr>
-            <a:r>
-              <a:rPr sz="1600" b="1">
-                <a:solidFill>
-                  <a:srgbClr val="1C2A33"/>
-                </a:solidFill>
-                <a:latin typeface="微软雅黑"/>
-                <a:ea typeface="微软雅黑"/>
-                <a:cs typeface="微软雅黑"/>
-              </a:rPr>
-              <a:t/>
-            </a:r>
-          </a:p>
-        </p:txBody>
-      </p:sp>
-      <p:sp>
-        <p:nvSpPr>
-          <p:cNvPr id="7" name="TextBox 6"/>
-          <p:cNvSpPr txBox="1"/>
-          <p:nvPr/>
-        </p:nvSpPr>
-        <p:spPr>
-          <a:xfrm>
-            <a:off x="1371600" y="1920240"/>
-            <a:ext cx="9997135" cy="957072"/>
-          </a:xfrm>
-          <a:prstGeom prst="rect">
-            <a:avLst/>
-          </a:prstGeom>
-          <a:noFill/>
-        </p:spPr>
-        <p:txBody>
-          <a:bodyPr wrap="square" anchor="t" lIns="0" rIns="0" tIns="0" bIns="0">
-            <a:spAutoFit/>
-          </a:bodyPr>
-          <a:lstStyle/>
-          <a:p>
-            <a:pPr algn="l">
-              <a:lnSpc>
-                <a:spcPct val="128000"/>
-              </a:lnSpc>
-            </a:pPr>
-            <a:r>
-              <a:rPr sz="1300" b="0">
-                <a:solidFill>
-                  <a:srgbClr val="1C2A33"/>
-                </a:solidFill>
-                <a:latin typeface="楷体"/>
-                <a:ea typeface="楷体"/>
-                <a:cs typeface="楷体"/>
-              </a:rPr>
-              <a:t>① 劳动者故事分享会：每人/小组讲述自己通讯中的人物，限时2分钟，不念稿。</a:t>
-            </a:r>
-          </a:p>
-        </p:txBody>
-      </p:sp>
-      <p:sp>
-        <p:nvSpPr>
-          <p:cNvPr id="8" name="Rounded Rectangle 7"/>
+          <p:cNvPr id="17" name="Rectangle 16"/>
           <p:cNvSpPr/>
           <p:nvPr/>
         </p:nvSpPr>
         <p:spPr>
           <a:xfrm>
-            <a:off x="640080" y="3078480"/>
-            <a:ext cx="10911535" cy="1597152"/>
-          </a:xfrm>
-          <a:prstGeom prst="roundRect">
+            <a:off x="8158276" y="2194560"/>
+            <a:ext cx="3393338" cy="548640"/>
+          </a:xfrm>
+          <a:prstGeom prst="rect">
             <a:avLst/>
           </a:prstGeom>
           <a:solidFill>
-            <a:srgbClr val="FFFFFF"/>
+            <a:srgbClr val="C8A86B"/>
           </a:solidFill>
-          <a:ln w="22860">
-            <a:solidFill>
-              <a:srgbClr val="C8A86B"/>
-            </a:solidFill>
+          <a:ln>
+            <a:noFill/>
           </a:ln>
           <a:effectLst/>
         </p:spPr>
@@ -5054,14 +5793,14 @@
       </p:sp>
       <p:sp>
         <p:nvSpPr>
-          <p:cNvPr id="9" name="TextBox 8"/>
+          <p:cNvPr id="18" name="TextBox 17"/>
           <p:cNvSpPr txBox="1"/>
           <p:nvPr/>
         </p:nvSpPr>
         <p:spPr>
           <a:xfrm>
-            <a:off x="1371600" y="3188208"/>
-            <a:ext cx="9997135" cy="457200"/>
+            <a:off x="8158276" y="2304288"/>
+            <a:ext cx="3393338" cy="365760"/>
           </a:xfrm>
           <a:prstGeom prst="rect">
             <a:avLst/>
@@ -5074,35 +5813,31 @@
           </a:bodyPr>
           <a:lstStyle/>
           <a:p>
-            <a:pPr algn="l">
-              <a:lnSpc>
-                <a:spcPct val="110000"/>
-              </a:lnSpc>
-            </a:pPr>
-            <a:r>
-              <a:rPr sz="1600" b="1">
-                <a:solidFill>
-                  <a:srgbClr val="1C2A33"/>
+            <a:pPr algn="ctr"/>
+            <a:r>
+              <a:rPr sz="1500" b="1">
+                <a:solidFill>
+                  <a:srgbClr val="FFFFFF"/>
                 </a:solidFill>
                 <a:latin typeface="微软雅黑"/>
                 <a:ea typeface="微软雅黑"/>
                 <a:cs typeface="微软雅黑"/>
               </a:rPr>
-              <a:t/>
-            </a:r>
-          </a:p>
-        </p:txBody>
-      </p:sp>
-      <p:sp>
-        <p:nvSpPr>
-          <p:cNvPr id="10" name="TextBox 9"/>
+              <a:t>③ 单元学习反思单</a:t>
+            </a:r>
+          </a:p>
+        </p:txBody>
+      </p:sp>
+      <p:sp>
+        <p:nvSpPr>
+          <p:cNvPr id="19" name="TextBox 18"/>
           <p:cNvSpPr txBox="1"/>
           <p:nvPr/>
         </p:nvSpPr>
         <p:spPr>
           <a:xfrm>
-            <a:off x="1371600" y="3627120"/>
-            <a:ext cx="9997135" cy="957072"/>
+            <a:off x="8432596" y="2971800"/>
+            <a:ext cx="2844698" cy="2103120"/>
           </a:xfrm>
           <a:prstGeom prst="rect">
             <a:avLst/>
@@ -5117,11 +5852,11 @@
           <a:p>
             <a:pPr algn="l">
               <a:lnSpc>
-                <a:spcPct val="128000"/>
+                <a:spcPct val="155000"/>
               </a:lnSpc>
             </a:pPr>
             <a:r>
-              <a:rPr sz="1300" b="0">
+              <a:rPr sz="1350" b="0">
                 <a:solidFill>
                   <a:srgbClr val="1C2A33"/>
                 </a:solidFill>
@@ -5129,67 +5864,21 @@
                 <a:ea typeface="楷体"/>
                 <a:cs typeface="楷体"/>
               </a:rPr>
-              <a:t>② 劳动精神关键词展：每人用一个关键词+一句话概括单元学习感悟。</a:t>
-            </a:r>
-          </a:p>
-        </p:txBody>
-      </p:sp>
-      <p:sp>
-        <p:nvSpPr>
-          <p:cNvPr id="11" name="Rounded Rectangle 10"/>
-          <p:cNvSpPr/>
-          <p:nvPr/>
-        </p:nvSpPr>
-        <p:spPr>
-          <a:xfrm>
-            <a:off x="640080" y="4785360"/>
-            <a:ext cx="10911535" cy="1597152"/>
-          </a:xfrm>
-          <a:prstGeom prst="roundRect">
-            <a:avLst/>
-          </a:prstGeom>
-          <a:solidFill>
-            <a:srgbClr val="FFFFFF"/>
-          </a:solidFill>
-          <a:ln w="22860">
-            <a:solidFill>
-              <a:srgbClr val="C8A86B"/>
-            </a:solidFill>
-          </a:ln>
-          <a:effectLst/>
-        </p:spPr>
-        <p:style>
-          <a:lnRef idx="1">
-            <a:schemeClr val="accent1"/>
-          </a:lnRef>
-          <a:fillRef idx="3">
-            <a:schemeClr val="accent1"/>
-          </a:fillRef>
-          <a:effectRef idx="2">
-            <a:schemeClr val="accent1"/>
-          </a:effectRef>
-          <a:fontRef idx="minor">
-            <a:schemeClr val="lt1"/>
-          </a:fontRef>
-        </p:style>
-        <p:txBody>
-          <a:bodyPr rtlCol="0" anchor="ctr"/>
-          <a:lstStyle/>
-          <a:p>
-            <a:pPr algn="ctr"/>
-          </a:p>
-        </p:txBody>
-      </p:sp>
-      <p:sp>
-        <p:nvSpPr>
-          <p:cNvPr id="12" name="TextBox 11"/>
+              <a:t>三行：我学会了 / 我还需提升 / 我的疑问（可空）。结构化回顾8课时。</a:t>
+            </a:r>
+          </a:p>
+        </p:txBody>
+      </p:sp>
+      <p:sp>
+        <p:nvSpPr>
+          <p:cNvPr id="20" name="TextBox 19"/>
           <p:cNvSpPr txBox="1"/>
           <p:nvPr/>
         </p:nvSpPr>
         <p:spPr>
           <a:xfrm>
-            <a:off x="1371600" y="4895088"/>
-            <a:ext cx="9997135" cy="457200"/>
+            <a:off x="8432596" y="5120640"/>
+            <a:ext cx="2844698" cy="822960"/>
           </a:xfrm>
           <a:prstGeom prst="rect">
             <a:avLst/>
@@ -5204,67 +5893,26 @@
           <a:p>
             <a:pPr algn="l">
               <a:lnSpc>
-                <a:spcPct val="110000"/>
+                <a:spcPct val="145000"/>
               </a:lnSpc>
             </a:pPr>
             <a:r>
-              <a:rPr sz="1600" b="1">
-                <a:solidFill>
-                  <a:srgbClr val="1C2A33"/>
-                </a:solidFill>
-                <a:latin typeface="微软雅黑"/>
-                <a:ea typeface="微软雅黑"/>
-                <a:cs typeface="微软雅黑"/>
-              </a:rPr>
-              <a:t/>
-            </a:r>
-          </a:p>
-        </p:txBody>
-      </p:sp>
-      <p:sp>
-        <p:nvSpPr>
-          <p:cNvPr id="13" name="TextBox 12"/>
-          <p:cNvSpPr txBox="1"/>
-          <p:nvPr/>
-        </p:nvSpPr>
-        <p:spPr>
-          <a:xfrm>
-            <a:off x="1371600" y="5334000"/>
-            <a:ext cx="9997135" cy="957072"/>
-          </a:xfrm>
-          <a:prstGeom prst="rect">
-            <a:avLst/>
-          </a:prstGeom>
-          <a:noFill/>
-        </p:spPr>
-        <p:txBody>
-          <a:bodyPr wrap="square" anchor="t" lIns="0" rIns="0" tIns="0" bIns="0">
-            <a:spAutoFit/>
-          </a:bodyPr>
-          <a:lstStyle/>
-          <a:p>
-            <a:pPr algn="l">
-              <a:lnSpc>
-                <a:spcPct val="128000"/>
-              </a:lnSpc>
-            </a:pPr>
-            <a:r>
-              <a:rPr sz="1200" b="0">
-                <a:solidFill>
-                  <a:srgbClr val="1C2A33"/>
+              <a:rPr sz="1250" b="1">
+                <a:solidFill>
+                  <a:srgbClr val="C8A86B"/>
                 </a:solidFill>
                 <a:latin typeface="楷体"/>
                 <a:ea typeface="楷体"/>
                 <a:cs typeface="楷体"/>
               </a:rPr>
-              <a:t>③ 单元学习反思单：回顾8课时学习路径，填写「我学会了/我还需要提升/我的疑问」。</a:t>
-            </a:r>
-          </a:p>
-        </p:txBody>
-      </p:sp>
-      <p:sp>
-        <p:nvSpPr>
-          <p:cNvPr id="14" name="TextBox 13"/>
+              <a:t>自我评价与元认知：群文活动设计即以自评收口。</a:t>
+            </a:r>
+          </a:p>
+        </p:txBody>
+      </p:sp>
+      <p:sp>
+        <p:nvSpPr>
+          <p:cNvPr id="21" name="TextBox 20"/>
           <p:cNvSpPr txBox="1"/>
           <p:nvPr/>
         </p:nvSpPr>
@@ -5391,13 +6039,13 @@
             <a:r>
               <a:rPr sz="1300" b="1">
                 <a:solidFill>
-                  <a:srgbClr val="2E7D6B"/>
+                  <a:srgbClr val="B23A2A"/>
                 </a:solidFill>
                 <a:latin typeface="微软雅黑"/>
                 <a:ea typeface="微软雅黑"/>
                 <a:cs typeface="微软雅黑"/>
               </a:rPr>
-              <a:t>学习路径</a:t>
+              <a:t>重点 · 讲述技巧卡</a:t>
             </a:r>
           </a:p>
         </p:txBody>
@@ -5417,7 +6065,7 @@
             <a:avLst/>
           </a:prstGeom>
           <a:solidFill>
-            <a:srgbClr val="2E7D6B"/>
+            <a:srgbClr val="B23A2A"/>
           </a:solidFill>
           <a:ln>
             <a:noFill/>
@@ -5448,14 +6096,212 @@
       </p:sp>
       <p:sp>
         <p:nvSpPr>
-          <p:cNvPr id="5" name="Rounded Rectangle 4"/>
+          <p:cNvPr id="5" name="TextBox 4"/>
+          <p:cNvSpPr txBox="1"/>
+          <p:nvPr/>
+        </p:nvSpPr>
+        <p:spPr>
+          <a:xfrm>
+            <a:off x="640080" y="1325880"/>
+            <a:ext cx="10515600" cy="548640"/>
+          </a:xfrm>
+          <a:prstGeom prst="rect">
+            <a:avLst/>
+          </a:prstGeom>
+          <a:noFill/>
+        </p:spPr>
+        <p:txBody>
+          <a:bodyPr wrap="square" anchor="t" lIns="0" rIns="0" tIns="0" bIns="0">
+            <a:spAutoFit/>
+          </a:bodyPr>
+          <a:lstStyle/>
+          <a:p>
+            <a:pPr algn="l"/>
+            <a:r>
+              <a:rPr sz="2600" b="1">
+                <a:solidFill>
+                  <a:srgbClr val="1C2A33"/>
+                </a:solidFill>
+                <a:latin typeface="楷体"/>
+                <a:ea typeface="楷体"/>
+                <a:cs typeface="楷体"/>
+              </a:rPr>
+              <a:t>上台前看一眼：四句话</a:t>
+            </a:r>
+          </a:p>
+        </p:txBody>
+      </p:sp>
+      <p:sp>
+        <p:nvSpPr>
+          <p:cNvPr id="6" name="Rounded Rectangle 5"/>
           <p:cNvSpPr/>
           <p:nvPr/>
         </p:nvSpPr>
         <p:spPr>
           <a:xfrm>
-            <a:off x="640080" y="1371600"/>
-            <a:ext cx="10911535" cy="685800"/>
+            <a:off x="640080" y="2194560"/>
+            <a:ext cx="2453563" cy="3840480"/>
+          </a:xfrm>
+          <a:prstGeom prst="roundRect">
+            <a:avLst/>
+          </a:prstGeom>
+          <a:solidFill>
+            <a:srgbClr val="FFFFFF"/>
+          </a:solidFill>
+          <a:ln w="22860">
+            <a:solidFill>
+              <a:srgbClr val="B23A2A"/>
+            </a:solidFill>
+          </a:ln>
+          <a:effectLst/>
+        </p:spPr>
+        <p:style>
+          <a:lnRef idx="1">
+            <a:schemeClr val="accent1"/>
+          </a:lnRef>
+          <a:fillRef idx="3">
+            <a:schemeClr val="accent1"/>
+          </a:fillRef>
+          <a:effectRef idx="2">
+            <a:schemeClr val="accent1"/>
+          </a:effectRef>
+          <a:fontRef idx="minor">
+            <a:schemeClr val="lt1"/>
+          </a:fontRef>
+        </p:style>
+        <p:txBody>
+          <a:bodyPr rtlCol="0" anchor="ctr"/>
+          <a:lstStyle/>
+          <a:p>
+            <a:pPr algn="ctr"/>
+          </a:p>
+        </p:txBody>
+      </p:sp>
+      <p:sp>
+        <p:nvSpPr>
+          <p:cNvPr id="7" name="TextBox 6"/>
+          <p:cNvSpPr txBox="1"/>
+          <p:nvPr/>
+        </p:nvSpPr>
+        <p:spPr>
+          <a:xfrm>
+            <a:off x="868680" y="2468880"/>
+            <a:ext cx="1996363" cy="548640"/>
+          </a:xfrm>
+          <a:prstGeom prst="rect">
+            <a:avLst/>
+          </a:prstGeom>
+          <a:noFill/>
+        </p:spPr>
+        <p:txBody>
+          <a:bodyPr wrap="square" anchor="t" lIns="0" rIns="0" tIns="0" bIns="0">
+            <a:spAutoFit/>
+          </a:bodyPr>
+          <a:lstStyle/>
+          <a:p>
+            <a:pPr algn="l"/>
+            <a:r>
+              <a:rPr sz="2200" b="1">
+                <a:solidFill>
+                  <a:srgbClr val="B23A2A"/>
+                </a:solidFill>
+                <a:latin typeface="楷体"/>
+                <a:ea typeface="楷体"/>
+                <a:cs typeface="楷体"/>
+              </a:rPr>
+              <a:t>不念稿</a:t>
+            </a:r>
+          </a:p>
+        </p:txBody>
+      </p:sp>
+      <p:sp>
+        <p:nvSpPr>
+          <p:cNvPr id="8" name="TextBox 7"/>
+          <p:cNvSpPr txBox="1"/>
+          <p:nvPr/>
+        </p:nvSpPr>
+        <p:spPr>
+          <a:xfrm>
+            <a:off x="868680" y="3154680"/>
+            <a:ext cx="1996363" cy="457200"/>
+          </a:xfrm>
+          <a:prstGeom prst="rect">
+            <a:avLst/>
+          </a:prstGeom>
+          <a:noFill/>
+        </p:spPr>
+        <p:txBody>
+          <a:bodyPr wrap="square" anchor="t" lIns="0" rIns="0" tIns="0" bIns="0">
+            <a:spAutoFit/>
+          </a:bodyPr>
+          <a:lstStyle/>
+          <a:p>
+            <a:pPr algn="l"/>
+            <a:r>
+              <a:rPr sz="1500" b="1">
+                <a:solidFill>
+                  <a:srgbClr val="6B6258"/>
+                </a:solidFill>
+                <a:latin typeface="微软雅黑"/>
+                <a:ea typeface="微软雅黑"/>
+                <a:cs typeface="微软雅黑"/>
+              </a:rPr>
+              <a:t>用口语说</a:t>
+            </a:r>
+          </a:p>
+        </p:txBody>
+      </p:sp>
+      <p:sp>
+        <p:nvSpPr>
+          <p:cNvPr id="9" name="TextBox 8"/>
+          <p:cNvSpPr txBox="1"/>
+          <p:nvPr/>
+        </p:nvSpPr>
+        <p:spPr>
+          <a:xfrm>
+            <a:off x="868680" y="3794760"/>
+            <a:ext cx="1996363" cy="2011680"/>
+          </a:xfrm>
+          <a:prstGeom prst="rect">
+            <a:avLst/>
+          </a:prstGeom>
+          <a:noFill/>
+        </p:spPr>
+        <p:txBody>
+          <a:bodyPr wrap="square" anchor="t" lIns="0" rIns="0" tIns="0" bIns="0">
+            <a:spAutoFit/>
+          </a:bodyPr>
+          <a:lstStyle/>
+          <a:p>
+            <a:pPr algn="l">
+              <a:lnSpc>
+                <a:spcPct val="155000"/>
+              </a:lnSpc>
+            </a:pPr>
+            <a:r>
+              <a:rPr sz="1350" b="0">
+                <a:solidFill>
+                  <a:srgbClr val="1C2A33"/>
+                </a:solidFill>
+                <a:latin typeface="楷体"/>
+                <a:ea typeface="楷体"/>
+                <a:cs typeface="楷体"/>
+              </a:rPr>
+              <a:t>抬头看人，像聊天："我写的是门卫王师傅，有件事印象特别深……"，不是背作文。</a:t>
+            </a:r>
+          </a:p>
+        </p:txBody>
+      </p:sp>
+      <p:sp>
+        <p:nvSpPr>
+          <p:cNvPr id="10" name="Rounded Rectangle 9"/>
+          <p:cNvSpPr/>
+          <p:nvPr/>
+        </p:nvSpPr>
+        <p:spPr>
+          <a:xfrm>
+            <a:off x="3459403" y="2194560"/>
+            <a:ext cx="2453563" cy="3840480"/>
           </a:xfrm>
           <a:prstGeom prst="roundRect">
             <a:avLst/>
@@ -5494,23 +6340,140 @@
       </p:sp>
       <p:sp>
         <p:nvSpPr>
-          <p:cNvPr id="6" name="Oval 5"/>
+          <p:cNvPr id="11" name="TextBox 10"/>
+          <p:cNvSpPr txBox="1"/>
+          <p:nvPr/>
+        </p:nvSpPr>
+        <p:spPr>
+          <a:xfrm>
+            <a:off x="3688003" y="2468880"/>
+            <a:ext cx="1996363" cy="548640"/>
+          </a:xfrm>
+          <a:prstGeom prst="rect">
+            <a:avLst/>
+          </a:prstGeom>
+          <a:noFill/>
+        </p:spPr>
+        <p:txBody>
+          <a:bodyPr wrap="square" anchor="t" lIns="0" rIns="0" tIns="0" bIns="0">
+            <a:spAutoFit/>
+          </a:bodyPr>
+          <a:lstStyle/>
+          <a:p>
+            <a:pPr algn="l"/>
+            <a:r>
+              <a:rPr sz="2200" b="1">
+                <a:solidFill>
+                  <a:srgbClr val="2E7D6B"/>
+                </a:solidFill>
+                <a:latin typeface="楷体"/>
+                <a:ea typeface="楷体"/>
+                <a:cs typeface="楷体"/>
+              </a:rPr>
+              <a:t>有细节</a:t>
+            </a:r>
+          </a:p>
+        </p:txBody>
+      </p:sp>
+      <p:sp>
+        <p:nvSpPr>
+          <p:cNvPr id="12" name="TextBox 11"/>
+          <p:cNvSpPr txBox="1"/>
+          <p:nvPr/>
+        </p:nvSpPr>
+        <p:spPr>
+          <a:xfrm>
+            <a:off x="3688003" y="3154680"/>
+            <a:ext cx="1996363" cy="457200"/>
+          </a:xfrm>
+          <a:prstGeom prst="rect">
+            <a:avLst/>
+          </a:prstGeom>
+          <a:noFill/>
+        </p:spPr>
+        <p:txBody>
+          <a:bodyPr wrap="square" anchor="t" lIns="0" rIns="0" tIns="0" bIns="0">
+            <a:spAutoFit/>
+          </a:bodyPr>
+          <a:lstStyle/>
+          <a:p>
+            <a:pPr algn="l"/>
+            <a:r>
+              <a:rPr sz="1500" b="1">
+                <a:solidFill>
+                  <a:srgbClr val="6B6258"/>
+                </a:solidFill>
+                <a:latin typeface="微软雅黑"/>
+                <a:ea typeface="微软雅黑"/>
+                <a:cs typeface="微软雅黑"/>
+              </a:rPr>
+              <a:t>讲画面</a:t>
+            </a:r>
+          </a:p>
+        </p:txBody>
+      </p:sp>
+      <p:sp>
+        <p:nvSpPr>
+          <p:cNvPr id="13" name="TextBox 12"/>
+          <p:cNvSpPr txBox="1"/>
+          <p:nvPr/>
+        </p:nvSpPr>
+        <p:spPr>
+          <a:xfrm>
+            <a:off x="3688003" y="3794760"/>
+            <a:ext cx="1996363" cy="2011680"/>
+          </a:xfrm>
+          <a:prstGeom prst="rect">
+            <a:avLst/>
+          </a:prstGeom>
+          <a:noFill/>
+        </p:spPr>
+        <p:txBody>
+          <a:bodyPr wrap="square" anchor="t" lIns="0" rIns="0" tIns="0" bIns="0">
+            <a:spAutoFit/>
+          </a:bodyPr>
+          <a:lstStyle/>
+          <a:p>
+            <a:pPr algn="l">
+              <a:lnSpc>
+                <a:spcPct val="155000"/>
+              </a:lnSpc>
+            </a:pPr>
+            <a:r>
+              <a:rPr sz="1350" b="0">
+                <a:solidFill>
+                  <a:srgbClr val="1C2A33"/>
+                </a:solidFill>
+                <a:latin typeface="楷体"/>
+                <a:ea typeface="楷体"/>
+                <a:cs typeface="楷体"/>
+              </a:rPr>
+              <a:t>讲1–2个具体画面：一抓准、手抖、凌晨四点——让事实自己说话。</a:t>
+            </a:r>
+          </a:p>
+        </p:txBody>
+      </p:sp>
+      <p:sp>
+        <p:nvSpPr>
+          <p:cNvPr id="14" name="Rounded Rectangle 13"/>
           <p:cNvSpPr/>
           <p:nvPr/>
         </p:nvSpPr>
         <p:spPr>
           <a:xfrm>
-            <a:off x="804672" y="1536192"/>
-            <a:ext cx="457200" cy="457200"/>
-          </a:xfrm>
-          <a:prstGeom prst="ellipse">
+            <a:off x="6278727" y="2194560"/>
+            <a:ext cx="2453563" cy="3840480"/>
+          </a:xfrm>
+          <a:prstGeom prst="roundRect">
             <a:avLst/>
           </a:prstGeom>
           <a:solidFill>
-            <a:srgbClr val="2E7D6B"/>
+            <a:srgbClr val="FFFFFF"/>
           </a:solidFill>
-          <a:ln>
-            <a:noFill/>
+          <a:ln w="22860">
+            <a:solidFill>
+              <a:srgbClr val="C8A86B"/>
+            </a:solidFill>
           </a:ln>
           <a:effectLst/>
         </p:spPr>
@@ -5538,14 +6501,14 @@
       </p:sp>
       <p:sp>
         <p:nvSpPr>
-          <p:cNvPr id="7" name="TextBox 6"/>
+          <p:cNvPr id="15" name="TextBox 14"/>
           <p:cNvSpPr txBox="1"/>
           <p:nvPr/>
         </p:nvSpPr>
         <p:spPr>
           <a:xfrm>
-            <a:off x="804672" y="1591056"/>
-            <a:ext cx="457200" cy="384048"/>
+            <a:off x="6507327" y="2468880"/>
+            <a:ext cx="1996363" cy="548640"/>
           </a:xfrm>
           <a:prstGeom prst="rect">
             <a:avLst/>
@@ -5558,31 +6521,68 @@
           </a:bodyPr>
           <a:lstStyle/>
           <a:p>
-            <a:pPr algn="ctr"/>
-            <a:r>
-              <a:rPr sz="1600" b="1">
-                <a:solidFill>
-                  <a:srgbClr val="FFFFFF"/>
+            <a:pPr algn="l"/>
+            <a:r>
+              <a:rPr sz="2200" b="1">
+                <a:solidFill>
+                  <a:srgbClr val="C8A86B"/>
+                </a:solidFill>
+                <a:latin typeface="楷体"/>
+                <a:ea typeface="楷体"/>
+                <a:cs typeface="楷体"/>
+              </a:rPr>
+              <a:t>有精神</a:t>
+            </a:r>
+          </a:p>
+        </p:txBody>
+      </p:sp>
+      <p:sp>
+        <p:nvSpPr>
+          <p:cNvPr id="16" name="TextBox 15"/>
+          <p:cNvSpPr txBox="1"/>
+          <p:nvPr/>
+        </p:nvSpPr>
+        <p:spPr>
+          <a:xfrm>
+            <a:off x="6507327" y="3154680"/>
+            <a:ext cx="1996363" cy="457200"/>
+          </a:xfrm>
+          <a:prstGeom prst="rect">
+            <a:avLst/>
+          </a:prstGeom>
+          <a:noFill/>
+        </p:spPr>
+        <p:txBody>
+          <a:bodyPr wrap="square" anchor="t" lIns="0" rIns="0" tIns="0" bIns="0">
+            <a:spAutoFit/>
+          </a:bodyPr>
+          <a:lstStyle/>
+          <a:p>
+            <a:pPr algn="l"/>
+            <a:r>
+              <a:rPr sz="1500" b="1">
+                <a:solidFill>
+                  <a:srgbClr val="6B6258"/>
                 </a:solidFill>
                 <a:latin typeface="微软雅黑"/>
                 <a:ea typeface="微软雅黑"/>
                 <a:cs typeface="微软雅黑"/>
               </a:rPr>
-              <a:t>1</a:t>
-            </a:r>
-          </a:p>
-        </p:txBody>
-      </p:sp>
-      <p:sp>
-        <p:nvSpPr>
-          <p:cNvPr id="8" name="TextBox 7"/>
+              <a:t>点一句</a:t>
+            </a:r>
+          </a:p>
+        </p:txBody>
+      </p:sp>
+      <p:sp>
+        <p:nvSpPr>
+          <p:cNvPr id="17" name="TextBox 16"/>
           <p:cNvSpPr txBox="1"/>
           <p:nvPr/>
         </p:nvSpPr>
         <p:spPr>
           <a:xfrm>
-            <a:off x="1371600" y="1481328"/>
-            <a:ext cx="9997135" cy="484632"/>
+            <a:off x="6507327" y="3794760"/>
+            <a:ext cx="1996363" cy="2011680"/>
           </a:xfrm>
           <a:prstGeom prst="rect">
             <a:avLst/>
@@ -5597,33 +6597,33 @@
           <a:p>
             <a:pPr algn="l">
               <a:lnSpc>
-                <a:spcPct val="110000"/>
+                <a:spcPct val="155000"/>
               </a:lnSpc>
             </a:pPr>
             <a:r>
-              <a:rPr sz="1600" b="1">
+              <a:rPr sz="1350" b="0">
                 <a:solidFill>
                   <a:srgbClr val="1C2A33"/>
                 </a:solidFill>
-                <a:latin typeface="微软雅黑"/>
-                <a:ea typeface="微软雅黑"/>
-                <a:cs typeface="微软雅黑"/>
-              </a:rPr>
-              <a:t>Step 1 单元回顾</a:t>
-            </a:r>
-          </a:p>
-        </p:txBody>
-      </p:sp>
-      <p:sp>
-        <p:nvSpPr>
-          <p:cNvPr id="9" name="Rounded Rectangle 8"/>
+                <a:latin typeface="楷体"/>
+                <a:ea typeface="楷体"/>
+                <a:cs typeface="楷体"/>
+              </a:rPr>
+              <a:t>结尾点一句他身上的劳动精神，不喊口号，落在那件事上。</a:t>
+            </a:r>
+          </a:p>
+        </p:txBody>
+      </p:sp>
+      <p:sp>
+        <p:nvSpPr>
+          <p:cNvPr id="18" name="Rounded Rectangle 17"/>
           <p:cNvSpPr/>
           <p:nvPr/>
         </p:nvSpPr>
         <p:spPr>
           <a:xfrm>
-            <a:off x="640080" y="2194560"/>
-            <a:ext cx="10911535" cy="685800"/>
+            <a:off x="9098051" y="2194560"/>
+            <a:ext cx="2453563" cy="3840480"/>
           </a:xfrm>
           <a:prstGeom prst="roundRect">
             <a:avLst/>
@@ -5633,7 +6633,7 @@
           </a:solidFill>
           <a:ln w="22860">
             <a:solidFill>
-              <a:srgbClr val="2E7D6B"/>
+              <a:srgbClr val="6B6258"/>
             </a:solidFill>
           </a:ln>
           <a:effectLst/>
@@ -5662,58 +6662,14 @@
       </p:sp>
       <p:sp>
         <p:nvSpPr>
-          <p:cNvPr id="10" name="Oval 9"/>
-          <p:cNvSpPr/>
-          <p:nvPr/>
-        </p:nvSpPr>
-        <p:spPr>
-          <a:xfrm>
-            <a:off x="804672" y="2359152"/>
-            <a:ext cx="457200" cy="457200"/>
-          </a:xfrm>
-          <a:prstGeom prst="ellipse">
-            <a:avLst/>
-          </a:prstGeom>
-          <a:solidFill>
-            <a:srgbClr val="2E7D6B"/>
-          </a:solidFill>
-          <a:ln>
-            <a:noFill/>
-          </a:ln>
-          <a:effectLst/>
-        </p:spPr>
-        <p:style>
-          <a:lnRef idx="1">
-            <a:schemeClr val="accent1"/>
-          </a:lnRef>
-          <a:fillRef idx="3">
-            <a:schemeClr val="accent1"/>
-          </a:fillRef>
-          <a:effectRef idx="2">
-            <a:schemeClr val="accent1"/>
-          </a:effectRef>
-          <a:fontRef idx="minor">
-            <a:schemeClr val="lt1"/>
-          </a:fontRef>
-        </p:style>
-        <p:txBody>
-          <a:bodyPr rtlCol="0" anchor="ctr"/>
-          <a:lstStyle/>
-          <a:p>
-            <a:pPr algn="ctr"/>
-          </a:p>
-        </p:txBody>
-      </p:sp>
-      <p:sp>
-        <p:nvSpPr>
-          <p:cNvPr id="11" name="TextBox 10"/>
+          <p:cNvPr id="19" name="TextBox 18"/>
           <p:cNvSpPr txBox="1"/>
           <p:nvPr/>
         </p:nvSpPr>
         <p:spPr>
           <a:xfrm>
-            <a:off x="804672" y="2414016"/>
-            <a:ext cx="457200" cy="384048"/>
+            <a:off x="9326651" y="2468880"/>
+            <a:ext cx="1996363" cy="548640"/>
           </a:xfrm>
           <a:prstGeom prst="rect">
             <a:avLst/>
@@ -5726,31 +6682,68 @@
           </a:bodyPr>
           <a:lstStyle/>
           <a:p>
-            <a:pPr algn="ctr"/>
-            <a:r>
-              <a:rPr sz="1600" b="1">
-                <a:solidFill>
-                  <a:srgbClr val="FFFFFF"/>
+            <a:pPr algn="l"/>
+            <a:r>
+              <a:rPr sz="2200" b="1">
+                <a:solidFill>
+                  <a:srgbClr val="6B6258"/>
+                </a:solidFill>
+                <a:latin typeface="楷体"/>
+                <a:ea typeface="楷体"/>
+                <a:cs typeface="楷体"/>
+              </a:rPr>
+              <a:t>2分钟</a:t>
+            </a:r>
+          </a:p>
+        </p:txBody>
+      </p:sp>
+      <p:sp>
+        <p:nvSpPr>
+          <p:cNvPr id="20" name="TextBox 19"/>
+          <p:cNvSpPr txBox="1"/>
+          <p:nvPr/>
+        </p:nvSpPr>
+        <p:spPr>
+          <a:xfrm>
+            <a:off x="9326651" y="3154680"/>
+            <a:ext cx="1996363" cy="457200"/>
+          </a:xfrm>
+          <a:prstGeom prst="rect">
+            <a:avLst/>
+          </a:prstGeom>
+          <a:noFill/>
+        </p:spPr>
+        <p:txBody>
+          <a:bodyPr wrap="square" anchor="t" lIns="0" rIns="0" tIns="0" bIns="0">
+            <a:spAutoFit/>
+          </a:bodyPr>
+          <a:lstStyle/>
+          <a:p>
+            <a:pPr algn="l"/>
+            <a:r>
+              <a:rPr sz="1500" b="1">
+                <a:solidFill>
+                  <a:srgbClr val="6B6258"/>
                 </a:solidFill>
                 <a:latin typeface="微软雅黑"/>
                 <a:ea typeface="微软雅黑"/>
                 <a:cs typeface="微软雅黑"/>
               </a:rPr>
-              <a:t>2</a:t>
-            </a:r>
-          </a:p>
-        </p:txBody>
-      </p:sp>
-      <p:sp>
-        <p:nvSpPr>
-          <p:cNvPr id="12" name="TextBox 11"/>
+              <a:t>守时间</a:t>
+            </a:r>
+          </a:p>
+        </p:txBody>
+      </p:sp>
+      <p:sp>
+        <p:nvSpPr>
+          <p:cNvPr id="21" name="TextBox 20"/>
           <p:cNvSpPr txBox="1"/>
           <p:nvPr/>
         </p:nvSpPr>
         <p:spPr>
           <a:xfrm>
-            <a:off x="1371600" y="2304288"/>
-            <a:ext cx="9997135" cy="484632"/>
+            <a:off x="9326651" y="3794760"/>
+            <a:ext cx="1996363" cy="2011680"/>
           </a:xfrm>
           <a:prstGeom prst="rect">
             <a:avLst/>
@@ -5765,530 +6758,26 @@
           <a:p>
             <a:pPr algn="l">
               <a:lnSpc>
-                <a:spcPct val="110000"/>
+                <a:spcPct val="155000"/>
               </a:lnSpc>
             </a:pPr>
             <a:r>
-              <a:rPr sz="1400" b="1">
+              <a:rPr sz="1350" b="0">
                 <a:solidFill>
                   <a:srgbClr val="1C2A33"/>
                 </a:solidFill>
-                <a:latin typeface="微软雅黑"/>
-                <a:ea typeface="微软雅黑"/>
-                <a:cs typeface="微软雅黑"/>
-              </a:rPr>
-              <a:t>Step 2 劳动者故事分享会（上）</a:t>
-            </a:r>
-          </a:p>
-        </p:txBody>
-      </p:sp>
-      <p:sp>
-        <p:nvSpPr>
-          <p:cNvPr id="13" name="Rounded Rectangle 12"/>
-          <p:cNvSpPr/>
-          <p:nvPr/>
-        </p:nvSpPr>
-        <p:spPr>
-          <a:xfrm>
-            <a:off x="640080" y="3017520"/>
-            <a:ext cx="10911535" cy="685800"/>
-          </a:xfrm>
-          <a:prstGeom prst="roundRect">
-            <a:avLst/>
-          </a:prstGeom>
-          <a:solidFill>
-            <a:srgbClr val="FFFFFF"/>
-          </a:solidFill>
-          <a:ln w="22860">
-            <a:solidFill>
-              <a:srgbClr val="2E7D6B"/>
-            </a:solidFill>
-          </a:ln>
-          <a:effectLst/>
-        </p:spPr>
-        <p:style>
-          <a:lnRef idx="1">
-            <a:schemeClr val="accent1"/>
-          </a:lnRef>
-          <a:fillRef idx="3">
-            <a:schemeClr val="accent1"/>
-          </a:fillRef>
-          <a:effectRef idx="2">
-            <a:schemeClr val="accent1"/>
-          </a:effectRef>
-          <a:fontRef idx="minor">
-            <a:schemeClr val="lt1"/>
-          </a:fontRef>
-        </p:style>
-        <p:txBody>
-          <a:bodyPr rtlCol="0" anchor="ctr"/>
-          <a:lstStyle/>
-          <a:p>
-            <a:pPr algn="ctr"/>
-          </a:p>
-        </p:txBody>
-      </p:sp>
-      <p:sp>
-        <p:nvSpPr>
-          <p:cNvPr id="14" name="Oval 13"/>
-          <p:cNvSpPr/>
-          <p:nvPr/>
-        </p:nvSpPr>
-        <p:spPr>
-          <a:xfrm>
-            <a:off x="804672" y="3182112"/>
-            <a:ext cx="457200" cy="457200"/>
-          </a:xfrm>
-          <a:prstGeom prst="ellipse">
-            <a:avLst/>
-          </a:prstGeom>
-          <a:solidFill>
-            <a:srgbClr val="2E7D6B"/>
-          </a:solidFill>
-          <a:ln>
-            <a:noFill/>
-          </a:ln>
-          <a:effectLst/>
-        </p:spPr>
-        <p:style>
-          <a:lnRef idx="1">
-            <a:schemeClr val="accent1"/>
-          </a:lnRef>
-          <a:fillRef idx="3">
-            <a:schemeClr val="accent1"/>
-          </a:fillRef>
-          <a:effectRef idx="2">
-            <a:schemeClr val="accent1"/>
-          </a:effectRef>
-          <a:fontRef idx="minor">
-            <a:schemeClr val="lt1"/>
-          </a:fontRef>
-        </p:style>
-        <p:txBody>
-          <a:bodyPr rtlCol="0" anchor="ctr"/>
-          <a:lstStyle/>
-          <a:p>
-            <a:pPr algn="ctr"/>
-          </a:p>
-        </p:txBody>
-      </p:sp>
-      <p:sp>
-        <p:nvSpPr>
-          <p:cNvPr id="15" name="TextBox 14"/>
-          <p:cNvSpPr txBox="1"/>
-          <p:nvPr/>
-        </p:nvSpPr>
-        <p:spPr>
-          <a:xfrm>
-            <a:off x="804672" y="3236976"/>
-            <a:ext cx="457200" cy="384048"/>
-          </a:xfrm>
-          <a:prstGeom prst="rect">
-            <a:avLst/>
-          </a:prstGeom>
-          <a:noFill/>
-        </p:spPr>
-        <p:txBody>
-          <a:bodyPr wrap="square" anchor="t" lIns="0" rIns="0" tIns="0" bIns="0">
-            <a:spAutoFit/>
-          </a:bodyPr>
-          <a:lstStyle/>
-          <a:p>
-            <a:pPr algn="ctr"/>
-            <a:r>
-              <a:rPr sz="1600" b="1">
-                <a:solidFill>
-                  <a:srgbClr val="FFFFFF"/>
-                </a:solidFill>
-                <a:latin typeface="微软雅黑"/>
-                <a:ea typeface="微软雅黑"/>
-                <a:cs typeface="微软雅黑"/>
-              </a:rPr>
-              <a:t>3</a:t>
-            </a:r>
-          </a:p>
-        </p:txBody>
-      </p:sp>
-      <p:sp>
-        <p:nvSpPr>
-          <p:cNvPr id="16" name="TextBox 15"/>
-          <p:cNvSpPr txBox="1"/>
-          <p:nvPr/>
-        </p:nvSpPr>
-        <p:spPr>
-          <a:xfrm>
-            <a:off x="1371600" y="3127248"/>
-            <a:ext cx="9997135" cy="484632"/>
-          </a:xfrm>
-          <a:prstGeom prst="rect">
-            <a:avLst/>
-          </a:prstGeom>
-          <a:noFill/>
-        </p:spPr>
-        <p:txBody>
-          <a:bodyPr wrap="square" anchor="t" lIns="0" rIns="0" tIns="0" bIns="0">
-            <a:spAutoFit/>
-          </a:bodyPr>
-          <a:lstStyle/>
-          <a:p>
-            <a:pPr algn="l">
-              <a:lnSpc>
-                <a:spcPct val="110000"/>
-              </a:lnSpc>
-            </a:pPr>
-            <a:r>
-              <a:rPr sz="1400" b="1">
-                <a:solidFill>
-                  <a:srgbClr val="1C2A33"/>
-                </a:solidFill>
-                <a:latin typeface="微软雅黑"/>
-                <a:ea typeface="微软雅黑"/>
-                <a:cs typeface="微软雅黑"/>
-              </a:rPr>
-              <a:t>Step 3 劳动精神关键词展</a:t>
-            </a:r>
-          </a:p>
-        </p:txBody>
-      </p:sp>
-      <p:sp>
-        <p:nvSpPr>
-          <p:cNvPr id="17" name="Rounded Rectangle 16"/>
-          <p:cNvSpPr/>
-          <p:nvPr/>
-        </p:nvSpPr>
-        <p:spPr>
-          <a:xfrm>
-            <a:off x="640080" y="3840480"/>
-            <a:ext cx="10911535" cy="685800"/>
-          </a:xfrm>
-          <a:prstGeom prst="roundRect">
-            <a:avLst/>
-          </a:prstGeom>
-          <a:solidFill>
-            <a:srgbClr val="FFFFFF"/>
-          </a:solidFill>
-          <a:ln w="22860">
-            <a:solidFill>
-              <a:srgbClr val="2E7D6B"/>
-            </a:solidFill>
-          </a:ln>
-          <a:effectLst/>
-        </p:spPr>
-        <p:style>
-          <a:lnRef idx="1">
-            <a:schemeClr val="accent1"/>
-          </a:lnRef>
-          <a:fillRef idx="3">
-            <a:schemeClr val="accent1"/>
-          </a:fillRef>
-          <a:effectRef idx="2">
-            <a:schemeClr val="accent1"/>
-          </a:effectRef>
-          <a:fontRef idx="minor">
-            <a:schemeClr val="lt1"/>
-          </a:fontRef>
-        </p:style>
-        <p:txBody>
-          <a:bodyPr rtlCol="0" anchor="ctr"/>
-          <a:lstStyle/>
-          <a:p>
-            <a:pPr algn="ctr"/>
-          </a:p>
-        </p:txBody>
-      </p:sp>
-      <p:sp>
-        <p:nvSpPr>
-          <p:cNvPr id="18" name="Oval 17"/>
-          <p:cNvSpPr/>
-          <p:nvPr/>
-        </p:nvSpPr>
-        <p:spPr>
-          <a:xfrm>
-            <a:off x="804672" y="4005072"/>
-            <a:ext cx="457200" cy="457200"/>
-          </a:xfrm>
-          <a:prstGeom prst="ellipse">
-            <a:avLst/>
-          </a:prstGeom>
-          <a:solidFill>
-            <a:srgbClr val="2E7D6B"/>
-          </a:solidFill>
-          <a:ln>
-            <a:noFill/>
-          </a:ln>
-          <a:effectLst/>
-        </p:spPr>
-        <p:style>
-          <a:lnRef idx="1">
-            <a:schemeClr val="accent1"/>
-          </a:lnRef>
-          <a:fillRef idx="3">
-            <a:schemeClr val="accent1"/>
-          </a:fillRef>
-          <a:effectRef idx="2">
-            <a:schemeClr val="accent1"/>
-          </a:effectRef>
-          <a:fontRef idx="minor">
-            <a:schemeClr val="lt1"/>
-          </a:fontRef>
-        </p:style>
-        <p:txBody>
-          <a:bodyPr rtlCol="0" anchor="ctr"/>
-          <a:lstStyle/>
-          <a:p>
-            <a:pPr algn="ctr"/>
-          </a:p>
-        </p:txBody>
-      </p:sp>
-      <p:sp>
-        <p:nvSpPr>
-          <p:cNvPr id="19" name="TextBox 18"/>
-          <p:cNvSpPr txBox="1"/>
-          <p:nvPr/>
-        </p:nvSpPr>
-        <p:spPr>
-          <a:xfrm>
-            <a:off x="804672" y="4059936"/>
-            <a:ext cx="457200" cy="384048"/>
-          </a:xfrm>
-          <a:prstGeom prst="rect">
-            <a:avLst/>
-          </a:prstGeom>
-          <a:noFill/>
-        </p:spPr>
-        <p:txBody>
-          <a:bodyPr wrap="square" anchor="t" lIns="0" rIns="0" tIns="0" bIns="0">
-            <a:spAutoFit/>
-          </a:bodyPr>
-          <a:lstStyle/>
-          <a:p>
-            <a:pPr algn="ctr"/>
-            <a:r>
-              <a:rPr sz="1600" b="1">
-                <a:solidFill>
-                  <a:srgbClr val="FFFFFF"/>
-                </a:solidFill>
-                <a:latin typeface="微软雅黑"/>
-                <a:ea typeface="微软雅黑"/>
-                <a:cs typeface="微软雅黑"/>
-              </a:rPr>
-              <a:t>4</a:t>
-            </a:r>
-          </a:p>
-        </p:txBody>
-      </p:sp>
-      <p:sp>
-        <p:nvSpPr>
-          <p:cNvPr id="20" name="TextBox 19"/>
-          <p:cNvSpPr txBox="1"/>
-          <p:nvPr/>
-        </p:nvSpPr>
-        <p:spPr>
-          <a:xfrm>
-            <a:off x="1371600" y="3950208"/>
-            <a:ext cx="9997135" cy="484632"/>
-          </a:xfrm>
-          <a:prstGeom prst="rect">
-            <a:avLst/>
-          </a:prstGeom>
-          <a:noFill/>
-        </p:spPr>
-        <p:txBody>
-          <a:bodyPr wrap="square" anchor="t" lIns="0" rIns="0" tIns="0" bIns="0">
-            <a:spAutoFit/>
-          </a:bodyPr>
-          <a:lstStyle/>
-          <a:p>
-            <a:pPr algn="l">
-              <a:lnSpc>
-                <a:spcPct val="110000"/>
-              </a:lnSpc>
-            </a:pPr>
-            <a:r>
-              <a:rPr sz="1400" b="1">
-                <a:solidFill>
-                  <a:srgbClr val="1C2A33"/>
-                </a:solidFill>
-                <a:latin typeface="微软雅黑"/>
-                <a:ea typeface="微软雅黑"/>
-                <a:cs typeface="微软雅黑"/>
-              </a:rPr>
-              <a:t>Step 4 单元学习反思单</a:t>
-            </a:r>
-          </a:p>
-        </p:txBody>
-      </p:sp>
-      <p:sp>
-        <p:nvSpPr>
-          <p:cNvPr id="21" name="Rounded Rectangle 20"/>
-          <p:cNvSpPr/>
-          <p:nvPr/>
-        </p:nvSpPr>
-        <p:spPr>
-          <a:xfrm>
-            <a:off x="640080" y="4663440"/>
-            <a:ext cx="10911535" cy="685800"/>
-          </a:xfrm>
-          <a:prstGeom prst="roundRect">
-            <a:avLst/>
-          </a:prstGeom>
-          <a:solidFill>
-            <a:srgbClr val="FFFFFF"/>
-          </a:solidFill>
-          <a:ln w="22860">
-            <a:solidFill>
-              <a:srgbClr val="2E7D6B"/>
-            </a:solidFill>
-          </a:ln>
-          <a:effectLst/>
-        </p:spPr>
-        <p:style>
-          <a:lnRef idx="1">
-            <a:schemeClr val="accent1"/>
-          </a:lnRef>
-          <a:fillRef idx="3">
-            <a:schemeClr val="accent1"/>
-          </a:fillRef>
-          <a:effectRef idx="2">
-            <a:schemeClr val="accent1"/>
-          </a:effectRef>
-          <a:fontRef idx="minor">
-            <a:schemeClr val="lt1"/>
-          </a:fontRef>
-        </p:style>
-        <p:txBody>
-          <a:bodyPr rtlCol="0" anchor="ctr"/>
-          <a:lstStyle/>
-          <a:p>
-            <a:pPr algn="ctr"/>
-          </a:p>
-        </p:txBody>
-      </p:sp>
-      <p:sp>
-        <p:nvSpPr>
-          <p:cNvPr id="22" name="Oval 21"/>
-          <p:cNvSpPr/>
-          <p:nvPr/>
-        </p:nvSpPr>
-        <p:spPr>
-          <a:xfrm>
-            <a:off x="804672" y="4828032"/>
-            <a:ext cx="457200" cy="457200"/>
-          </a:xfrm>
-          <a:prstGeom prst="ellipse">
-            <a:avLst/>
-          </a:prstGeom>
-          <a:solidFill>
-            <a:srgbClr val="2E7D6B"/>
-          </a:solidFill>
-          <a:ln>
-            <a:noFill/>
-          </a:ln>
-          <a:effectLst/>
-        </p:spPr>
-        <p:style>
-          <a:lnRef idx="1">
-            <a:schemeClr val="accent1"/>
-          </a:lnRef>
-          <a:fillRef idx="3">
-            <a:schemeClr val="accent1"/>
-          </a:fillRef>
-          <a:effectRef idx="2">
-            <a:schemeClr val="accent1"/>
-          </a:effectRef>
-          <a:fontRef idx="minor">
-            <a:schemeClr val="lt1"/>
-          </a:fontRef>
-        </p:style>
-        <p:txBody>
-          <a:bodyPr rtlCol="0" anchor="ctr"/>
-          <a:lstStyle/>
-          <a:p>
-            <a:pPr algn="ctr"/>
-          </a:p>
-        </p:txBody>
-      </p:sp>
-      <p:sp>
-        <p:nvSpPr>
-          <p:cNvPr id="23" name="TextBox 22"/>
-          <p:cNvSpPr txBox="1"/>
-          <p:nvPr/>
-        </p:nvSpPr>
-        <p:spPr>
-          <a:xfrm>
-            <a:off x="804672" y="4882896"/>
-            <a:ext cx="457200" cy="384048"/>
-          </a:xfrm>
-          <a:prstGeom prst="rect">
-            <a:avLst/>
-          </a:prstGeom>
-          <a:noFill/>
-        </p:spPr>
-        <p:txBody>
-          <a:bodyPr wrap="square" anchor="t" lIns="0" rIns="0" tIns="0" bIns="0">
-            <a:spAutoFit/>
-          </a:bodyPr>
-          <a:lstStyle/>
-          <a:p>
-            <a:pPr algn="ctr"/>
-            <a:r>
-              <a:rPr sz="1600" b="1">
-                <a:solidFill>
-                  <a:srgbClr val="FFFFFF"/>
-                </a:solidFill>
-                <a:latin typeface="微软雅黑"/>
-                <a:ea typeface="微软雅黑"/>
-                <a:cs typeface="微软雅黑"/>
-              </a:rPr>
-              <a:t>5</a:t>
-            </a:r>
-          </a:p>
-        </p:txBody>
-      </p:sp>
-      <p:sp>
-        <p:nvSpPr>
-          <p:cNvPr id="24" name="TextBox 23"/>
-          <p:cNvSpPr txBox="1"/>
-          <p:nvPr/>
-        </p:nvSpPr>
-        <p:spPr>
-          <a:xfrm>
-            <a:off x="1371600" y="4773168"/>
-            <a:ext cx="9997135" cy="484632"/>
-          </a:xfrm>
-          <a:prstGeom prst="rect">
-            <a:avLst/>
-          </a:prstGeom>
-          <a:noFill/>
-        </p:spPr>
-        <p:txBody>
-          <a:bodyPr wrap="square" anchor="t" lIns="0" rIns="0" tIns="0" bIns="0">
-            <a:spAutoFit/>
-          </a:bodyPr>
-          <a:lstStyle/>
-          <a:p>
-            <a:pPr algn="l">
-              <a:lnSpc>
-                <a:spcPct val="110000"/>
-              </a:lnSpc>
-            </a:pPr>
-            <a:r>
-              <a:rPr sz="1400" b="1">
-                <a:solidFill>
-                  <a:srgbClr val="1C2A33"/>
-                </a:solidFill>
-                <a:latin typeface="微软雅黑"/>
-                <a:ea typeface="微软雅黑"/>
-                <a:cs typeface="微软雅黑"/>
-              </a:rPr>
-              <a:t>Step 5 分享反思+总结</a:t>
-            </a:r>
-          </a:p>
-        </p:txBody>
-      </p:sp>
-      <p:sp>
-        <p:nvSpPr>
-          <p:cNvPr id="25" name="TextBox 24"/>
+                <a:latin typeface="楷体"/>
+                <a:ea typeface="楷体"/>
+                <a:cs typeface="楷体"/>
+              </a:rPr>
+              <a:t>严格计时，超时叫停；内容宁愿少而精，不要拖。</a:t>
+            </a:r>
+          </a:p>
+        </p:txBody>
+      </p:sp>
+      <p:sp>
+        <p:nvSpPr>
+          <p:cNvPr id="22" name="TextBox 21"/>
           <p:cNvSpPr txBox="1"/>
           <p:nvPr/>
         </p:nvSpPr>
@@ -6421,7 +6910,7 @@
                 <a:ea typeface="微软雅黑"/>
                 <a:cs typeface="微软雅黑"/>
               </a:rPr>
-              <a:t>易混易错</a:t>
+              <a:t>难点 · 怎么破</a:t>
             </a:r>
           </a:p>
         </p:txBody>
@@ -6472,14 +6961,51 @@
       </p:sp>
       <p:sp>
         <p:nvSpPr>
-          <p:cNvPr id="5" name="Rounded Rectangle 4"/>
+          <p:cNvPr id="5" name="TextBox 4"/>
+          <p:cNvSpPr txBox="1"/>
+          <p:nvPr/>
+        </p:nvSpPr>
+        <p:spPr>
+          <a:xfrm>
+            <a:off x="640080" y="1325880"/>
+            <a:ext cx="10058400" cy="548640"/>
+          </a:xfrm>
+          <a:prstGeom prst="rect">
+            <a:avLst/>
+          </a:prstGeom>
+          <a:noFill/>
+        </p:spPr>
+        <p:txBody>
+          <a:bodyPr wrap="square" anchor="t" lIns="0" rIns="0" tIns="0" bIns="0">
+            <a:spAutoFit/>
+          </a:bodyPr>
+          <a:lstStyle/>
+          <a:p>
+            <a:pPr algn="l"/>
+            <a:r>
+              <a:rPr sz="2600" b="1">
+                <a:solidFill>
+                  <a:srgbClr val="1C2A33"/>
+                </a:solidFill>
+                <a:latin typeface="楷体"/>
+                <a:ea typeface="楷体"/>
+                <a:cs typeface="楷体"/>
+              </a:rPr>
+              <a:t>三处容易卡住的地方</a:t>
+            </a:r>
+          </a:p>
+        </p:txBody>
+      </p:sp>
+      <p:sp>
+        <p:nvSpPr>
+          <p:cNvPr id="6" name="Rounded Rectangle 5"/>
           <p:cNvSpPr/>
           <p:nvPr/>
         </p:nvSpPr>
         <p:spPr>
           <a:xfrm>
-            <a:off x="640080" y="1417320"/>
-            <a:ext cx="5349240" cy="2057400"/>
+            <a:off x="640080" y="2194560"/>
+            <a:ext cx="3393338" cy="3840480"/>
           </a:xfrm>
           <a:prstGeom prst="roundRect">
             <a:avLst/>
@@ -6487,7 +7013,7 @@
           <a:solidFill>
             <a:srgbClr val="FFFFFF"/>
           </a:solidFill>
-          <a:ln w="22860">
+          <a:ln w="20320">
             <a:solidFill>
               <a:srgbClr val="B23A2A"/>
             </a:solidFill>
@@ -6518,14 +7044,14 @@
       </p:sp>
       <p:sp>
         <p:nvSpPr>
-          <p:cNvPr id="6" name="Oval 5"/>
+          <p:cNvPr id="7" name="Oval 6"/>
           <p:cNvSpPr/>
           <p:nvPr/>
         </p:nvSpPr>
         <p:spPr>
           <a:xfrm>
-            <a:off x="804672" y="1581912"/>
-            <a:ext cx="457200" cy="457200"/>
+            <a:off x="868680" y="2423160"/>
+            <a:ext cx="548640" cy="548640"/>
           </a:xfrm>
           <a:prstGeom prst="ellipse">
             <a:avLst/>
@@ -6562,14 +7088,14 @@
       </p:sp>
       <p:sp>
         <p:nvSpPr>
-          <p:cNvPr id="7" name="TextBox 6"/>
+          <p:cNvPr id="8" name="TextBox 7"/>
           <p:cNvSpPr txBox="1"/>
           <p:nvPr/>
         </p:nvSpPr>
         <p:spPr>
           <a:xfrm>
-            <a:off x="804672" y="1636776"/>
-            <a:ext cx="457200" cy="384048"/>
+            <a:off x="868680" y="2496312"/>
+            <a:ext cx="548640" cy="411480"/>
           </a:xfrm>
           <a:prstGeom prst="rect">
             <a:avLst/>
@@ -6584,7 +7110,7 @@
           <a:p>
             <a:pPr algn="ctr"/>
             <a:r>
-              <a:rPr sz="1600" b="1">
+              <a:rPr sz="2000" b="1">
                 <a:solidFill>
                   <a:srgbClr val="FFFFFF"/>
                 </a:solidFill>
@@ -6592,21 +7118,21 @@
                 <a:ea typeface="微软雅黑"/>
                 <a:cs typeface="微软雅黑"/>
               </a:rPr>
-              <a:t>!</a:t>
-            </a:r>
-          </a:p>
-        </p:txBody>
-      </p:sp>
-      <p:sp>
-        <p:nvSpPr>
-          <p:cNvPr id="8" name="TextBox 7"/>
+              <a:t>1</a:t>
+            </a:r>
+          </a:p>
+        </p:txBody>
+      </p:sp>
+      <p:sp>
+        <p:nvSpPr>
+          <p:cNvPr id="9" name="TextBox 8"/>
           <p:cNvSpPr txBox="1"/>
           <p:nvPr/>
         </p:nvSpPr>
         <p:spPr>
           <a:xfrm>
-            <a:off x="1371600" y="1527048"/>
-            <a:ext cx="4434840" cy="457200"/>
+            <a:off x="1554480" y="2450592"/>
+            <a:ext cx="2296058" cy="731520"/>
           </a:xfrm>
           <a:prstGeom prst="rect">
             <a:avLst/>
@@ -6621,33 +7147,33 @@
           <a:p>
             <a:pPr algn="l">
               <a:lnSpc>
-                <a:spcPct val="110000"/>
+                <a:spcPct val="130000"/>
               </a:lnSpc>
             </a:pPr>
             <a:r>
-              <a:rPr sz="1600" b="1">
+              <a:rPr sz="1650" b="1">
                 <a:solidFill>
                   <a:srgbClr val="1C2A33"/>
                 </a:solidFill>
-                <a:latin typeface="微软雅黑"/>
-                <a:ea typeface="微软雅黑"/>
-                <a:cs typeface="微软雅黑"/>
-              </a:rPr>
-              <a:t/>
-            </a:r>
-          </a:p>
-        </p:txBody>
-      </p:sp>
-      <p:sp>
-        <p:nvSpPr>
-          <p:cNvPr id="9" name="TextBox 8"/>
+                <a:latin typeface="楷体"/>
+                <a:ea typeface="楷体"/>
+                <a:cs typeface="楷体"/>
+              </a:rPr>
+              <a:t>念稿不像讲故事</a:t>
+            </a:r>
+          </a:p>
+        </p:txBody>
+      </p:sp>
+      <p:sp>
+        <p:nvSpPr>
+          <p:cNvPr id="10" name="TextBox 9"/>
           <p:cNvSpPr txBox="1"/>
           <p:nvPr/>
         </p:nvSpPr>
         <p:spPr>
           <a:xfrm>
-            <a:off x="1371600" y="1965960"/>
-            <a:ext cx="4434840" cy="1417320"/>
+            <a:off x="914400" y="3246120"/>
+            <a:ext cx="2844698" cy="2651760"/>
           </a:xfrm>
           <a:prstGeom prst="rect">
             <a:avLst/>
@@ -6662,11 +7188,11 @@
           <a:p>
             <a:pPr algn="l">
               <a:lnSpc>
-                <a:spcPct val="128000"/>
+                <a:spcPct val="150000"/>
               </a:lnSpc>
             </a:pPr>
             <a:r>
-              <a:rPr sz="1200" b="0">
+              <a:rPr sz="1400" b="0">
                 <a:solidFill>
                   <a:srgbClr val="1C2A33"/>
                 </a:solidFill>
@@ -6674,21 +7200,21 @@
                 <a:ea typeface="楷体"/>
                 <a:cs typeface="楷体"/>
               </a:rPr>
-              <a:t>① 从「念稿」到「讲故事」的转换。原因：学生习惯读自己写的文字，缺乏口语化讲述训练，需给讲述技巧卡。</a:t>
-            </a:r>
-          </a:p>
-        </p:txBody>
-      </p:sp>
-      <p:sp>
-        <p:nvSpPr>
-          <p:cNvPr id="10" name="Rounded Rectangle 9"/>
+              <a:t>习惯读自己写的文字。→ 用技巧卡"抬头看人"，把通讯稿翻成口语讲。</a:t>
+            </a:r>
+          </a:p>
+        </p:txBody>
+      </p:sp>
+      <p:sp>
+        <p:nvSpPr>
+          <p:cNvPr id="11" name="Rounded Rectangle 10"/>
           <p:cNvSpPr/>
           <p:nvPr/>
         </p:nvSpPr>
         <p:spPr>
           <a:xfrm>
-            <a:off x="6263640" y="1417320"/>
-            <a:ext cx="5349240" cy="2057400"/>
+            <a:off x="4399178" y="2194560"/>
+            <a:ext cx="3393338" cy="3840480"/>
           </a:xfrm>
           <a:prstGeom prst="roundRect">
             <a:avLst/>
@@ -6696,9 +7222,9 @@
           <a:solidFill>
             <a:srgbClr val="FFFFFF"/>
           </a:solidFill>
-          <a:ln w="22860">
+          <a:ln w="20320">
             <a:solidFill>
-              <a:srgbClr val="B23A2A"/>
+              <a:srgbClr val="2E7D6B"/>
             </a:solidFill>
           </a:ln>
           <a:effectLst/>
@@ -6727,20 +7253,20 @@
       </p:sp>
       <p:sp>
         <p:nvSpPr>
-          <p:cNvPr id="11" name="Oval 10"/>
+          <p:cNvPr id="12" name="Oval 11"/>
           <p:cNvSpPr/>
           <p:nvPr/>
         </p:nvSpPr>
         <p:spPr>
           <a:xfrm>
-            <a:off x="6428232" y="1581912"/>
-            <a:ext cx="457200" cy="457200"/>
+            <a:off x="4627778" y="2423160"/>
+            <a:ext cx="548640" cy="548640"/>
           </a:xfrm>
           <a:prstGeom prst="ellipse">
             <a:avLst/>
           </a:prstGeom>
           <a:solidFill>
-            <a:srgbClr val="B23A2A"/>
+            <a:srgbClr val="2E7D6B"/>
           </a:solidFill>
           <a:ln>
             <a:noFill/>
@@ -6771,14 +7297,14 @@
       </p:sp>
       <p:sp>
         <p:nvSpPr>
-          <p:cNvPr id="12" name="TextBox 11"/>
+          <p:cNvPr id="13" name="TextBox 12"/>
           <p:cNvSpPr txBox="1"/>
           <p:nvPr/>
         </p:nvSpPr>
         <p:spPr>
           <a:xfrm>
-            <a:off x="6428232" y="1636776"/>
-            <a:ext cx="457200" cy="384048"/>
+            <a:off x="4627778" y="2496312"/>
+            <a:ext cx="548640" cy="411480"/>
           </a:xfrm>
           <a:prstGeom prst="rect">
             <a:avLst/>
@@ -6793,7 +7319,7 @@
           <a:p>
             <a:pPr algn="ctr"/>
             <a:r>
-              <a:rPr sz="1600" b="1">
+              <a:rPr sz="2000" b="1">
                 <a:solidFill>
                   <a:srgbClr val="FFFFFF"/>
                 </a:solidFill>
@@ -6801,21 +7327,21 @@
                 <a:ea typeface="微软雅黑"/>
                 <a:cs typeface="微软雅黑"/>
               </a:rPr>
-              <a:t>!</a:t>
-            </a:r>
-          </a:p>
-        </p:txBody>
-      </p:sp>
-      <p:sp>
-        <p:nvSpPr>
-          <p:cNvPr id="13" name="TextBox 12"/>
+              <a:t>2</a:t>
+            </a:r>
+          </a:p>
+        </p:txBody>
+      </p:sp>
+      <p:sp>
+        <p:nvSpPr>
+          <p:cNvPr id="14" name="TextBox 13"/>
           <p:cNvSpPr txBox="1"/>
           <p:nvPr/>
         </p:nvSpPr>
         <p:spPr>
           <a:xfrm>
-            <a:off x="6995160" y="1527048"/>
-            <a:ext cx="4434840" cy="457200"/>
+            <a:off x="5313578" y="2450592"/>
+            <a:ext cx="2296058" cy="731520"/>
           </a:xfrm>
           <a:prstGeom prst="rect">
             <a:avLst/>
@@ -6830,33 +7356,33 @@
           <a:p>
             <a:pPr algn="l">
               <a:lnSpc>
-                <a:spcPct val="110000"/>
+                <a:spcPct val="130000"/>
               </a:lnSpc>
             </a:pPr>
             <a:r>
-              <a:rPr sz="1600" b="1">
+              <a:rPr sz="1650" b="1">
                 <a:solidFill>
                   <a:srgbClr val="1C2A33"/>
                 </a:solidFill>
-                <a:latin typeface="微软雅黑"/>
-                <a:ea typeface="微软雅黑"/>
-                <a:cs typeface="微软雅黑"/>
-              </a:rPr>
-              <a:t/>
-            </a:r>
-          </a:p>
-        </p:txBody>
-      </p:sp>
-      <p:sp>
-        <p:nvSpPr>
-          <p:cNvPr id="14" name="TextBox 13"/>
+                <a:latin typeface="楷体"/>
+                <a:ea typeface="楷体"/>
+                <a:cs typeface="楷体"/>
+              </a:rPr>
+              <a:t>反思写不深</a:t>
+            </a:r>
+          </a:p>
+        </p:txBody>
+      </p:sp>
+      <p:sp>
+        <p:nvSpPr>
+          <p:cNvPr id="15" name="TextBox 14"/>
           <p:cNvSpPr txBox="1"/>
           <p:nvPr/>
         </p:nvSpPr>
         <p:spPr>
           <a:xfrm>
-            <a:off x="6995160" y="1965960"/>
-            <a:ext cx="4434840" cy="1417320"/>
+            <a:off x="4673498" y="3246120"/>
+            <a:ext cx="2844698" cy="2651760"/>
           </a:xfrm>
           <a:prstGeom prst="rect">
             <a:avLst/>
@@ -6871,11 +7397,11 @@
           <a:p>
             <a:pPr algn="l">
               <a:lnSpc>
-                <a:spcPct val="128000"/>
+                <a:spcPct val="150000"/>
               </a:lnSpc>
             </a:pPr>
             <a:r>
-              <a:rPr sz="1200" b="0">
+              <a:rPr sz="1400" b="0">
                 <a:solidFill>
                   <a:srgbClr val="1C2A33"/>
                 </a:solidFill>
@@ -6883,21 +7409,21 @@
                 <a:ea typeface="楷体"/>
                 <a:cs typeface="楷体"/>
               </a:rPr>
-              <a:t>② 反思的深度。原因：学生习惯写「学到了很多」，需用具体提示引导（「我学会的最重要的一个方法是……」）。</a:t>
-            </a:r>
-          </a:p>
-        </p:txBody>
-      </p:sp>
-      <p:sp>
-        <p:nvSpPr>
-          <p:cNvPr id="15" name="Rounded Rectangle 14"/>
+              <a:t>爱写"学到了很多"。→ 用具体提示："我学会的最重要的一个方法是……"</a:t>
+            </a:r>
+          </a:p>
+        </p:txBody>
+      </p:sp>
+      <p:sp>
+        <p:nvSpPr>
+          <p:cNvPr id="16" name="Rounded Rectangle 15"/>
           <p:cNvSpPr/>
           <p:nvPr/>
         </p:nvSpPr>
         <p:spPr>
           <a:xfrm>
-            <a:off x="640080" y="3703320"/>
-            <a:ext cx="5349240" cy="2057400"/>
+            <a:off x="8158276" y="2194560"/>
+            <a:ext cx="3393338" cy="3840480"/>
           </a:xfrm>
           <a:prstGeom prst="roundRect">
             <a:avLst/>
@@ -6905,9 +7431,9 @@
           <a:solidFill>
             <a:srgbClr val="FFFFFF"/>
           </a:solidFill>
-          <a:ln w="22860">
+          <a:ln w="20320">
             <a:solidFill>
-              <a:srgbClr val="B23A2A"/>
+              <a:srgbClr val="C8A86B"/>
             </a:solidFill>
           </a:ln>
           <a:effectLst/>
@@ -6936,20 +7462,20 @@
       </p:sp>
       <p:sp>
         <p:nvSpPr>
-          <p:cNvPr id="16" name="Oval 15"/>
+          <p:cNvPr id="17" name="Oval 16"/>
           <p:cNvSpPr/>
           <p:nvPr/>
         </p:nvSpPr>
         <p:spPr>
           <a:xfrm>
-            <a:off x="804672" y="3867912"/>
-            <a:ext cx="457200" cy="457200"/>
+            <a:off x="8386876" y="2423160"/>
+            <a:ext cx="548640" cy="548640"/>
           </a:xfrm>
           <a:prstGeom prst="ellipse">
             <a:avLst/>
           </a:prstGeom>
           <a:solidFill>
-            <a:srgbClr val="B23A2A"/>
+            <a:srgbClr val="C8A86B"/>
           </a:solidFill>
           <a:ln>
             <a:noFill/>
@@ -6980,14 +7506,14 @@
       </p:sp>
       <p:sp>
         <p:nvSpPr>
-          <p:cNvPr id="17" name="TextBox 16"/>
+          <p:cNvPr id="18" name="TextBox 17"/>
           <p:cNvSpPr txBox="1"/>
           <p:nvPr/>
         </p:nvSpPr>
         <p:spPr>
           <a:xfrm>
-            <a:off x="804672" y="3922776"/>
-            <a:ext cx="457200" cy="384048"/>
+            <a:off x="8386876" y="2496312"/>
+            <a:ext cx="548640" cy="411480"/>
           </a:xfrm>
           <a:prstGeom prst="rect">
             <a:avLst/>
@@ -7002,7 +7528,7 @@
           <a:p>
             <a:pPr algn="ctr"/>
             <a:r>
-              <a:rPr sz="1600" b="1">
+              <a:rPr sz="2000" b="1">
                 <a:solidFill>
                   <a:srgbClr val="FFFFFF"/>
                 </a:solidFill>
@@ -7010,21 +7536,21 @@
                 <a:ea typeface="微软雅黑"/>
                 <a:cs typeface="微软雅黑"/>
               </a:rPr>
-              <a:t>!</a:t>
-            </a:r>
-          </a:p>
-        </p:txBody>
-      </p:sp>
-      <p:sp>
-        <p:nvSpPr>
-          <p:cNvPr id="18" name="TextBox 17"/>
+              <a:t>3</a:t>
+            </a:r>
+          </a:p>
+        </p:txBody>
+      </p:sp>
+      <p:sp>
+        <p:nvSpPr>
+          <p:cNvPr id="19" name="TextBox 18"/>
           <p:cNvSpPr txBox="1"/>
           <p:nvPr/>
         </p:nvSpPr>
         <p:spPr>
           <a:xfrm>
-            <a:off x="1371600" y="3813048"/>
-            <a:ext cx="4434840" cy="457200"/>
+            <a:off x="9072676" y="2450592"/>
+            <a:ext cx="2296058" cy="731520"/>
           </a:xfrm>
           <a:prstGeom prst="rect">
             <a:avLst/>
@@ -7039,33 +7565,33 @@
           <a:p>
             <a:pPr algn="l">
               <a:lnSpc>
-                <a:spcPct val="110000"/>
+                <a:spcPct val="130000"/>
               </a:lnSpc>
             </a:pPr>
             <a:r>
-              <a:rPr sz="1600" b="1">
+              <a:rPr sz="1650" b="1">
                 <a:solidFill>
                   <a:srgbClr val="1C2A33"/>
                 </a:solidFill>
-                <a:latin typeface="微软雅黑"/>
-                <a:ea typeface="微软雅黑"/>
-                <a:cs typeface="微软雅黑"/>
-              </a:rPr>
-              <a:t/>
-            </a:r>
-          </a:p>
-        </p:txBody>
-      </p:sp>
-      <p:sp>
-        <p:nvSpPr>
-          <p:cNvPr id="19" name="TextBox 18"/>
+                <a:latin typeface="楷体"/>
+                <a:ea typeface="楷体"/>
+                <a:cs typeface="楷体"/>
+              </a:rPr>
+              <a:t>活动节奏拖</a:t>
+            </a:r>
+          </a:p>
+        </p:txBody>
+      </p:sp>
+      <p:sp>
+        <p:nvSpPr>
+          <p:cNvPr id="20" name="TextBox 19"/>
           <p:cNvSpPr txBox="1"/>
           <p:nvPr/>
         </p:nvSpPr>
         <p:spPr>
           <a:xfrm>
-            <a:off x="1371600" y="4251960"/>
-            <a:ext cx="4434840" cy="1417320"/>
+            <a:off x="8432596" y="3246120"/>
+            <a:ext cx="2844698" cy="2651760"/>
           </a:xfrm>
           <a:prstGeom prst="rect">
             <a:avLst/>
@@ -7080,7 +7606,7 @@
           <a:p>
             <a:pPr algn="l">
               <a:lnSpc>
-                <a:spcPct val="128000"/>
+                <a:spcPct val="150000"/>
               </a:lnSpc>
             </a:pPr>
             <a:r>
@@ -7092,14 +7618,14 @@
                 <a:ea typeface="楷体"/>
                 <a:cs typeface="楷体"/>
               </a:rPr>
-              <a:t>③ 活动节奏控制。原因：分享环节容易超时，需严格计时+灵活裁剪。</a:t>
-            </a:r>
-          </a:p>
-        </p:txBody>
-      </p:sp>
-      <p:sp>
-        <p:nvSpPr>
-          <p:cNvPr id="20" name="TextBox 19"/>
+              <a:t>分享环节易超时。→ 严格计时 + 灵活裁剪，必要时分两组并行。</a:t>
+            </a:r>
+          </a:p>
+        </p:txBody>
+      </p:sp>
+      <p:sp>
+        <p:nvSpPr>
+          <p:cNvPr id="21" name="TextBox 20"/>
           <p:cNvSpPr txBox="1"/>
           <p:nvPr/>
         </p:nvSpPr>
@@ -7226,13 +7752,13 @@
             <a:r>
               <a:rPr sz="1300" b="1">
                 <a:solidFill>
-                  <a:srgbClr val="C8A86B"/>
+                  <a:srgbClr val="B23A2A"/>
                 </a:solidFill>
                 <a:latin typeface="微软雅黑"/>
                 <a:ea typeface="微软雅黑"/>
                 <a:cs typeface="微软雅黑"/>
               </a:rPr>
-              <a:t>要点板书</a:t>
+              <a:t>探究 · 招牌招式</a:t>
             </a:r>
           </a:p>
         </p:txBody>
@@ -7252,7 +7778,7 @@
             <a:avLst/>
           </a:prstGeom>
           <a:solidFill>
-            <a:srgbClr val="C8A86B"/>
+            <a:srgbClr val="B23A2A"/>
           </a:solidFill>
           <a:ln>
             <a:noFill/>
@@ -7283,14 +7809,51 @@
       </p:sp>
       <p:sp>
         <p:nvSpPr>
-          <p:cNvPr id="5" name="Rounded Rectangle 4"/>
+          <p:cNvPr id="5" name="TextBox 4"/>
+          <p:cNvSpPr txBox="1"/>
+          <p:nvPr/>
+        </p:nvSpPr>
+        <p:spPr>
+          <a:xfrm>
+            <a:off x="640080" y="1280160"/>
+            <a:ext cx="10515600" cy="640080"/>
+          </a:xfrm>
+          <a:prstGeom prst="rect">
+            <a:avLst/>
+          </a:prstGeom>
+          <a:noFill/>
+        </p:spPr>
+        <p:txBody>
+          <a:bodyPr wrap="square" anchor="t" lIns="0" rIns="0" tIns="0" bIns="0">
+            <a:spAutoFit/>
+          </a:bodyPr>
+          <a:lstStyle/>
+          <a:p>
+            <a:pPr algn="l"/>
+            <a:r>
+              <a:rPr sz="2500" b="1">
+                <a:solidFill>
+                  <a:srgbClr val="1C2A33"/>
+                </a:solidFill>
+                <a:latin typeface="楷体"/>
+                <a:ea typeface="楷体"/>
+                <a:cs typeface="楷体"/>
+              </a:rPr>
+              <a:t>劳动精神墙 + 反思单</a:t>
+            </a:r>
+          </a:p>
+        </p:txBody>
+      </p:sp>
+      <p:sp>
+        <p:nvSpPr>
+          <p:cNvPr id="6" name="Rounded Rectangle 5"/>
           <p:cNvSpPr/>
           <p:nvPr/>
         </p:nvSpPr>
         <p:spPr>
           <a:xfrm>
-            <a:off x="640080" y="1417320"/>
-            <a:ext cx="10911535" cy="5394960"/>
+            <a:off x="640080" y="2057400"/>
+            <a:ext cx="5227167" cy="2057400"/>
           </a:xfrm>
           <a:prstGeom prst="roundRect">
             <a:avLst/>
@@ -7298,9 +7861,9 @@
           <a:solidFill>
             <a:srgbClr val="FFFFFF"/>
           </a:solidFill>
-          <a:ln w="25400">
+          <a:ln w="22860">
             <a:solidFill>
-              <a:srgbClr val="C8A86B"/>
+              <a:srgbClr val="B23A2A"/>
             </a:solidFill>
           </a:ln>
           <a:effectLst/>
@@ -7329,14 +7892,14 @@
       </p:sp>
       <p:sp>
         <p:nvSpPr>
-          <p:cNvPr id="6" name="TextBox 5"/>
+          <p:cNvPr id="7" name="TextBox 6"/>
           <p:cNvSpPr txBox="1"/>
           <p:nvPr/>
         </p:nvSpPr>
         <p:spPr>
           <a:xfrm>
-            <a:off x="914400" y="1554480"/>
-            <a:ext cx="10362895" cy="5120640"/>
+            <a:off x="914400" y="2212848"/>
+            <a:ext cx="4678527" cy="457200"/>
           </a:xfrm>
           <a:prstGeom prst="rect">
             <a:avLst/>
@@ -7349,12 +7912,49 @@
           </a:bodyPr>
           <a:lstStyle/>
           <a:p>
+            <a:pPr algn="l"/>
+            <a:r>
+              <a:rPr sz="1600" b="1">
+                <a:solidFill>
+                  <a:srgbClr val="B23A2A"/>
+                </a:solidFill>
+                <a:latin typeface="楷体"/>
+                <a:ea typeface="楷体"/>
+                <a:cs typeface="楷体"/>
+              </a:rPr>
+              <a:t>① 劳动精神墙</a:t>
+            </a:r>
+          </a:p>
+        </p:txBody>
+      </p:sp>
+      <p:sp>
+        <p:nvSpPr>
+          <p:cNvPr id="8" name="TextBox 7"/>
+          <p:cNvSpPr txBox="1"/>
+          <p:nvPr/>
+        </p:nvSpPr>
+        <p:spPr>
+          <a:xfrm>
+            <a:off x="914400" y="2697480"/>
+            <a:ext cx="4678527" cy="1371600"/>
+          </a:xfrm>
+          <a:prstGeom prst="rect">
+            <a:avLst/>
+          </a:prstGeom>
+          <a:noFill/>
+        </p:spPr>
+        <p:txBody>
+          <a:bodyPr wrap="square" anchor="t" lIns="0" rIns="0" tIns="0" bIns="0">
+            <a:spAutoFit/>
+          </a:bodyPr>
+          <a:lstStyle/>
+          <a:p>
             <a:pPr algn="l">
               <a:lnSpc>
-                <a:spcPct val="110000"/>
+                <a:spcPct val="145000"/>
               </a:lnSpc>
               <a:spcAft>
-                <a:spcPts val="100"/>
+                <a:spcPts val="600"/>
               </a:spcAft>
             </a:pPr>
             <a:r>
@@ -7362,40 +7962,363 @@
                 <a:solidFill>
                   <a:srgbClr val="1C2A33"/>
                 </a:solidFill>
-                <a:latin typeface="微软雅黑"/>
-                <a:ea typeface="微软雅黑"/>
-                <a:cs typeface="微软雅黑"/>
-              </a:rPr>
-              <a:t>┌── 劳动者分享会·单元收官 ──┐
-│ │
-│ 【8课时路径】 │
-│ ①袁隆平通讯→②群文比较→ │
-│ ③工匠评论→④古诗劳动→ │
-│ ⑤访谈播报→⑥写通讯→ │
-│ ⑦讲评→⑧分享会 │
-│ 终点:通讯 读→写→说 │
-│ │
-│ 【劳动精神墙】 │
-│ 坚守/张秉贵练了几十年 │
-│ 细节/不说伟大写细节 │
-│ 14万株/科学也是劳动 │
-│ 手抖/勺子替她说话 │
-│ ……(便签贴满) │
-│ │
-│ 【反思三问】 │
-│ ①我学会了__ │
-│ ②我需提升__ │
-│ ③我的疑问__ │
-│ │
-│ 读→写→说→用:以事写人可迁移 │
-└────────────────────────────┘</a:t>
-            </a:r>
-          </a:p>
-        </p:txBody>
-      </p:sp>
-      <p:sp>
-        <p:nvSpPr>
-          <p:cNvPr id="7" name="TextBox 6"/>
+                <a:latin typeface="楷体"/>
+                <a:ea typeface="楷体"/>
+                <a:cs typeface="楷体"/>
+              </a:rPr>
+              <a:t>把每个人的"关键词+一句话"写在便签上，贴成一面墙。可视化让感悟互相看见——</a:t>
+            </a:r>
+          </a:p>
+          <a:p>
+            <a:pPr algn="l">
+              <a:lnSpc>
+                <a:spcPct val="145000"/>
+              </a:lnSpc>
+            </a:pPr>
+            <a:r>
+              <a:rPr sz="1300" b="0">
+                <a:solidFill>
+                  <a:srgbClr val="6B6258"/>
+                </a:solidFill>
+                <a:latin typeface="楷体"/>
+                <a:ea typeface="楷体"/>
+                <a:cs typeface="楷体"/>
+              </a:rPr>
+              <a:t>"14万株""手抖""凌晨四点"都成了关键词。</a:t>
+            </a:r>
+          </a:p>
+        </p:txBody>
+      </p:sp>
+      <p:sp>
+        <p:nvSpPr>
+          <p:cNvPr id="9" name="Rounded Rectangle 8"/>
+          <p:cNvSpPr/>
+          <p:nvPr/>
+        </p:nvSpPr>
+        <p:spPr>
+          <a:xfrm>
+            <a:off x="640080" y="4297680"/>
+            <a:ext cx="5227167" cy="2057400"/>
+          </a:xfrm>
+          <a:prstGeom prst="roundRect">
+            <a:avLst/>
+          </a:prstGeom>
+          <a:solidFill>
+            <a:srgbClr val="FFFFFF"/>
+          </a:solidFill>
+          <a:ln w="22860">
+            <a:solidFill>
+              <a:srgbClr val="2E7D6B"/>
+            </a:solidFill>
+          </a:ln>
+          <a:effectLst/>
+        </p:spPr>
+        <p:style>
+          <a:lnRef idx="1">
+            <a:schemeClr val="accent1"/>
+          </a:lnRef>
+          <a:fillRef idx="3">
+            <a:schemeClr val="accent1"/>
+          </a:fillRef>
+          <a:effectRef idx="2">
+            <a:schemeClr val="accent1"/>
+          </a:effectRef>
+          <a:fontRef idx="minor">
+            <a:schemeClr val="lt1"/>
+          </a:fontRef>
+        </p:style>
+        <p:txBody>
+          <a:bodyPr rtlCol="0" anchor="ctr"/>
+          <a:lstStyle/>
+          <a:p>
+            <a:pPr algn="ctr"/>
+          </a:p>
+        </p:txBody>
+      </p:sp>
+      <p:sp>
+        <p:nvSpPr>
+          <p:cNvPr id="10" name="TextBox 9"/>
+          <p:cNvSpPr txBox="1"/>
+          <p:nvPr/>
+        </p:nvSpPr>
+        <p:spPr>
+          <a:xfrm>
+            <a:off x="914400" y="4453128"/>
+            <a:ext cx="4678527" cy="457200"/>
+          </a:xfrm>
+          <a:prstGeom prst="rect">
+            <a:avLst/>
+          </a:prstGeom>
+          <a:noFill/>
+        </p:spPr>
+        <p:txBody>
+          <a:bodyPr wrap="square" anchor="t" lIns="0" rIns="0" tIns="0" bIns="0">
+            <a:spAutoFit/>
+          </a:bodyPr>
+          <a:lstStyle/>
+          <a:p>
+            <a:pPr algn="l"/>
+            <a:r>
+              <a:rPr sz="1600" b="1">
+                <a:solidFill>
+                  <a:srgbClr val="2E7D6B"/>
+                </a:solidFill>
+                <a:latin typeface="楷体"/>
+                <a:ea typeface="楷体"/>
+                <a:cs typeface="楷体"/>
+              </a:rPr>
+              <a:t>② 单元学习反思单</a:t>
+            </a:r>
+          </a:p>
+        </p:txBody>
+      </p:sp>
+      <p:sp>
+        <p:nvSpPr>
+          <p:cNvPr id="11" name="TextBox 10"/>
+          <p:cNvSpPr txBox="1"/>
+          <p:nvPr/>
+        </p:nvSpPr>
+        <p:spPr>
+          <a:xfrm>
+            <a:off x="914400" y="4937760"/>
+            <a:ext cx="4678527" cy="1371600"/>
+          </a:xfrm>
+          <a:prstGeom prst="rect">
+            <a:avLst/>
+          </a:prstGeom>
+          <a:noFill/>
+        </p:spPr>
+        <p:txBody>
+          <a:bodyPr wrap="square" anchor="t" lIns="0" rIns="0" tIns="0" bIns="0">
+            <a:spAutoFit/>
+          </a:bodyPr>
+          <a:lstStyle/>
+          <a:p>
+            <a:pPr algn="l">
+              <a:lnSpc>
+                <a:spcPct val="150000"/>
+              </a:lnSpc>
+              <a:spcAft>
+                <a:spcPts val="600"/>
+              </a:spcAft>
+            </a:pPr>
+            <a:r>
+              <a:rPr sz="1350" b="0">
+                <a:solidFill>
+                  <a:srgbClr val="1C2A33"/>
+                </a:solidFill>
+                <a:latin typeface="楷体"/>
+                <a:ea typeface="楷体"/>
+                <a:cs typeface="楷体"/>
+              </a:rPr>
+              <a:t>三行：我学会了 / 我还需提升 / 我的疑问。越具体越好——</a:t>
+            </a:r>
+          </a:p>
+          <a:p>
+            <a:pPr algn="l">
+              <a:lnSpc>
+                <a:spcPct val="145000"/>
+              </a:lnSpc>
+            </a:pPr>
+            <a:r>
+              <a:rPr sz="1350" b="0">
+                <a:solidFill>
+                  <a:srgbClr val="6B6258"/>
+                </a:solidFill>
+                <a:latin typeface="楷体"/>
+                <a:ea typeface="楷体"/>
+                <a:cs typeface="楷体"/>
+              </a:rPr>
+              <a:t>"我学会了访谈问题要分三层" 比 "我学会了访谈" 有力得多。</a:t>
+            </a:r>
+          </a:p>
+        </p:txBody>
+      </p:sp>
+      <p:sp>
+        <p:nvSpPr>
+          <p:cNvPr id="12" name="Rounded Rectangle 11"/>
+          <p:cNvSpPr/>
+          <p:nvPr/>
+        </p:nvSpPr>
+        <p:spPr>
+          <a:xfrm>
+            <a:off x="6324447" y="2057400"/>
+            <a:ext cx="5227167" cy="4297680"/>
+          </a:xfrm>
+          <a:prstGeom prst="roundRect">
+            <a:avLst/>
+          </a:prstGeom>
+          <a:solidFill>
+            <a:srgbClr val="1C2A33"/>
+          </a:solidFill>
+          <a:effectLst/>
+        </p:spPr>
+        <p:style>
+          <a:lnRef idx="1">
+            <a:schemeClr val="accent1"/>
+          </a:lnRef>
+          <a:fillRef idx="3">
+            <a:schemeClr val="accent1"/>
+          </a:fillRef>
+          <a:effectRef idx="2">
+            <a:schemeClr val="accent1"/>
+          </a:effectRef>
+          <a:fontRef idx="minor">
+            <a:schemeClr val="lt1"/>
+          </a:fontRef>
+        </p:style>
+        <p:txBody>
+          <a:bodyPr rtlCol="0" anchor="ctr"/>
+          <a:lstStyle/>
+          <a:p>
+            <a:pPr algn="ctr"/>
+          </a:p>
+        </p:txBody>
+      </p:sp>
+      <p:sp>
+        <p:nvSpPr>
+          <p:cNvPr id="13" name="TextBox 12"/>
+          <p:cNvSpPr txBox="1"/>
+          <p:nvPr/>
+        </p:nvSpPr>
+        <p:spPr>
+          <a:xfrm>
+            <a:off x="6598767" y="2240280"/>
+            <a:ext cx="4678527" cy="457200"/>
+          </a:xfrm>
+          <a:prstGeom prst="rect">
+            <a:avLst/>
+          </a:prstGeom>
+          <a:noFill/>
+        </p:spPr>
+        <p:txBody>
+          <a:bodyPr wrap="square" anchor="t" lIns="0" rIns="0" tIns="0" bIns="0">
+            <a:spAutoFit/>
+          </a:bodyPr>
+          <a:lstStyle/>
+          <a:p>
+            <a:pPr algn="l"/>
+            <a:r>
+              <a:rPr sz="1700" b="1">
+                <a:solidFill>
+                  <a:srgbClr val="C8A86B"/>
+                </a:solidFill>
+                <a:latin typeface="楷体"/>
+                <a:ea typeface="楷体"/>
+                <a:cs typeface="楷体"/>
+              </a:rPr>
+              <a:t>单元主线：以事写人</a:t>
+            </a:r>
+          </a:p>
+        </p:txBody>
+      </p:sp>
+      <p:sp>
+        <p:nvSpPr>
+          <p:cNvPr id="14" name="TextBox 13"/>
+          <p:cNvSpPr txBox="1"/>
+          <p:nvPr/>
+        </p:nvSpPr>
+        <p:spPr>
+          <a:xfrm>
+            <a:off x="6598767" y="2788920"/>
+            <a:ext cx="4678527" cy="3383280"/>
+          </a:xfrm>
+          <a:prstGeom prst="rect">
+            <a:avLst/>
+          </a:prstGeom>
+          <a:noFill/>
+        </p:spPr>
+        <p:txBody>
+          <a:bodyPr wrap="square" anchor="t" lIns="0" rIns="0" tIns="0" bIns="0">
+            <a:spAutoFit/>
+          </a:bodyPr>
+          <a:lstStyle/>
+          <a:p>
+            <a:pPr algn="l">
+              <a:lnSpc>
+                <a:spcPct val="150000"/>
+              </a:lnSpc>
+              <a:spcAft>
+                <a:spcPts val="800"/>
+              </a:spcAft>
+            </a:pPr>
+            <a:r>
+              <a:rPr sz="1400" b="0">
+                <a:solidFill>
+                  <a:srgbClr val="FFFFFF"/>
+                </a:solidFill>
+                <a:latin typeface="楷体"/>
+                <a:ea typeface="楷体"/>
+                <a:cs typeface="楷体"/>
+              </a:rPr>
+              <a:t>从袁隆平的稻田，走到你身边的门卫师傅——</a:t>
+            </a:r>
+          </a:p>
+          <a:p>
+            <a:pPr algn="l">
+              <a:lnSpc>
+                <a:spcPct val="150000"/>
+              </a:lnSpc>
+              <a:spcAft>
+                <a:spcPts val="800"/>
+              </a:spcAft>
+            </a:pPr>
+            <a:r>
+              <a:rPr sz="1400" b="0">
+                <a:solidFill>
+                  <a:srgbClr val="E7DFD2"/>
+                </a:solidFill>
+                <a:latin typeface="楷体"/>
+                <a:ea typeface="楷体"/>
+                <a:cs typeface="楷体"/>
+              </a:rPr>
+              <a:t>读通讯、说访谈、写通讯，一条能力线贯穿。</a:t>
+            </a:r>
+          </a:p>
+          <a:p>
+            <a:pPr algn="l">
+              <a:lnSpc>
+                <a:spcPct val="150000"/>
+              </a:lnSpc>
+              <a:spcAft>
+                <a:spcPts val="800"/>
+              </a:spcAft>
+            </a:pPr>
+            <a:r>
+              <a:rPr sz="1350" b="0">
+                <a:solidFill>
+                  <a:srgbClr val="FFFFFF"/>
+                </a:solidFill>
+                <a:latin typeface="楷体"/>
+                <a:ea typeface="楷体"/>
+                <a:cs typeface="楷体"/>
+              </a:rPr>
+              <a:t>下单元"生命的诗意"回到古诗词：古诗也"以事写人"，用意象与典故写情——</a:t>
+            </a:r>
+          </a:p>
+          <a:p>
+            <a:pPr algn="l">
+              <a:lnSpc>
+                <a:spcPct val="150000"/>
+              </a:lnSpc>
+            </a:pPr>
+            <a:r>
+              <a:rPr sz="1350" b="0">
+                <a:solidFill>
+                  <a:srgbClr val="C8A86B"/>
+                </a:solidFill>
+                <a:latin typeface="楷体"/>
+                <a:ea typeface="楷体"/>
+                <a:cs typeface="楷体"/>
+              </a:rPr>
+              <a:t>带着"以事写人"去读诗，会发现熟悉的写法。</a:t>
+            </a:r>
+          </a:p>
+        </p:txBody>
+      </p:sp>
+      <p:sp>
+        <p:nvSpPr>
+          <p:cNvPr id="15" name="TextBox 14"/>
           <p:cNvSpPr txBox="1"/>
           <p:nvPr/>
         </p:nvSpPr>
@@ -7522,13 +8445,13 @@
             <a:r>
               <a:rPr sz="1300" b="1">
                 <a:solidFill>
-                  <a:srgbClr val="2E7D6B"/>
+                  <a:srgbClr val="B23A2A"/>
                 </a:solidFill>
                 <a:latin typeface="微软雅黑"/>
                 <a:ea typeface="微软雅黑"/>
                 <a:cs typeface="微软雅黑"/>
               </a:rPr>
-              <a:t>分层作业</a:t>
+              <a:t>板书 · 单元收官</a:t>
             </a:r>
           </a:p>
         </p:txBody>
@@ -7548,7 +8471,7 @@
             <a:avLst/>
           </a:prstGeom>
           <a:solidFill>
-            <a:srgbClr val="2E7D6B"/>
+            <a:srgbClr val="B23A2A"/>
           </a:solidFill>
           <a:ln>
             <a:noFill/>
@@ -7585,20 +8508,15 @@
         </p:nvSpPr>
         <p:spPr>
           <a:xfrm>
-            <a:off x="640080" y="1417320"/>
-            <a:ext cx="10911535" cy="1417320"/>
+            <a:off x="640080" y="1737360"/>
+            <a:ext cx="10911535" cy="502920"/>
           </a:xfrm>
           <a:prstGeom prst="roundRect">
             <a:avLst/>
           </a:prstGeom>
           <a:solidFill>
-            <a:srgbClr val="FFFFFF"/>
+            <a:srgbClr val="1C2A33"/>
           </a:solidFill>
-          <a:ln w="22860">
-            <a:solidFill>
-              <a:srgbClr val="2E7D6B"/>
-            </a:solidFill>
-          </a:ln>
           <a:effectLst/>
         </p:spPr>
         <p:style>
@@ -7631,8 +8549,8 @@
         </p:nvSpPr>
         <p:spPr>
           <a:xfrm>
-            <a:off x="1371600" y="1527048"/>
-            <a:ext cx="9997135" cy="457200"/>
+            <a:off x="914400" y="1810512"/>
+            <a:ext cx="3108960" cy="365760"/>
           </a:xfrm>
           <a:prstGeom prst="rect">
             <a:avLst/>
@@ -7645,21 +8563,17 @@
           </a:bodyPr>
           <a:lstStyle/>
           <a:p>
-            <a:pPr algn="l">
-              <a:lnSpc>
-                <a:spcPct val="110000"/>
-              </a:lnSpc>
-            </a:pPr>
-            <a:r>
-              <a:rPr sz="1600" b="1">
-                <a:solidFill>
-                  <a:srgbClr val="1C2A33"/>
+            <a:pPr algn="l"/>
+            <a:r>
+              <a:rPr sz="1500" b="1">
+                <a:solidFill>
+                  <a:srgbClr val="FFFFFF"/>
                 </a:solidFill>
                 <a:latin typeface="微软雅黑"/>
                 <a:ea typeface="微软雅黑"/>
                 <a:cs typeface="微软雅黑"/>
               </a:rPr>
-              <a:t/>
+              <a:t>板块</a:t>
             </a:r>
           </a:p>
         </p:txBody>
@@ -7672,8 +8586,8 @@
         </p:nvSpPr>
         <p:spPr>
           <a:xfrm>
-            <a:off x="1371600" y="1965960"/>
-            <a:ext cx="9997135" cy="777240"/>
+            <a:off x="4297680" y="1810512"/>
+            <a:ext cx="7680960" cy="365760"/>
           </a:xfrm>
           <a:prstGeom prst="rect">
             <a:avLst/>
@@ -7686,21 +8600,17 @@
           </a:bodyPr>
           <a:lstStyle/>
           <a:p>
-            <a:pPr algn="l">
-              <a:lnSpc>
-                <a:spcPct val="128000"/>
-              </a:lnSpc>
-            </a:pPr>
-            <a:r>
-              <a:rPr sz="1100" b="0">
-                <a:solidFill>
-                  <a:srgbClr val="1C2A33"/>
-                </a:solidFill>
-                <a:latin typeface="楷体"/>
-                <a:ea typeface="楷体"/>
-                <a:cs typeface="楷体"/>
-              </a:rPr>
-              <a:t>【基础作业】1. 提交单元学习反思单（三行完整填写）。2. 在作文本上誊抄你分享的劳动者故事（通讯终稿）+ 一句分享感受。</a:t>
+            <a:pPr algn="l"/>
+            <a:r>
+              <a:rPr sz="1500" b="1">
+                <a:solidFill>
+                  <a:srgbClr val="C8A86B"/>
+                </a:solidFill>
+                <a:latin typeface="微软雅黑"/>
+                <a:ea typeface="微软雅黑"/>
+                <a:cs typeface="微软雅黑"/>
+              </a:rPr>
+              <a:t>内容</a:t>
             </a:r>
           </a:p>
         </p:txBody>
@@ -7713,8 +8623,8 @@
         </p:nvSpPr>
         <p:spPr>
           <a:xfrm>
-            <a:off x="640080" y="2971800"/>
-            <a:ext cx="10911535" cy="1417320"/>
+            <a:off x="640080" y="2331720"/>
+            <a:ext cx="10911535" cy="530352"/>
           </a:xfrm>
           <a:prstGeom prst="roundRect">
             <a:avLst/>
@@ -7722,9 +8632,9 @@
           <a:solidFill>
             <a:srgbClr val="FFFFFF"/>
           </a:solidFill>
-          <a:ln w="22860">
+          <a:ln w="10160">
             <a:solidFill>
-              <a:srgbClr val="2E7D6B"/>
+              <a:srgbClr val="6B6258"/>
             </a:solidFill>
           </a:ln>
           <a:effectLst/>
@@ -7759,8 +8669,8 @@
         </p:nvSpPr>
         <p:spPr>
           <a:xfrm>
-            <a:off x="1371600" y="3081528"/>
-            <a:ext cx="9997135" cy="457200"/>
+            <a:off x="914400" y="2423160"/>
+            <a:ext cx="3108960" cy="365760"/>
           </a:xfrm>
           <a:prstGeom prst="rect">
             <a:avLst/>
@@ -7773,21 +8683,17 @@
           </a:bodyPr>
           <a:lstStyle/>
           <a:p>
-            <a:pPr algn="l">
-              <a:lnSpc>
-                <a:spcPct val="110000"/>
-              </a:lnSpc>
-            </a:pPr>
-            <a:r>
-              <a:rPr sz="1600" b="1">
-                <a:solidFill>
-                  <a:srgbClr val="1C2A33"/>
+            <a:pPr algn="l"/>
+            <a:r>
+              <a:rPr sz="1400" b="1">
+                <a:solidFill>
+                  <a:srgbClr val="B23A2A"/>
                 </a:solidFill>
                 <a:latin typeface="微软雅黑"/>
                 <a:ea typeface="微软雅黑"/>
                 <a:cs typeface="微软雅黑"/>
               </a:rPr>
-              <a:t/>
+              <a:t>八课时路径</a:t>
             </a:r>
           </a:p>
         </p:txBody>
@@ -7800,8 +8706,8 @@
         </p:nvSpPr>
         <p:spPr>
           <a:xfrm>
-            <a:off x="1371600" y="3520440"/>
-            <a:ext cx="9997135" cy="777240"/>
+            <a:off x="4297680" y="2423160"/>
+            <a:ext cx="7680960" cy="365760"/>
           </a:xfrm>
           <a:prstGeom prst="rect">
             <a:avLst/>
@@ -7814,13 +8720,9 @@
           </a:bodyPr>
           <a:lstStyle/>
           <a:p>
-            <a:pPr algn="l">
-              <a:lnSpc>
-                <a:spcPct val="128000"/>
-              </a:lnSpc>
-            </a:pPr>
-            <a:r>
-              <a:rPr sz="1100" b="0">
+            <a:pPr algn="l"/>
+            <a:r>
+              <a:rPr sz="1250" b="0">
                 <a:solidFill>
                   <a:srgbClr val="1C2A33"/>
                 </a:solidFill>
@@ -7828,14 +8730,614 @@
                 <a:ea typeface="楷体"/>
                 <a:cs typeface="楷体"/>
               </a:rPr>
-              <a:t>【提高作业】写一段150字「单元学习总结」，要求：①点明本单元最重要的一个方法；②举一个具体例子说明你用了这个方法；③说一个你想在下单元继续提升的方面。</a:t>
-            </a:r>
-          </a:p>
-        </p:txBody>
-      </p:sp>
-      <p:sp>
-        <p:nvSpPr>
-          <p:cNvPr id="11" name="TextBox 10"/>
+              <a:t>①袁隆平 ②群文 ③工匠 ④古诗 ⑤访谈 ⑥写通讯 ⑦讲评 ⑧分享会</a:t>
+            </a:r>
+          </a:p>
+        </p:txBody>
+      </p:sp>
+      <p:sp>
+        <p:nvSpPr>
+          <p:cNvPr id="11" name="Rounded Rectangle 10"/>
+          <p:cNvSpPr/>
+          <p:nvPr/>
+        </p:nvSpPr>
+        <p:spPr>
+          <a:xfrm>
+            <a:off x="640080" y="2916936"/>
+            <a:ext cx="10911535" cy="530352"/>
+          </a:xfrm>
+          <a:prstGeom prst="roundRect">
+            <a:avLst/>
+          </a:prstGeom>
+          <a:solidFill>
+            <a:srgbClr val="E7DFD2"/>
+          </a:solidFill>
+          <a:ln w="10160">
+            <a:solidFill>
+              <a:srgbClr val="6B6258"/>
+            </a:solidFill>
+          </a:ln>
+          <a:effectLst/>
+        </p:spPr>
+        <p:style>
+          <a:lnRef idx="1">
+            <a:schemeClr val="accent1"/>
+          </a:lnRef>
+          <a:fillRef idx="3">
+            <a:schemeClr val="accent1"/>
+          </a:fillRef>
+          <a:effectRef idx="2">
+            <a:schemeClr val="accent1"/>
+          </a:effectRef>
+          <a:fontRef idx="minor">
+            <a:schemeClr val="lt1"/>
+          </a:fontRef>
+        </p:style>
+        <p:txBody>
+          <a:bodyPr rtlCol="0" anchor="ctr"/>
+          <a:lstStyle/>
+          <a:p>
+            <a:pPr algn="ctr"/>
+          </a:p>
+        </p:txBody>
+      </p:sp>
+      <p:sp>
+        <p:nvSpPr>
+          <p:cNvPr id="12" name="TextBox 11"/>
+          <p:cNvSpPr txBox="1"/>
+          <p:nvPr/>
+        </p:nvSpPr>
+        <p:spPr>
+          <a:xfrm>
+            <a:off x="914400" y="3008376"/>
+            <a:ext cx="3108960" cy="365760"/>
+          </a:xfrm>
+          <a:prstGeom prst="rect">
+            <a:avLst/>
+          </a:prstGeom>
+          <a:noFill/>
+        </p:spPr>
+        <p:txBody>
+          <a:bodyPr wrap="square" anchor="t" lIns="0" rIns="0" tIns="0" bIns="0">
+            <a:spAutoFit/>
+          </a:bodyPr>
+          <a:lstStyle/>
+          <a:p>
+            <a:pPr algn="l"/>
+            <a:r>
+              <a:rPr sz="1400" b="1">
+                <a:solidFill>
+                  <a:srgbClr val="2E7D6B"/>
+                </a:solidFill>
+                <a:latin typeface="微软雅黑"/>
+                <a:ea typeface="微软雅黑"/>
+                <a:cs typeface="微软雅黑"/>
+              </a:rPr>
+              <a:t>能力线</a:t>
+            </a:r>
+          </a:p>
+        </p:txBody>
+      </p:sp>
+      <p:sp>
+        <p:nvSpPr>
+          <p:cNvPr id="13" name="TextBox 12"/>
+          <p:cNvSpPr txBox="1"/>
+          <p:nvPr/>
+        </p:nvSpPr>
+        <p:spPr>
+          <a:xfrm>
+            <a:off x="4297680" y="3008376"/>
+            <a:ext cx="7680960" cy="365760"/>
+          </a:xfrm>
+          <a:prstGeom prst="rect">
+            <a:avLst/>
+          </a:prstGeom>
+          <a:noFill/>
+        </p:spPr>
+        <p:txBody>
+          <a:bodyPr wrap="square" anchor="t" lIns="0" rIns="0" tIns="0" bIns="0">
+            <a:spAutoFit/>
+          </a:bodyPr>
+          <a:lstStyle/>
+          <a:p>
+            <a:pPr algn="l"/>
+            <a:r>
+              <a:rPr sz="1250" b="0">
+                <a:solidFill>
+                  <a:srgbClr val="1C2A33"/>
+                </a:solidFill>
+                <a:latin typeface="楷体"/>
+                <a:ea typeface="楷体"/>
+                <a:cs typeface="楷体"/>
+              </a:rPr>
+              <a:t>读通讯 → 说访谈 → 写通讯 → 改通讯 → 用（可迁移）</a:t>
+            </a:r>
+          </a:p>
+        </p:txBody>
+      </p:sp>
+      <p:sp>
+        <p:nvSpPr>
+          <p:cNvPr id="14" name="Rounded Rectangle 13"/>
+          <p:cNvSpPr/>
+          <p:nvPr/>
+        </p:nvSpPr>
+        <p:spPr>
+          <a:xfrm>
+            <a:off x="640080" y="3502152"/>
+            <a:ext cx="10911535" cy="530352"/>
+          </a:xfrm>
+          <a:prstGeom prst="roundRect">
+            <a:avLst/>
+          </a:prstGeom>
+          <a:solidFill>
+            <a:srgbClr val="FFFFFF"/>
+          </a:solidFill>
+          <a:ln w="10160">
+            <a:solidFill>
+              <a:srgbClr val="6B6258"/>
+            </a:solidFill>
+          </a:ln>
+          <a:effectLst/>
+        </p:spPr>
+        <p:style>
+          <a:lnRef idx="1">
+            <a:schemeClr val="accent1"/>
+          </a:lnRef>
+          <a:fillRef idx="3">
+            <a:schemeClr val="accent1"/>
+          </a:fillRef>
+          <a:effectRef idx="2">
+            <a:schemeClr val="accent1"/>
+          </a:effectRef>
+          <a:fontRef idx="minor">
+            <a:schemeClr val="lt1"/>
+          </a:fontRef>
+        </p:style>
+        <p:txBody>
+          <a:bodyPr rtlCol="0" anchor="ctr"/>
+          <a:lstStyle/>
+          <a:p>
+            <a:pPr algn="ctr"/>
+          </a:p>
+        </p:txBody>
+      </p:sp>
+      <p:sp>
+        <p:nvSpPr>
+          <p:cNvPr id="15" name="TextBox 14"/>
+          <p:cNvSpPr txBox="1"/>
+          <p:nvPr/>
+        </p:nvSpPr>
+        <p:spPr>
+          <a:xfrm>
+            <a:off x="914400" y="3593592"/>
+            <a:ext cx="3108960" cy="365760"/>
+          </a:xfrm>
+          <a:prstGeom prst="rect">
+            <a:avLst/>
+          </a:prstGeom>
+          <a:noFill/>
+        </p:spPr>
+        <p:txBody>
+          <a:bodyPr wrap="square" anchor="t" lIns="0" rIns="0" tIns="0" bIns="0">
+            <a:spAutoFit/>
+          </a:bodyPr>
+          <a:lstStyle/>
+          <a:p>
+            <a:pPr algn="l"/>
+            <a:r>
+              <a:rPr sz="1400" b="1">
+                <a:solidFill>
+                  <a:srgbClr val="C8A86B"/>
+                </a:solidFill>
+                <a:latin typeface="微软雅黑"/>
+                <a:ea typeface="微软雅黑"/>
+                <a:cs typeface="微软雅黑"/>
+              </a:rPr>
+              <a:t>劳动精神墙</a:t>
+            </a:r>
+          </a:p>
+        </p:txBody>
+      </p:sp>
+      <p:sp>
+        <p:nvSpPr>
+          <p:cNvPr id="16" name="TextBox 15"/>
+          <p:cNvSpPr txBox="1"/>
+          <p:nvPr/>
+        </p:nvSpPr>
+        <p:spPr>
+          <a:xfrm>
+            <a:off x="4297680" y="3593592"/>
+            <a:ext cx="7680960" cy="365760"/>
+          </a:xfrm>
+          <a:prstGeom prst="rect">
+            <a:avLst/>
+          </a:prstGeom>
+          <a:noFill/>
+        </p:spPr>
+        <p:txBody>
+          <a:bodyPr wrap="square" anchor="t" lIns="0" rIns="0" tIns="0" bIns="0">
+            <a:spAutoFit/>
+          </a:bodyPr>
+          <a:lstStyle/>
+          <a:p>
+            <a:pPr algn="l"/>
+            <a:r>
+              <a:rPr sz="1250" b="0">
+                <a:solidFill>
+                  <a:srgbClr val="1C2A33"/>
+                </a:solidFill>
+                <a:latin typeface="楷体"/>
+                <a:ea typeface="楷体"/>
+                <a:cs typeface="楷体"/>
+              </a:rPr>
+              <a:t>坚守 / 细节 / 14万株 / 手抖 / 凌晨四点（便签贴满成墙）</a:t>
+            </a:r>
+          </a:p>
+        </p:txBody>
+      </p:sp>
+      <p:sp>
+        <p:nvSpPr>
+          <p:cNvPr id="17" name="Rounded Rectangle 16"/>
+          <p:cNvSpPr/>
+          <p:nvPr/>
+        </p:nvSpPr>
+        <p:spPr>
+          <a:xfrm>
+            <a:off x="640080" y="4087368"/>
+            <a:ext cx="10911535" cy="530352"/>
+          </a:xfrm>
+          <a:prstGeom prst="roundRect">
+            <a:avLst/>
+          </a:prstGeom>
+          <a:solidFill>
+            <a:srgbClr val="E7DFD2"/>
+          </a:solidFill>
+          <a:ln w="10160">
+            <a:solidFill>
+              <a:srgbClr val="6B6258"/>
+            </a:solidFill>
+          </a:ln>
+          <a:effectLst/>
+        </p:spPr>
+        <p:style>
+          <a:lnRef idx="1">
+            <a:schemeClr val="accent1"/>
+          </a:lnRef>
+          <a:fillRef idx="3">
+            <a:schemeClr val="accent1"/>
+          </a:fillRef>
+          <a:effectRef idx="2">
+            <a:schemeClr val="accent1"/>
+          </a:effectRef>
+          <a:fontRef idx="minor">
+            <a:schemeClr val="lt1"/>
+          </a:fontRef>
+        </p:style>
+        <p:txBody>
+          <a:bodyPr rtlCol="0" anchor="ctr"/>
+          <a:lstStyle/>
+          <a:p>
+            <a:pPr algn="ctr"/>
+          </a:p>
+        </p:txBody>
+      </p:sp>
+      <p:sp>
+        <p:nvSpPr>
+          <p:cNvPr id="18" name="TextBox 17"/>
+          <p:cNvSpPr txBox="1"/>
+          <p:nvPr/>
+        </p:nvSpPr>
+        <p:spPr>
+          <a:xfrm>
+            <a:off x="914400" y="4178808"/>
+            <a:ext cx="3108960" cy="365760"/>
+          </a:xfrm>
+          <a:prstGeom prst="rect">
+            <a:avLst/>
+          </a:prstGeom>
+          <a:noFill/>
+        </p:spPr>
+        <p:txBody>
+          <a:bodyPr wrap="square" anchor="t" lIns="0" rIns="0" tIns="0" bIns="0">
+            <a:spAutoFit/>
+          </a:bodyPr>
+          <a:lstStyle/>
+          <a:p>
+            <a:pPr algn="l"/>
+            <a:r>
+              <a:rPr sz="1400" b="1">
+                <a:solidFill>
+                  <a:srgbClr val="B23A2A"/>
+                </a:solidFill>
+                <a:latin typeface="微软雅黑"/>
+                <a:ea typeface="微软雅黑"/>
+                <a:cs typeface="微软雅黑"/>
+              </a:rPr>
+              <a:t>反思三问</a:t>
+            </a:r>
+          </a:p>
+        </p:txBody>
+      </p:sp>
+      <p:sp>
+        <p:nvSpPr>
+          <p:cNvPr id="19" name="TextBox 18"/>
+          <p:cNvSpPr txBox="1"/>
+          <p:nvPr/>
+        </p:nvSpPr>
+        <p:spPr>
+          <a:xfrm>
+            <a:off x="4297680" y="4178808"/>
+            <a:ext cx="7680960" cy="365760"/>
+          </a:xfrm>
+          <a:prstGeom prst="rect">
+            <a:avLst/>
+          </a:prstGeom>
+          <a:noFill/>
+        </p:spPr>
+        <p:txBody>
+          <a:bodyPr wrap="square" anchor="t" lIns="0" rIns="0" tIns="0" bIns="0">
+            <a:spAutoFit/>
+          </a:bodyPr>
+          <a:lstStyle/>
+          <a:p>
+            <a:pPr algn="l"/>
+            <a:r>
+              <a:rPr sz="1250" b="0">
+                <a:solidFill>
+                  <a:srgbClr val="1C2A33"/>
+                </a:solidFill>
+                <a:latin typeface="楷体"/>
+                <a:ea typeface="楷体"/>
+                <a:cs typeface="楷体"/>
+              </a:rPr>
+              <a:t>我学会了 __ ｜ 我还需提升 __ ｜ 我的疑问 __</a:t>
+            </a:r>
+          </a:p>
+        </p:txBody>
+      </p:sp>
+      <p:sp>
+        <p:nvSpPr>
+          <p:cNvPr id="20" name="Rounded Rectangle 19"/>
+          <p:cNvSpPr/>
+          <p:nvPr/>
+        </p:nvSpPr>
+        <p:spPr>
+          <a:xfrm>
+            <a:off x="640080" y="4672584"/>
+            <a:ext cx="10911535" cy="530352"/>
+          </a:xfrm>
+          <a:prstGeom prst="roundRect">
+            <a:avLst/>
+          </a:prstGeom>
+          <a:solidFill>
+            <a:srgbClr val="FFFFFF"/>
+          </a:solidFill>
+          <a:ln w="10160">
+            <a:solidFill>
+              <a:srgbClr val="6B6258"/>
+            </a:solidFill>
+          </a:ln>
+          <a:effectLst/>
+        </p:spPr>
+        <p:style>
+          <a:lnRef idx="1">
+            <a:schemeClr val="accent1"/>
+          </a:lnRef>
+          <a:fillRef idx="3">
+            <a:schemeClr val="accent1"/>
+          </a:fillRef>
+          <a:effectRef idx="2">
+            <a:schemeClr val="accent1"/>
+          </a:effectRef>
+          <a:fontRef idx="minor">
+            <a:schemeClr val="lt1"/>
+          </a:fontRef>
+        </p:style>
+        <p:txBody>
+          <a:bodyPr rtlCol="0" anchor="ctr"/>
+          <a:lstStyle/>
+          <a:p>
+            <a:pPr algn="ctr"/>
+          </a:p>
+        </p:txBody>
+      </p:sp>
+      <p:sp>
+        <p:nvSpPr>
+          <p:cNvPr id="21" name="TextBox 20"/>
+          <p:cNvSpPr txBox="1"/>
+          <p:nvPr/>
+        </p:nvSpPr>
+        <p:spPr>
+          <a:xfrm>
+            <a:off x="914400" y="4764024"/>
+            <a:ext cx="3108960" cy="365760"/>
+          </a:xfrm>
+          <a:prstGeom prst="rect">
+            <a:avLst/>
+          </a:prstGeom>
+          <a:noFill/>
+        </p:spPr>
+        <p:txBody>
+          <a:bodyPr wrap="square" anchor="t" lIns="0" rIns="0" tIns="0" bIns="0">
+            <a:spAutoFit/>
+          </a:bodyPr>
+          <a:lstStyle/>
+          <a:p>
+            <a:pPr algn="l"/>
+            <a:r>
+              <a:rPr sz="1400" b="1">
+                <a:solidFill>
+                  <a:srgbClr val="2E7D6B"/>
+                </a:solidFill>
+                <a:latin typeface="微软雅黑"/>
+                <a:ea typeface="微软雅黑"/>
+                <a:cs typeface="微软雅黑"/>
+              </a:rPr>
+              <a:t>单元共识</a:t>
+            </a:r>
+          </a:p>
+        </p:txBody>
+      </p:sp>
+      <p:sp>
+        <p:nvSpPr>
+          <p:cNvPr id="22" name="TextBox 21"/>
+          <p:cNvSpPr txBox="1"/>
+          <p:nvPr/>
+        </p:nvSpPr>
+        <p:spPr>
+          <a:xfrm>
+            <a:off x="4297680" y="4764024"/>
+            <a:ext cx="7680960" cy="365760"/>
+          </a:xfrm>
+          <a:prstGeom prst="rect">
+            <a:avLst/>
+          </a:prstGeom>
+          <a:noFill/>
+        </p:spPr>
+        <p:txBody>
+          <a:bodyPr wrap="square" anchor="t" lIns="0" rIns="0" tIns="0" bIns="0">
+            <a:spAutoFit/>
+          </a:bodyPr>
+          <a:lstStyle/>
+          <a:p>
+            <a:pPr algn="l"/>
+            <a:r>
+              <a:rPr sz="1250" b="0">
+                <a:solidFill>
+                  <a:srgbClr val="1C2A33"/>
+                </a:solidFill>
+                <a:latin typeface="楷体"/>
+                <a:ea typeface="楷体"/>
+                <a:cs typeface="楷体"/>
+              </a:rPr>
+              <a:t>劳动的价值，在于创造与坚守；以事写人，好自现</a:t>
+            </a:r>
+          </a:p>
+        </p:txBody>
+      </p:sp>
+      <p:sp>
+        <p:nvSpPr>
+          <p:cNvPr id="23" name="Rounded Rectangle 22"/>
+          <p:cNvSpPr/>
+          <p:nvPr/>
+        </p:nvSpPr>
+        <p:spPr>
+          <a:xfrm>
+            <a:off x="640080" y="5257800"/>
+            <a:ext cx="10911535" cy="530352"/>
+          </a:xfrm>
+          <a:prstGeom prst="roundRect">
+            <a:avLst/>
+          </a:prstGeom>
+          <a:solidFill>
+            <a:srgbClr val="E7DFD2"/>
+          </a:solidFill>
+          <a:ln w="10160">
+            <a:solidFill>
+              <a:srgbClr val="6B6258"/>
+            </a:solidFill>
+          </a:ln>
+          <a:effectLst/>
+        </p:spPr>
+        <p:style>
+          <a:lnRef idx="1">
+            <a:schemeClr val="accent1"/>
+          </a:lnRef>
+          <a:fillRef idx="3">
+            <a:schemeClr val="accent1"/>
+          </a:fillRef>
+          <a:effectRef idx="2">
+            <a:schemeClr val="accent1"/>
+          </a:effectRef>
+          <a:fontRef idx="minor">
+            <a:schemeClr val="lt1"/>
+          </a:fontRef>
+        </p:style>
+        <p:txBody>
+          <a:bodyPr rtlCol="0" anchor="ctr"/>
+          <a:lstStyle/>
+          <a:p>
+            <a:pPr algn="ctr"/>
+          </a:p>
+        </p:txBody>
+      </p:sp>
+      <p:sp>
+        <p:nvSpPr>
+          <p:cNvPr id="24" name="TextBox 23"/>
+          <p:cNvSpPr txBox="1"/>
+          <p:nvPr/>
+        </p:nvSpPr>
+        <p:spPr>
+          <a:xfrm>
+            <a:off x="914400" y="5349240"/>
+            <a:ext cx="3108960" cy="365760"/>
+          </a:xfrm>
+          <a:prstGeom prst="rect">
+            <a:avLst/>
+          </a:prstGeom>
+          <a:noFill/>
+        </p:spPr>
+        <p:txBody>
+          <a:bodyPr wrap="square" anchor="t" lIns="0" rIns="0" tIns="0" bIns="0">
+            <a:spAutoFit/>
+          </a:bodyPr>
+          <a:lstStyle/>
+          <a:p>
+            <a:pPr algn="l"/>
+            <a:r>
+              <a:rPr sz="1400" b="1">
+                <a:solidFill>
+                  <a:srgbClr val="C8A86B"/>
+                </a:solidFill>
+                <a:latin typeface="微软雅黑"/>
+                <a:ea typeface="微软雅黑"/>
+                <a:cs typeface="微软雅黑"/>
+              </a:rPr>
+              <a:t>下单元衔接</a:t>
+            </a:r>
+          </a:p>
+        </p:txBody>
+      </p:sp>
+      <p:sp>
+        <p:nvSpPr>
+          <p:cNvPr id="25" name="TextBox 24"/>
+          <p:cNvSpPr txBox="1"/>
+          <p:nvPr/>
+        </p:nvSpPr>
+        <p:spPr>
+          <a:xfrm>
+            <a:off x="4297680" y="5349240"/>
+            <a:ext cx="7680960" cy="365760"/>
+          </a:xfrm>
+          <a:prstGeom prst="rect">
+            <a:avLst/>
+          </a:prstGeom>
+          <a:noFill/>
+        </p:spPr>
+        <p:txBody>
+          <a:bodyPr wrap="square" anchor="t" lIns="0" rIns="0" tIns="0" bIns="0">
+            <a:spAutoFit/>
+          </a:bodyPr>
+          <a:lstStyle/>
+          <a:p>
+            <a:pPr algn="l"/>
+            <a:r>
+              <a:rPr sz="1250" b="0">
+                <a:solidFill>
+                  <a:srgbClr val="1C2A33"/>
+                </a:solidFill>
+                <a:latin typeface="楷体"/>
+                <a:ea typeface="楷体"/>
+                <a:cs typeface="楷体"/>
+              </a:rPr>
+              <a:t>第三单元"生命的诗意"：古诗亦以事写人，用意象与典故</a:t>
+            </a:r>
+          </a:p>
+        </p:txBody>
+      </p:sp>
+      <p:sp>
+        <p:nvSpPr>
+          <p:cNvPr id="26" name="TextBox 25"/>
           <p:cNvSpPr txBox="1"/>
           <p:nvPr/>
         </p:nvSpPr>
@@ -7962,13 +9464,13 @@
             <a:r>
               <a:rPr sz="1300" b="1">
                 <a:solidFill>
-                  <a:srgbClr val="C8A86B"/>
+                  <a:srgbClr val="B23A2A"/>
                 </a:solidFill>
                 <a:latin typeface="微软雅黑"/>
                 <a:ea typeface="微软雅黑"/>
                 <a:cs typeface="微软雅黑"/>
               </a:rPr>
-              <a:t>本课小结</a:t>
+              <a:t>作业 · 分层</a:t>
             </a:r>
           </a:p>
         </p:txBody>
@@ -7983,6 +9485,469 @@
           <a:xfrm>
             <a:off x="640080" y="1097280"/>
             <a:ext cx="822960" cy="30480"/>
+          </a:xfrm>
+          <a:prstGeom prst="rect">
+            <a:avLst/>
+          </a:prstGeom>
+          <a:solidFill>
+            <a:srgbClr val="B23A2A"/>
+          </a:solidFill>
+          <a:ln>
+            <a:noFill/>
+          </a:ln>
+          <a:effectLst/>
+        </p:spPr>
+        <p:style>
+          <a:lnRef idx="1">
+            <a:schemeClr val="accent1"/>
+          </a:lnRef>
+          <a:fillRef idx="3">
+            <a:schemeClr val="accent1"/>
+          </a:fillRef>
+          <a:effectRef idx="2">
+            <a:schemeClr val="accent1"/>
+          </a:effectRef>
+          <a:fontRef idx="minor">
+            <a:schemeClr val="lt1"/>
+          </a:fontRef>
+        </p:style>
+        <p:txBody>
+          <a:bodyPr rtlCol="0" anchor="ctr"/>
+          <a:lstStyle/>
+          <a:p>
+            <a:pPr algn="ctr"/>
+          </a:p>
+        </p:txBody>
+      </p:sp>
+      <p:sp>
+        <p:nvSpPr>
+          <p:cNvPr id="5" name="TextBox 4"/>
+          <p:cNvSpPr txBox="1"/>
+          <p:nvPr/>
+        </p:nvSpPr>
+        <p:spPr>
+          <a:xfrm>
+            <a:off x="640080" y="1325880"/>
+            <a:ext cx="10058400" cy="548640"/>
+          </a:xfrm>
+          <a:prstGeom prst="rect">
+            <a:avLst/>
+          </a:prstGeom>
+          <a:noFill/>
+        </p:spPr>
+        <p:txBody>
+          <a:bodyPr wrap="square" anchor="t" lIns="0" rIns="0" tIns="0" bIns="0">
+            <a:spAutoFit/>
+          </a:bodyPr>
+          <a:lstStyle/>
+          <a:p>
+            <a:pPr algn="l"/>
+            <a:r>
+              <a:rPr sz="2600" b="1">
+                <a:solidFill>
+                  <a:srgbClr val="1C2A33"/>
+                </a:solidFill>
+                <a:latin typeface="楷体"/>
+                <a:ea typeface="楷体"/>
+                <a:cs typeface="楷体"/>
+              </a:rPr>
+              <a:t>基础 · 提升 · 拓展</a:t>
+            </a:r>
+          </a:p>
+        </p:txBody>
+      </p:sp>
+      <p:sp>
+        <p:nvSpPr>
+          <p:cNvPr id="6" name="Rounded Rectangle 5"/>
+          <p:cNvSpPr/>
+          <p:nvPr/>
+        </p:nvSpPr>
+        <p:spPr>
+          <a:xfrm>
+            <a:off x="640080" y="2194560"/>
+            <a:ext cx="3393338" cy="3383280"/>
+          </a:xfrm>
+          <a:prstGeom prst="roundRect">
+            <a:avLst/>
+          </a:prstGeom>
+          <a:solidFill>
+            <a:srgbClr val="FFFFFF"/>
+          </a:solidFill>
+          <a:ln w="20320">
+            <a:solidFill>
+              <a:srgbClr val="B23A2A"/>
+            </a:solidFill>
+          </a:ln>
+          <a:effectLst/>
+        </p:spPr>
+        <p:style>
+          <a:lnRef idx="1">
+            <a:schemeClr val="accent1"/>
+          </a:lnRef>
+          <a:fillRef idx="3">
+            <a:schemeClr val="accent1"/>
+          </a:fillRef>
+          <a:effectRef idx="2">
+            <a:schemeClr val="accent1"/>
+          </a:effectRef>
+          <a:fontRef idx="minor">
+            <a:schemeClr val="lt1"/>
+          </a:fontRef>
+        </p:style>
+        <p:txBody>
+          <a:bodyPr rtlCol="0" anchor="ctr"/>
+          <a:lstStyle/>
+          <a:p>
+            <a:pPr algn="ctr"/>
+          </a:p>
+        </p:txBody>
+      </p:sp>
+      <p:sp>
+        <p:nvSpPr>
+          <p:cNvPr id="7" name="Rectangle 6"/>
+          <p:cNvSpPr/>
+          <p:nvPr/>
+        </p:nvSpPr>
+        <p:spPr>
+          <a:xfrm>
+            <a:off x="640080" y="2194560"/>
+            <a:ext cx="3393338" cy="548640"/>
+          </a:xfrm>
+          <a:prstGeom prst="rect">
+            <a:avLst/>
+          </a:prstGeom>
+          <a:solidFill>
+            <a:srgbClr val="B23A2A"/>
+          </a:solidFill>
+          <a:ln>
+            <a:noFill/>
+          </a:ln>
+          <a:effectLst/>
+        </p:spPr>
+        <p:style>
+          <a:lnRef idx="1">
+            <a:schemeClr val="accent1"/>
+          </a:lnRef>
+          <a:fillRef idx="3">
+            <a:schemeClr val="accent1"/>
+          </a:fillRef>
+          <a:effectRef idx="2">
+            <a:schemeClr val="accent1"/>
+          </a:effectRef>
+          <a:fontRef idx="minor">
+            <a:schemeClr val="lt1"/>
+          </a:fontRef>
+        </p:style>
+        <p:txBody>
+          <a:bodyPr rtlCol="0" anchor="ctr"/>
+          <a:lstStyle/>
+          <a:p>
+            <a:pPr algn="ctr"/>
+          </a:p>
+        </p:txBody>
+      </p:sp>
+      <p:sp>
+        <p:nvSpPr>
+          <p:cNvPr id="8" name="TextBox 7"/>
+          <p:cNvSpPr txBox="1"/>
+          <p:nvPr/>
+        </p:nvSpPr>
+        <p:spPr>
+          <a:xfrm>
+            <a:off x="640080" y="2304288"/>
+            <a:ext cx="3393338" cy="365760"/>
+          </a:xfrm>
+          <a:prstGeom prst="rect">
+            <a:avLst/>
+          </a:prstGeom>
+          <a:noFill/>
+        </p:spPr>
+        <p:txBody>
+          <a:bodyPr wrap="square" anchor="t" lIns="0" rIns="0" tIns="0" bIns="0">
+            <a:spAutoFit/>
+          </a:bodyPr>
+          <a:lstStyle/>
+          <a:p>
+            <a:pPr algn="ctr"/>
+            <a:r>
+              <a:rPr sz="1600" b="1">
+                <a:solidFill>
+                  <a:srgbClr val="FFFFFF"/>
+                </a:solidFill>
+                <a:latin typeface="微软雅黑"/>
+                <a:ea typeface="微软雅黑"/>
+                <a:cs typeface="微软雅黑"/>
+              </a:rPr>
+              <a:t>基础 · 必做</a:t>
+            </a:r>
+          </a:p>
+        </p:txBody>
+      </p:sp>
+      <p:sp>
+        <p:nvSpPr>
+          <p:cNvPr id="9" name="TextBox 8"/>
+          <p:cNvSpPr txBox="1"/>
+          <p:nvPr/>
+        </p:nvSpPr>
+        <p:spPr>
+          <a:xfrm>
+            <a:off x="914400" y="2971800"/>
+            <a:ext cx="2844698" cy="2468880"/>
+          </a:xfrm>
+          <a:prstGeom prst="rect">
+            <a:avLst/>
+          </a:prstGeom>
+          <a:noFill/>
+        </p:spPr>
+        <p:txBody>
+          <a:bodyPr wrap="square" anchor="t" lIns="0" rIns="0" tIns="0" bIns="0">
+            <a:spAutoFit/>
+          </a:bodyPr>
+          <a:lstStyle/>
+          <a:p>
+            <a:pPr algn="l">
+              <a:lnSpc>
+                <a:spcPct val="155000"/>
+              </a:lnSpc>
+            </a:pPr>
+            <a:r>
+              <a:rPr sz="1350" b="0">
+                <a:solidFill>
+                  <a:srgbClr val="1C2A33"/>
+                </a:solidFill>
+                <a:latin typeface="楷体"/>
+                <a:ea typeface="楷体"/>
+                <a:cs typeface="楷体"/>
+              </a:rPr>
+              <a:t>提交单元学习反思单（三行完整填写）；誊抄你分享的劳动者故事（通讯终稿）+ 一句分享感受。</a:t>
+            </a:r>
+          </a:p>
+        </p:txBody>
+      </p:sp>
+      <p:sp>
+        <p:nvSpPr>
+          <p:cNvPr id="10" name="Rounded Rectangle 9"/>
+          <p:cNvSpPr/>
+          <p:nvPr/>
+        </p:nvSpPr>
+        <p:spPr>
+          <a:xfrm>
+            <a:off x="4399178" y="2194560"/>
+            <a:ext cx="3393338" cy="3383280"/>
+          </a:xfrm>
+          <a:prstGeom prst="roundRect">
+            <a:avLst/>
+          </a:prstGeom>
+          <a:solidFill>
+            <a:srgbClr val="FFFFFF"/>
+          </a:solidFill>
+          <a:ln w="20320">
+            <a:solidFill>
+              <a:srgbClr val="2E7D6B"/>
+            </a:solidFill>
+          </a:ln>
+          <a:effectLst/>
+        </p:spPr>
+        <p:style>
+          <a:lnRef idx="1">
+            <a:schemeClr val="accent1"/>
+          </a:lnRef>
+          <a:fillRef idx="3">
+            <a:schemeClr val="accent1"/>
+          </a:fillRef>
+          <a:effectRef idx="2">
+            <a:schemeClr val="accent1"/>
+          </a:effectRef>
+          <a:fontRef idx="minor">
+            <a:schemeClr val="lt1"/>
+          </a:fontRef>
+        </p:style>
+        <p:txBody>
+          <a:bodyPr rtlCol="0" anchor="ctr"/>
+          <a:lstStyle/>
+          <a:p>
+            <a:pPr algn="ctr"/>
+          </a:p>
+        </p:txBody>
+      </p:sp>
+      <p:sp>
+        <p:nvSpPr>
+          <p:cNvPr id="11" name="Rectangle 10"/>
+          <p:cNvSpPr/>
+          <p:nvPr/>
+        </p:nvSpPr>
+        <p:spPr>
+          <a:xfrm>
+            <a:off x="4399178" y="2194560"/>
+            <a:ext cx="3393338" cy="548640"/>
+          </a:xfrm>
+          <a:prstGeom prst="rect">
+            <a:avLst/>
+          </a:prstGeom>
+          <a:solidFill>
+            <a:srgbClr val="2E7D6B"/>
+          </a:solidFill>
+          <a:ln>
+            <a:noFill/>
+          </a:ln>
+          <a:effectLst/>
+        </p:spPr>
+        <p:style>
+          <a:lnRef idx="1">
+            <a:schemeClr val="accent1"/>
+          </a:lnRef>
+          <a:fillRef idx="3">
+            <a:schemeClr val="accent1"/>
+          </a:fillRef>
+          <a:effectRef idx="2">
+            <a:schemeClr val="accent1"/>
+          </a:effectRef>
+          <a:fontRef idx="minor">
+            <a:schemeClr val="lt1"/>
+          </a:fontRef>
+        </p:style>
+        <p:txBody>
+          <a:bodyPr rtlCol="0" anchor="ctr"/>
+          <a:lstStyle/>
+          <a:p>
+            <a:pPr algn="ctr"/>
+          </a:p>
+        </p:txBody>
+      </p:sp>
+      <p:sp>
+        <p:nvSpPr>
+          <p:cNvPr id="12" name="TextBox 11"/>
+          <p:cNvSpPr txBox="1"/>
+          <p:nvPr/>
+        </p:nvSpPr>
+        <p:spPr>
+          <a:xfrm>
+            <a:off x="4399178" y="2304288"/>
+            <a:ext cx="3393338" cy="365760"/>
+          </a:xfrm>
+          <a:prstGeom prst="rect">
+            <a:avLst/>
+          </a:prstGeom>
+          <a:noFill/>
+        </p:spPr>
+        <p:txBody>
+          <a:bodyPr wrap="square" anchor="t" lIns="0" rIns="0" tIns="0" bIns="0">
+            <a:spAutoFit/>
+          </a:bodyPr>
+          <a:lstStyle/>
+          <a:p>
+            <a:pPr algn="ctr"/>
+            <a:r>
+              <a:rPr sz="1600" b="1">
+                <a:solidFill>
+                  <a:srgbClr val="FFFFFF"/>
+                </a:solidFill>
+                <a:latin typeface="微软雅黑"/>
+                <a:ea typeface="微软雅黑"/>
+                <a:cs typeface="微软雅黑"/>
+              </a:rPr>
+              <a:t>提升 · 选做</a:t>
+            </a:r>
+          </a:p>
+        </p:txBody>
+      </p:sp>
+      <p:sp>
+        <p:nvSpPr>
+          <p:cNvPr id="13" name="TextBox 12"/>
+          <p:cNvSpPr txBox="1"/>
+          <p:nvPr/>
+        </p:nvSpPr>
+        <p:spPr>
+          <a:xfrm>
+            <a:off x="4673498" y="2971800"/>
+            <a:ext cx="2844698" cy="2468880"/>
+          </a:xfrm>
+          <a:prstGeom prst="rect">
+            <a:avLst/>
+          </a:prstGeom>
+          <a:noFill/>
+        </p:spPr>
+        <p:txBody>
+          <a:bodyPr wrap="square" anchor="t" lIns="0" rIns="0" tIns="0" bIns="0">
+            <a:spAutoFit/>
+          </a:bodyPr>
+          <a:lstStyle/>
+          <a:p>
+            <a:pPr algn="l">
+              <a:lnSpc>
+                <a:spcPct val="155000"/>
+              </a:lnSpc>
+            </a:pPr>
+            <a:r>
+              <a:rPr sz="1350" b="0">
+                <a:solidFill>
+                  <a:srgbClr val="1C2A33"/>
+                </a:solidFill>
+                <a:latin typeface="楷体"/>
+                <a:ea typeface="楷体"/>
+                <a:cs typeface="楷体"/>
+              </a:rPr>
+              <a:t>写一段150字单元学习总结：①点明本单元最重要的一个方法；②举一个具体例子；③说一个想在下单元继续提升的方面。</a:t>
+            </a:r>
+          </a:p>
+        </p:txBody>
+      </p:sp>
+      <p:sp>
+        <p:nvSpPr>
+          <p:cNvPr id="14" name="Rounded Rectangle 13"/>
+          <p:cNvSpPr/>
+          <p:nvPr/>
+        </p:nvSpPr>
+        <p:spPr>
+          <a:xfrm>
+            <a:off x="8158276" y="2194560"/>
+            <a:ext cx="3393338" cy="3383280"/>
+          </a:xfrm>
+          <a:prstGeom prst="roundRect">
+            <a:avLst/>
+          </a:prstGeom>
+          <a:solidFill>
+            <a:srgbClr val="FFFFFF"/>
+          </a:solidFill>
+          <a:ln w="20320">
+            <a:solidFill>
+              <a:srgbClr val="C8A86B"/>
+            </a:solidFill>
+          </a:ln>
+          <a:effectLst/>
+        </p:spPr>
+        <p:style>
+          <a:lnRef idx="1">
+            <a:schemeClr val="accent1"/>
+          </a:lnRef>
+          <a:fillRef idx="3">
+            <a:schemeClr val="accent1"/>
+          </a:fillRef>
+          <a:effectRef idx="2">
+            <a:schemeClr val="accent1"/>
+          </a:effectRef>
+          <a:fontRef idx="minor">
+            <a:schemeClr val="lt1"/>
+          </a:fontRef>
+        </p:style>
+        <p:txBody>
+          <a:bodyPr rtlCol="0" anchor="ctr"/>
+          <a:lstStyle/>
+          <a:p>
+            <a:pPr algn="ctr"/>
+          </a:p>
+        </p:txBody>
+      </p:sp>
+      <p:sp>
+        <p:nvSpPr>
+          <p:cNvPr id="15" name="Rectangle 14"/>
+          <p:cNvSpPr/>
+          <p:nvPr/>
+        </p:nvSpPr>
+        <p:spPr>
+          <a:xfrm>
+            <a:off x="8158276" y="2194560"/>
+            <a:ext cx="3393338" cy="548640"/>
           </a:xfrm>
           <a:prstGeom prst="rect">
             <a:avLst/>
@@ -8019,14 +9984,133 @@
       </p:sp>
       <p:sp>
         <p:nvSpPr>
-          <p:cNvPr id="5" name="Rectangle 4"/>
+          <p:cNvPr id="16" name="TextBox 15"/>
+          <p:cNvSpPr txBox="1"/>
+          <p:nvPr/>
+        </p:nvSpPr>
+        <p:spPr>
+          <a:xfrm>
+            <a:off x="8158276" y="2304288"/>
+            <a:ext cx="3393338" cy="365760"/>
+          </a:xfrm>
+          <a:prstGeom prst="rect">
+            <a:avLst/>
+          </a:prstGeom>
+          <a:noFill/>
+        </p:spPr>
+        <p:txBody>
+          <a:bodyPr wrap="square" anchor="t" lIns="0" rIns="0" tIns="0" bIns="0">
+            <a:spAutoFit/>
+          </a:bodyPr>
+          <a:lstStyle/>
+          <a:p>
+            <a:pPr algn="ctr"/>
+            <a:r>
+              <a:rPr sz="1600" b="1">
+                <a:solidFill>
+                  <a:srgbClr val="FFFFFF"/>
+                </a:solidFill>
+                <a:latin typeface="微软雅黑"/>
+                <a:ea typeface="微软雅黑"/>
+                <a:cs typeface="微软雅黑"/>
+              </a:rPr>
+              <a:t>拓展 · 衔接</a:t>
+            </a:r>
+          </a:p>
+        </p:txBody>
+      </p:sp>
+      <p:sp>
+        <p:nvSpPr>
+          <p:cNvPr id="17" name="TextBox 16"/>
+          <p:cNvSpPr txBox="1"/>
+          <p:nvPr/>
+        </p:nvSpPr>
+        <p:spPr>
+          <a:xfrm>
+            <a:off x="8432596" y="2971800"/>
+            <a:ext cx="2844698" cy="2468880"/>
+          </a:xfrm>
+          <a:prstGeom prst="rect">
+            <a:avLst/>
+          </a:prstGeom>
+          <a:noFill/>
+        </p:spPr>
+        <p:txBody>
+          <a:bodyPr wrap="square" anchor="t" lIns="0" rIns="0" tIns="0" bIns="0">
+            <a:spAutoFit/>
+          </a:bodyPr>
+          <a:lstStyle/>
+          <a:p>
+            <a:pPr algn="l">
+              <a:lnSpc>
+                <a:spcPct val="155000"/>
+              </a:lnSpc>
+            </a:pPr>
+            <a:r>
+              <a:rPr sz="1350" b="0">
+                <a:solidFill>
+                  <a:srgbClr val="1C2A33"/>
+                </a:solidFill>
+                <a:latin typeface="楷体"/>
+                <a:ea typeface="楷体"/>
+                <a:cs typeface="楷体"/>
+              </a:rPr>
+              <a:t>把"以事写人"用到课外阅读与写作中，继续关注身边的劳动者——它不只是这一单元的事。</a:t>
+            </a:r>
+          </a:p>
+        </p:txBody>
+      </p:sp>
+      <p:sp>
+        <p:nvSpPr>
+          <p:cNvPr id="18" name="Rounded Rectangle 17"/>
           <p:cNvSpPr/>
           <p:nvPr/>
         </p:nvSpPr>
         <p:spPr>
           <a:xfrm>
-            <a:off x="640080" y="1737360"/>
-            <a:ext cx="54864" cy="431800"/>
+            <a:off x="640080" y="5166360"/>
+            <a:ext cx="10911535" cy="1325880"/>
+          </a:xfrm>
+          <a:prstGeom prst="roundRect">
+            <a:avLst/>
+          </a:prstGeom>
+          <a:solidFill>
+            <a:srgbClr val="1C2A33"/>
+          </a:solidFill>
+          <a:effectLst/>
+        </p:spPr>
+        <p:style>
+          <a:lnRef idx="1">
+            <a:schemeClr val="accent1"/>
+          </a:lnRef>
+          <a:fillRef idx="3">
+            <a:schemeClr val="accent1"/>
+          </a:fillRef>
+          <a:effectRef idx="2">
+            <a:schemeClr val="accent1"/>
+          </a:effectRef>
+          <a:fontRef idx="minor">
+            <a:schemeClr val="lt1"/>
+          </a:fontRef>
+        </p:style>
+        <p:txBody>
+          <a:bodyPr rtlCol="0" anchor="ctr"/>
+          <a:lstStyle/>
+          <a:p>
+            <a:pPr algn="ctr"/>
+          </a:p>
+        </p:txBody>
+      </p:sp>
+      <p:sp>
+        <p:nvSpPr>
+          <p:cNvPr id="19" name="Rectangle 18"/>
+          <p:cNvSpPr/>
+          <p:nvPr/>
+        </p:nvSpPr>
+        <p:spPr>
+          <a:xfrm>
+            <a:off x="914400" y="5394960"/>
+            <a:ext cx="54864" cy="279400"/>
           </a:xfrm>
           <a:prstGeom prst="rect">
             <a:avLst/>
@@ -8063,14 +10147,14 @@
       </p:sp>
       <p:sp>
         <p:nvSpPr>
-          <p:cNvPr id="6" name="TextBox 5"/>
+          <p:cNvPr id="20" name="TextBox 19"/>
           <p:cNvSpPr txBox="1"/>
           <p:nvPr/>
         </p:nvSpPr>
         <p:spPr>
           <a:xfrm>
-            <a:off x="868680" y="1645920"/>
-            <a:ext cx="10682935" cy="2194560"/>
+            <a:off x="1143000" y="5303520"/>
+            <a:ext cx="10180015" cy="1097280"/>
           </a:xfrm>
           <a:prstGeom prst="rect">
             <a:avLst/>
@@ -8084,44 +10168,45 @@
           <a:lstStyle/>
           <a:p>
             <a:pPr algn="l">
-              <a:lnSpc>
-                <a:spcPct val="150000"/>
-              </a:lnSpc>
               <a:spcAft>
-                <a:spcPts val="1000"/>
+                <a:spcPts val="400"/>
               </a:spcAft>
             </a:pPr>
             <a:r>
-              <a:rPr sz="2200" b="0">
-                <a:solidFill>
-                  <a:srgbClr val="1C2A33"/>
+              <a:rPr sz="1600" b="1">
+                <a:solidFill>
+                  <a:srgbClr val="C8A86B"/>
                 </a:solidFill>
                 <a:latin typeface="楷体"/>
                 <a:ea typeface="楷体"/>
                 <a:cs typeface="楷体"/>
               </a:rPr>
-              <a:t>本单元主题：劳动光荣。把今天学到的方法带进下一篇——自己读、自己想、自己写。</a:t>
-            </a:r>
-          </a:p>
-          <a:p>
-            <a:pPr algn="l"/>
-            <a:r>
-              <a:rPr sz="1600" b="1">
-                <a:solidFill>
-                  <a:srgbClr val="B23A2A"/>
-                </a:solidFill>
-                <a:latin typeface="微软雅黑"/>
-                <a:ea typeface="微软雅黑"/>
-                <a:cs typeface="微软雅黑"/>
-              </a:rPr>
-              <a:t>方法迁移：圈关键信息 → 理事件脉络 → 析人物精神</a:t>
-            </a:r>
-          </a:p>
-        </p:txBody>
-      </p:sp>
-      <p:sp>
-        <p:nvSpPr>
-          <p:cNvPr id="7" name="TextBox 6"/>
+              <a:t>单元收官口诀</a:t>
+            </a:r>
+          </a:p>
+          <a:p>
+            <a:pPr algn="l">
+              <a:lnSpc>
+                <a:spcPct val="145000"/>
+              </a:lnSpc>
+            </a:pPr>
+            <a:r>
+              <a:rPr sz="1350" b="0">
+                <a:solidFill>
+                  <a:srgbClr val="FFFFFF"/>
+                </a:solidFill>
+                <a:latin typeface="楷体"/>
+                <a:ea typeface="楷体"/>
+                <a:cs typeface="楷体"/>
+              </a:rPr>
+              <a:t>读 → 写 → 说 → 用：以事写人，好自现。下一站——第三单元"生命的诗意"。</a:t>
+            </a:r>
+          </a:p>
+        </p:txBody>
+      </p:sp>
+      <p:sp>
+        <p:nvSpPr>
+          <p:cNvPr id="21" name="TextBox 20"/>
           <p:cNvSpPr txBox="1"/>
           <p:nvPr/>
         </p:nvSpPr>
